--- a/presentations/b03-hr-identity/B03_HR_Identity_Narrated.pptx
+++ b/presentations/b03-hr-identity/B03_HR_Identity_Narrated.pptx
@@ -117,26 +117,26 @@
   <p:extLst>
     <p:ext uri="{521415D9-36F7-43E2-AB2F-B90AF26B5E84}">
       <p14:sectionLst xmlns:p14="http://schemas.microsoft.com/office/powerpoint/2010/main">
-        <p14:section name="Why HR decides" id="{061BD5DE-7B01-C5F0-FC0A-9C938380A720}">
+        <p14:section name="Why HR decides" id="{3EDD7C59-8318-FDD1-BBF8-20C4D34FC889}">
           <p14:sldIdLst>
             <p14:sldId id="256"/>
             <p14:sldId id="257"/>
             <p14:sldId id="258"/>
           </p14:sldIdLst>
         </p14:section>
-        <p14:section name="What we should do" id="{8C48B47D-6938-1039-3C60-072DAD981E95}">
+        <p14:section name="What we should do" id="{90B6B281-E1B0-4B64-A21C-100967F343E3}">
           <p14:sldIdLst>
             <p14:sldId id="259"/>
             <p14:sldId id="260"/>
             <p14:sldId id="261"/>
           </p14:sldIdLst>
         </p14:section>
-        <p14:section name="Who owns it" id="{2C4D6FE0-E4F0-1D19-DDF1-1F90A3AFB502}">
+        <p14:section name="Who owns it" id="{A8A206A4-3B33-4AF1-3E4C-823C2E912C4E}">
           <p14:sldIdLst>
             <p14:sldId id="262"/>
           </p14:sldIdLst>
         </p14:section>
-        <p14:section name="How to do it" id="{2608A724-A362-BA3A-3807-B751EA46EC09}">
+        <p14:section name="How to do it" id="{13CD08CA-5AFB-6881-4AB9-B3BB02BF7BE2}">
           <p14:sldIdLst>
             <p14:sldId id="263"/>
             <p14:sldId id="264"/>
@@ -144,7 +144,7 @@
             <p14:sldId id="266"/>
           </p14:sldIdLst>
         </p14:section>
-        <p14:section name="Backup" id="{8AC1C2F8-8174-88E3-5FB4-19BA504E362E}">
+        <p14:section name="Backup" id="{FC1024E8-21A6-2722-C676-DDC6501BD909}">
           <p14:sldIdLst/>
         </p14:section>
       </p14:sectionLst>
@@ -181,7 +181,7 @@
     </p:spTree>
     <p:extLst>
       <p:ext uri="{BB962C8B-B14F-4D97-AF65-F5344CB8AC3E}">
-        <p14:creationId xmlns:p14="http://schemas.microsoft.com/office/powerpoint/2010/main" val="17043569"/>
+        <p14:creationId xmlns:p14="http://schemas.microsoft.com/office/powerpoint/2010/main" val="1521767102"/>
       </p:ext>
     </p:extLst>
   </p:cSld>
@@ -327,7 +327,7 @@
           <a:p>
             <a:r>
               <a:rPr lang="en-US" dirty="0"/>
-              <a:t>[0:00–0:30]  This briefing comes from Book 03 of the Modernization Workbook, HR-Driven Identity.
+              <a:t>[0:00–0:30]  This briefing comes from Book 03 of the Federal Modernization Workbook, HR-Driven Identity.
 It has one proposal, and I'll take it through four questions, the way I'd take it to leadership: why it matters, what we should do, who has to be involved, and how we'd carry it out and know it's working.
 Book 02 made the case that identity is now where every access decision is made. This book asks where the facts behind that identity should come from. The answer is the HR system of record, starting now.
 Workbook: Book 03, index and Chapter 01.</a:t>
@@ -1543,7 +1543,7 @@
                   <a:schemeClr val="accent5"/>
                 </a:solidFill>
               </a:rPr>
-              <a:t>Modernization Workbook  ·  Book 03 HR-Driven Identity</a:t>
+              <a:t>Federal Modernization Workbook  ·  Book 03 HR-Driven Identity</a:t>
             </a:r>
             <a:endParaRPr lang="en-US" sz="1000" dirty="0"/>
           </a:p>
@@ -2033,7 +2033,87 @@
       </p:sp>
       <p:sp>
         <p:nvSpPr>
-          <p:cNvPr id="4" name="Agenda line"/>
+          <p:cNvPr id="4" name="Presenter"/>
+          <p:cNvSpPr txBox="1"/>
+          <p:nvPr/>
+        </p:nvSpPr>
+        <p:spPr>
+          <a:xfrm>
+            <a:off x="731520" y="5897880"/>
+            <a:ext cx="6858000" cy="365760"/>
+          </a:xfrm>
+          <a:prstGeom prst="rect">
+            <a:avLst/>
+          </a:prstGeom>
+          <a:noFill/>
+          <a:ln/>
+        </p:spPr>
+        <p:txBody>
+          <a:bodyPr wrap="square" lIns="0" tIns="0" rIns="0" bIns="0" rtlCol="0" anchor="ctr"/>
+          <a:lstStyle/>
+          <a:p>
+            <a:pPr marL="0" indent="0">
+              <a:buNone/>
+            </a:pPr>
+            <a:r>
+              <a:rPr lang="en-US" sz="1600" dirty="0">
+                <a:solidFill>
+                  <a:srgbClr val="64748B"/>
+                </a:solidFill>
+              </a:rPr>
+              <a:t>Presented by  </a:t>
+            </a:r>
+            <a:r>
+              <a:rPr lang="en-US" sz="1600" b="1" dirty="0">
+                <a:solidFill>
+                  <a:srgbClr val="1F2A44"/>
+                </a:solidFill>
+              </a:rPr>
+              <a:t>Michael F. Stratton</a:t>
+            </a:r>
+            <a:endParaRPr lang="en-US" sz="1600" dirty="0"/>
+          </a:p>
+        </p:txBody>
+      </p:sp>
+      <p:sp>
+        <p:nvSpPr>
+          <p:cNvPr id="5" name="Disclaimer"/>
+          <p:cNvSpPr txBox="1"/>
+          <p:nvPr/>
+        </p:nvSpPr>
+        <p:spPr>
+          <a:xfrm>
+            <a:off x="731520" y="6309360"/>
+            <a:ext cx="8686800" cy="274320"/>
+          </a:xfrm>
+          <a:prstGeom prst="rect">
+            <a:avLst/>
+          </a:prstGeom>
+          <a:noFill/>
+          <a:ln/>
+        </p:spPr>
+        <p:txBody>
+          <a:bodyPr wrap="square" lIns="0" tIns="0" rIns="0" bIns="0" rtlCol="0" anchor="ctr"/>
+          <a:lstStyle/>
+          <a:p>
+            <a:pPr marL="0" indent="0">
+              <a:buNone/>
+            </a:pPr>
+            <a:r>
+              <a:rPr lang="en-US" sz="1050" dirty="0">
+                <a:solidFill>
+                  <a:srgbClr val="64748B"/>
+                </a:solidFill>
+              </a:rPr>
+              <a:t>Not an official U.S. government publication. Independent technical analysis; not reviewed or endorsed by any federal agency.</a:t>
+            </a:r>
+            <a:endParaRPr lang="en-US" sz="1050" dirty="0"/>
+          </a:p>
+        </p:txBody>
+      </p:sp>
+      <p:sp>
+        <p:nvSpPr>
+          <p:cNvPr id="6" name="Agenda line"/>
           <p:cNvSpPr txBox="1"/>
           <p:nvPr/>
         </p:nvSpPr>
@@ -2117,7 +2197,7 @@
       </p:sp>
       <p:sp>
         <p:nvSpPr>
-          <p:cNvPr id="5" name="Series line"/>
+          <p:cNvPr id="7" name="Series line"/>
           <p:cNvSpPr txBox="1"/>
           <p:nvPr/>
         </p:nvSpPr>
@@ -2145,7 +2225,7 @@
                   <a:srgbClr val="1F2A44"/>
                 </a:solidFill>
               </a:rPr>
-              <a:t>Modernization Workbook</a:t>
+              <a:t>Federal Modernization Workbook</a:t>
             </a:r>
             <a:endParaRPr lang="en-US" sz="1600" dirty="0"/>
           </a:p>
@@ -2167,11 +2247,11 @@
       </p:sp>
       <p:pic>
         <p:nvPicPr>
-          <p:cNvPr id="6" name="Narration">
+          <p:cNvPr id="8" name="Narration" descr="Narration for this slide; captions available">
             <a:hlinkClick r:id="" action="ppaction://media"/>
             <a:extLst>
               <a:ext uri="{FF2B5EF4-FFF2-40B4-BE49-F238E27FC236}">
-                <a16:creationId xmlns:a16="http://schemas.microsoft.com/office/drawing/2014/main" id="{8009FC97-DB18-EF02-BDF7-0FB4BBA1F161}"/>
+                <a16:creationId xmlns:a16="http://schemas.microsoft.com/office/drawing/2014/main" id="{B49484A2-B0F4-E3F3-0EA4-7FAD78DAC4B8}"/>
               </a:ext>
             </a:extLst>
           </p:cNvPr>
@@ -2182,7 +2262,17 @@
             <a:audioFile r:link="rId2"/>
             <p:extLst>
               <p:ext uri="{DAA4B4D4-6D71-4841-9C94-3DE7FCFB9230}">
-                <p14:media xmlns:p14="http://schemas.microsoft.com/office/powerpoint/2010/main" r:embed="rId1"/>
+                <p14:media xmlns:p14="http://schemas.microsoft.com/office/powerpoint/2010/main" r:embed="rId1">
+                  <p14:extLst>
+                    <p:ext uri="{3AFAAA56-56D3-431D-BCD4-E75A35582382}">
+                      <p173:tracksInfo xmlns:p173="http://schemas.microsoft.com/office/powerpoint/2017/3/main" displayLoc="slide">
+                        <p173:trackLst>
+                          <p173:track id="{1D422634-24FB-4BBE-8AB5-7D35321FD3D3}" label="English (captions)" lang="en-US" r:embed="rId6"/>
+                        </p173:trackLst>
+                      </p173:tracksInfo>
+                    </p:ext>
+                  </p14:extLst>
+                </p14:media>
               </p:ext>
             </p:extLst>
           </p:nvPr>
@@ -2210,10 +2300,10 @@
   </p:clrMapOvr>
   <mc:AlternateContent xmlns:mc="http://schemas.openxmlformats.org/markup-compatibility/2006">
     <mc:Choice xmlns:p14="http://schemas.microsoft.com/office/powerpoint/2010/main" Requires="p14">
-      <p:transition spd="slow" p14:dur="2000" advTm="31020"/>
+      <p:transition spd="slow" p14:dur="2000" advTm="31460"/>
     </mc:Choice>
     <mc:Fallback>
-      <p:transition spd="slow" advTm="31020"/>
+      <p:transition spd="slow" advTm="31460"/>
     </mc:Fallback>
   </mc:AlternateContent>
   <p:timing>
@@ -2247,9 +2337,9 @@
                                   <p:childTnLst>
                                     <p:cmd type="call" cmd="playFrom(0.0)">
                                       <p:cBhvr>
-                                        <p:cTn id="6" dur="30024" fill="hold"/>
+                                        <p:cTn id="6" dur="30456" fill="hold"/>
                                         <p:tgtEl>
-                                          <p:spTgt spid="6"/>
+                                          <p:spTgt spid="8"/>
                                         </p:tgtEl>
                                       </p:cBhvr>
                                     </p:cmd>
@@ -2349,7 +2439,13 @@
       </p:sp>
       <p:sp>
         <p:nvSpPr>
-          <p:cNvPr id="3" name="Tag How"/>
+          <p:cNvPr id="3" name="Tag How">
+            <a:extLst>
+              <a:ext uri="{C183D7F6-B498-43B3-948B-1728B52AA6E4}">
+                <adec:decorative xmlns:adec="http://schemas.microsoft.com/office/drawing/2017/decorative" val="1"/>
+              </a:ext>
+            </a:extLst>
+          </p:cNvPr>
           <p:cNvSpPr/>
           <p:nvPr/>
         </p:nvSpPr>
@@ -2412,7 +2508,13 @@
       </p:sp>
       <p:sp>
         <p:nvSpPr>
-          <p:cNvPr id="5" name="Phase 0"/>
+          <p:cNvPr id="5" name="Phase 0">
+            <a:extLst>
+              <a:ext uri="{C183D7F6-B498-43B3-948B-1728B52AA6E4}">
+                <adec:decorative xmlns:adec="http://schemas.microsoft.com/office/drawing/2017/decorative" val="1"/>
+              </a:ext>
+            </a:extLst>
+          </p:cNvPr>
           <p:cNvSpPr/>
           <p:nvPr/>
         </p:nvSpPr>
@@ -2499,7 +2601,13 @@
       </p:sp>
       <p:sp>
         <p:nvSpPr>
-          <p:cNvPr id="7" name="Phase 1"/>
+          <p:cNvPr id="7" name="Phase 1">
+            <a:extLst>
+              <a:ext uri="{C183D7F6-B498-43B3-948B-1728B52AA6E4}">
+                <adec:decorative xmlns:adec="http://schemas.microsoft.com/office/drawing/2017/decorative" val="1"/>
+              </a:ext>
+            </a:extLst>
+          </p:cNvPr>
           <p:cNvSpPr/>
           <p:nvPr/>
         </p:nvSpPr>
@@ -2586,7 +2694,13 @@
       </p:sp>
       <p:sp>
         <p:nvSpPr>
-          <p:cNvPr id="9" name="Phase 2"/>
+          <p:cNvPr id="9" name="Phase 2">
+            <a:extLst>
+              <a:ext uri="{C183D7F6-B498-43B3-948B-1728B52AA6E4}">
+                <adec:decorative xmlns:adec="http://schemas.microsoft.com/office/drawing/2017/decorative" val="1"/>
+              </a:ext>
+            </a:extLst>
+          </p:cNvPr>
           <p:cNvSpPr/>
           <p:nvPr/>
         </p:nvSpPr>
@@ -2673,7 +2787,13 @@
       </p:sp>
       <p:sp>
         <p:nvSpPr>
-          <p:cNvPr id="11" name="Phase 3"/>
+          <p:cNvPr id="11" name="Phase 3">
+            <a:extLst>
+              <a:ext uri="{C183D7F6-B498-43B3-948B-1728B52AA6E4}">
+                <adec:decorative xmlns:adec="http://schemas.microsoft.com/office/drawing/2017/decorative" val="1"/>
+              </a:ext>
+            </a:extLst>
+          </p:cNvPr>
           <p:cNvSpPr/>
           <p:nvPr/>
         </p:nvSpPr>
@@ -2760,7 +2880,13 @@
       </p:sp>
       <p:sp>
         <p:nvSpPr>
-          <p:cNvPr id="13" name="Phase 4"/>
+          <p:cNvPr id="13" name="Phase 4">
+            <a:extLst>
+              <a:ext uri="{C183D7F6-B498-43B3-948B-1728B52AA6E4}">
+                <adec:decorative xmlns:adec="http://schemas.microsoft.com/office/drawing/2017/decorative" val="1"/>
+              </a:ext>
+            </a:extLst>
+          </p:cNvPr>
           <p:cNvSpPr/>
           <p:nvPr/>
         </p:nvSpPr>
@@ -2847,7 +2973,13 @@
       </p:sp>
       <p:sp>
         <p:nvSpPr>
-          <p:cNvPr id="15" name="Phase 5"/>
+          <p:cNvPr id="15" name="Phase 5">
+            <a:extLst>
+              <a:ext uri="{C183D7F6-B498-43B3-948B-1728B52AA6E4}">
+                <adec:decorative xmlns:adec="http://schemas.microsoft.com/office/drawing/2017/decorative" val="1"/>
+              </a:ext>
+            </a:extLst>
+          </p:cNvPr>
           <p:cNvSpPr/>
           <p:nvPr/>
         </p:nvSpPr>
@@ -2934,7 +3066,13 @@
       </p:sp>
       <p:sp>
         <p:nvSpPr>
-          <p:cNvPr id="17" name="Phase 6"/>
+          <p:cNvPr id="17" name="Phase 6">
+            <a:extLst>
+              <a:ext uri="{C183D7F6-B498-43B3-948B-1728B52AA6E4}">
+                <adec:decorative xmlns:adec="http://schemas.microsoft.com/office/drawing/2017/decorative" val="1"/>
+              </a:ext>
+            </a:extLst>
+          </p:cNvPr>
           <p:cNvSpPr/>
           <p:nvPr/>
         </p:nvSpPr>
@@ -3115,7 +3253,13 @@
       </p:sp>
       <p:sp>
         <p:nvSpPr>
-          <p:cNvPr id="20" name="Gates"/>
+          <p:cNvPr id="20" name="Gates">
+            <a:extLst>
+              <a:ext uri="{C183D7F6-B498-43B3-948B-1728B52AA6E4}">
+                <adec:decorative xmlns:adec="http://schemas.microsoft.com/office/drawing/2017/decorative" val="1"/>
+              </a:ext>
+            </a:extLst>
+          </p:cNvPr>
           <p:cNvSpPr/>
           <p:nvPr/>
         </p:nvSpPr>
@@ -3149,7 +3293,13 @@
       </p:sp>
       <p:sp>
         <p:nvSpPr>
-          <p:cNvPr id="21" name="Icon FaClipboardCheck"/>
+          <p:cNvPr id="21" name="Icon FaClipboardCheck">
+            <a:extLst>
+              <a:ext uri="{C183D7F6-B498-43B3-948B-1728B52AA6E4}">
+                <adec:decorative xmlns:adec="http://schemas.microsoft.com/office/drawing/2017/decorative" val="1"/>
+              </a:ext>
+            </a:extLst>
+          </p:cNvPr>
           <p:cNvSpPr/>
           <p:nvPr/>
         </p:nvSpPr>
@@ -3174,7 +3324,13 @@
       </p:sp>
       <p:pic>
         <p:nvPicPr>
-          <p:cNvPr id="22" name="Image 0" descr="C:\Users\whale\git\mwb-b03\presentations\_build\icons\FaClipboardCheck.png"/>
+          <p:cNvPr id="22" name="Image 0">
+            <a:extLst>
+              <a:ext uri="{C183D7F6-B498-43B3-948B-1728B52AA6E4}">
+                <adec:decorative xmlns:adec="http://schemas.microsoft.com/office/drawing/2017/decorative" val="1"/>
+              </a:ext>
+            </a:extLst>
+          </p:cNvPr>
           <p:cNvPicPr>
             <a:picLocks noChangeAspect="1"/>
           </p:cNvPicPr>
@@ -3323,11 +3479,11 @@
       </p:sp>
       <p:pic>
         <p:nvPicPr>
-          <p:cNvPr id="26" name="Narration">
+          <p:cNvPr id="26" name="Narration" descr="Narration for this slide; captions available">
             <a:hlinkClick r:id="" action="ppaction://media"/>
             <a:extLst>
               <a:ext uri="{FF2B5EF4-FFF2-40B4-BE49-F238E27FC236}">
-                <a16:creationId xmlns:a16="http://schemas.microsoft.com/office/drawing/2014/main" id="{C17BB143-5B81-2723-A42B-44C6408A9EA4}"/>
+                <a16:creationId xmlns:a16="http://schemas.microsoft.com/office/drawing/2014/main" id="{11584D60-6A55-5F85-7538-0AA36E5E103A}"/>
               </a:ext>
             </a:extLst>
           </p:cNvPr>
@@ -3338,7 +3494,17 @@
             <a:audioFile r:link="rId2"/>
             <p:extLst>
               <p:ext uri="{DAA4B4D4-6D71-4841-9C94-3DE7FCFB9230}">
-                <p14:media xmlns:p14="http://schemas.microsoft.com/office/powerpoint/2010/main" r:embed="rId1"/>
+                <p14:media xmlns:p14="http://schemas.microsoft.com/office/powerpoint/2010/main" r:embed="rId1">
+                  <p14:extLst>
+                    <p:ext uri="{3AFAAA56-56D3-431D-BCD4-E75A35582382}">
+                      <p173:tracksInfo xmlns:p173="http://schemas.microsoft.com/office/powerpoint/2017/3/main" displayLoc="slide">
+                        <p173:trackLst>
+                          <p173:track id="{0DBCACDF-07D6-4E1E-8BDA-5D6647BF01BB}" label="English (captions)" lang="en-US" r:embed="rId7"/>
+                        </p173:trackLst>
+                      </p173:tracksInfo>
+                    </p:ext>
+                  </p14:extLst>
+                </p14:media>
               </p:ext>
             </p:extLst>
           </p:nvPr>
@@ -3505,7 +3671,13 @@
       </p:sp>
       <p:sp>
         <p:nvSpPr>
-          <p:cNvPr id="3" name="Tag How"/>
+          <p:cNvPr id="3" name="Tag How">
+            <a:extLst>
+              <a:ext uri="{C183D7F6-B498-43B3-948B-1728B52AA6E4}">
+                <adec:decorative xmlns:adec="http://schemas.microsoft.com/office/drawing/2017/decorative" val="1"/>
+              </a:ext>
+            </a:extLst>
+          </p:cNvPr>
           <p:cNvSpPr/>
           <p:nvPr/>
         </p:nvSpPr>
@@ -3716,7 +3888,13 @@
       </p:sp>
       <p:sp>
         <p:nvSpPr>
-          <p:cNvPr id="7" name="Ask box"/>
+          <p:cNvPr id="7" name="Ask box">
+            <a:extLst>
+              <a:ext uri="{C183D7F6-B498-43B3-948B-1728B52AA6E4}">
+                <adec:decorative xmlns:adec="http://schemas.microsoft.com/office/drawing/2017/decorative" val="1"/>
+              </a:ext>
+            </a:extLst>
+          </p:cNvPr>
           <p:cNvSpPr/>
           <p:nvPr/>
         </p:nvSpPr>
@@ -3750,7 +3928,13 @@
       </p:sp>
       <p:sp>
         <p:nvSpPr>
-          <p:cNvPr id="8" name="Icon FaUserCheck"/>
+          <p:cNvPr id="8" name="Icon FaUserCheck">
+            <a:extLst>
+              <a:ext uri="{C183D7F6-B498-43B3-948B-1728B52AA6E4}">
+                <adec:decorative xmlns:adec="http://schemas.microsoft.com/office/drawing/2017/decorative" val="1"/>
+              </a:ext>
+            </a:extLst>
+          </p:cNvPr>
           <p:cNvSpPr/>
           <p:nvPr/>
         </p:nvSpPr>
@@ -3775,7 +3959,13 @@
       </p:sp>
       <p:pic>
         <p:nvPicPr>
-          <p:cNvPr id="9" name="Image 0" descr="C:\Users\whale\git\mwb-b03\presentations\_build\icons\FaUserCheck.png"/>
+          <p:cNvPr id="9" name="Image 0">
+            <a:extLst>
+              <a:ext uri="{C183D7F6-B498-43B3-948B-1728B52AA6E4}">
+                <adec:decorative xmlns:adec="http://schemas.microsoft.com/office/drawing/2017/decorative" val="1"/>
+              </a:ext>
+            </a:extLst>
+          </p:cNvPr>
           <p:cNvPicPr>
             <a:picLocks noChangeAspect="1"/>
           </p:cNvPicPr>
@@ -3949,7 +4139,13 @@
       </p:sp>
       <p:sp>
         <p:nvSpPr>
-          <p:cNvPr id="12" name="Next"/>
+          <p:cNvPr id="12" name="Next">
+            <a:extLst>
+              <a:ext uri="{C183D7F6-B498-43B3-948B-1728B52AA6E4}">
+                <adec:decorative xmlns:adec="http://schemas.microsoft.com/office/drawing/2017/decorative" val="1"/>
+              </a:ext>
+            </a:extLst>
+          </p:cNvPr>
           <p:cNvSpPr/>
           <p:nvPr/>
         </p:nvSpPr>
@@ -3983,7 +4179,13 @@
       </p:sp>
       <p:sp>
         <p:nvSpPr>
-          <p:cNvPr id="13" name="Icon FaBook"/>
+          <p:cNvPr id="13" name="Icon FaBook">
+            <a:extLst>
+              <a:ext uri="{C183D7F6-B498-43B3-948B-1728B52AA6E4}">
+                <adec:decorative xmlns:adec="http://schemas.microsoft.com/office/drawing/2017/decorative" val="1"/>
+              </a:ext>
+            </a:extLst>
+          </p:cNvPr>
           <p:cNvSpPr/>
           <p:nvPr/>
         </p:nvSpPr>
@@ -4008,7 +4210,13 @@
       </p:sp>
       <p:pic>
         <p:nvPicPr>
-          <p:cNvPr id="14" name="Image 1" descr="C:\Users\whale\git\mwb-b03\presentations\_build\icons\FaBook.png"/>
+          <p:cNvPr id="14" name="Image 1">
+            <a:extLst>
+              <a:ext uri="{C183D7F6-B498-43B3-948B-1728B52AA6E4}">
+                <adec:decorative xmlns:adec="http://schemas.microsoft.com/office/drawing/2017/decorative" val="1"/>
+              </a:ext>
+            </a:extLst>
+          </p:cNvPr>
           <p:cNvPicPr>
             <a:picLocks noChangeAspect="1"/>
           </p:cNvPicPr>
@@ -4121,11 +4329,11 @@
       </p:sp>
       <p:pic>
         <p:nvPicPr>
-          <p:cNvPr id="16" name="Narration">
+          <p:cNvPr id="16" name="Narration" descr="Narration for this slide; captions available">
             <a:hlinkClick r:id="" action="ppaction://media"/>
             <a:extLst>
               <a:ext uri="{FF2B5EF4-FFF2-40B4-BE49-F238E27FC236}">
-                <a16:creationId xmlns:a16="http://schemas.microsoft.com/office/drawing/2014/main" id="{ECC6EA03-BCBF-2299-5D63-C2F24E6D2155}"/>
+                <a16:creationId xmlns:a16="http://schemas.microsoft.com/office/drawing/2014/main" id="{D776F4C7-06AB-0465-7033-581314F04920}"/>
               </a:ext>
             </a:extLst>
           </p:cNvPr>
@@ -4136,7 +4344,17 @@
             <a:audioFile r:link="rId2"/>
             <p:extLst>
               <p:ext uri="{DAA4B4D4-6D71-4841-9C94-3DE7FCFB9230}">
-                <p14:media xmlns:p14="http://schemas.microsoft.com/office/powerpoint/2010/main" r:embed="rId1"/>
+                <p14:media xmlns:p14="http://schemas.microsoft.com/office/powerpoint/2010/main" r:embed="rId1">
+                  <p14:extLst>
+                    <p:ext uri="{3AFAAA56-56D3-431D-BCD4-E75A35582382}">
+                      <p173:tracksInfo xmlns:p173="http://schemas.microsoft.com/office/powerpoint/2017/3/main" displayLoc="slide">
+                        <p173:trackLst>
+                          <p173:track id="{46C3E400-F4B2-4F0E-93CD-6F743958342F}" label="English (captions)" lang="en-US" r:embed="rId8"/>
+                        </p173:trackLst>
+                      </p173:tracksInfo>
+                    </p:ext>
+                  </p14:extLst>
+                </p14:media>
               </p:ext>
             </p:extLst>
           </p:nvPr>
@@ -4303,7 +4521,13 @@
       </p:sp>
       <p:sp>
         <p:nvSpPr>
-          <p:cNvPr id="3" name="Tag Why"/>
+          <p:cNvPr id="3" name="Tag Why">
+            <a:extLst>
+              <a:ext uri="{C183D7F6-B498-43B3-948B-1728B52AA6E4}">
+                <adec:decorative xmlns:adec="http://schemas.microsoft.com/office/drawing/2017/decorative" val="1"/>
+              </a:ext>
+            </a:extLst>
+          </p:cNvPr>
           <p:cNvSpPr/>
           <p:nvPr/>
         </p:nvSpPr>
@@ -4402,7 +4626,13 @@
       </p:sp>
       <p:sp>
         <p:nvSpPr>
-          <p:cNvPr id="6" name="Icon FaUserXmark"/>
+          <p:cNvPr id="6" name="Icon FaUserXmark">
+            <a:extLst>
+              <a:ext uri="{C183D7F6-B498-43B3-948B-1728B52AA6E4}">
+                <adec:decorative xmlns:adec="http://schemas.microsoft.com/office/drawing/2017/decorative" val="1"/>
+              </a:ext>
+            </a:extLst>
+          </p:cNvPr>
           <p:cNvSpPr/>
           <p:nvPr/>
         </p:nvSpPr>
@@ -4427,7 +4657,13 @@
       </p:sp>
       <p:pic>
         <p:nvPicPr>
-          <p:cNvPr id="7" name="Image 0" descr="C:\Users\whale\git\mwb-b03\presentations\_build\icons\FaUserXmark.png"/>
+          <p:cNvPr id="7" name="Image 0">
+            <a:extLst>
+              <a:ext uri="{C183D7F6-B498-43B3-948B-1728B52AA6E4}">
+                <adec:decorative xmlns:adec="http://schemas.microsoft.com/office/drawing/2017/decorative" val="1"/>
+              </a:ext>
+            </a:extLst>
+          </p:cNvPr>
           <p:cNvPicPr>
             <a:picLocks noChangeAspect="1"/>
           </p:cNvPicPr>
@@ -4501,7 +4737,13 @@
       </p:sp>
       <p:sp>
         <p:nvSpPr>
-          <p:cNvPr id="9" name="Icon FaAddressBook"/>
+          <p:cNvPr id="9" name="Icon FaAddressBook">
+            <a:extLst>
+              <a:ext uri="{C183D7F6-B498-43B3-948B-1728B52AA6E4}">
+                <adec:decorative xmlns:adec="http://schemas.microsoft.com/office/drawing/2017/decorative" val="1"/>
+              </a:ext>
+            </a:extLst>
+          </p:cNvPr>
           <p:cNvSpPr/>
           <p:nvPr/>
         </p:nvSpPr>
@@ -4526,7 +4768,13 @@
       </p:sp>
       <p:pic>
         <p:nvPicPr>
-          <p:cNvPr id="10" name="Image 1" descr="C:\Users\whale\git\mwb-b03\presentations\_build\icons\FaAddressBook.png"/>
+          <p:cNvPr id="10" name="Image 1">
+            <a:extLst>
+              <a:ext uri="{C183D7F6-B498-43B3-948B-1728B52AA6E4}">
+                <adec:decorative xmlns:adec="http://schemas.microsoft.com/office/drawing/2017/decorative" val="1"/>
+              </a:ext>
+            </a:extLst>
+          </p:cNvPr>
           <p:cNvPicPr>
             <a:picLocks noChangeAspect="1"/>
           </p:cNvPicPr>
@@ -4600,7 +4848,13 @@
       </p:sp>
       <p:sp>
         <p:nvSpPr>
-          <p:cNvPr id="12" name="Icon FaUserClock"/>
+          <p:cNvPr id="12" name="Icon FaUserClock">
+            <a:extLst>
+              <a:ext uri="{C183D7F6-B498-43B3-948B-1728B52AA6E4}">
+                <adec:decorative xmlns:adec="http://schemas.microsoft.com/office/drawing/2017/decorative" val="1"/>
+              </a:ext>
+            </a:extLst>
+          </p:cNvPr>
           <p:cNvSpPr/>
           <p:nvPr/>
         </p:nvSpPr>
@@ -4625,7 +4879,13 @@
       </p:sp>
       <p:pic>
         <p:nvPicPr>
-          <p:cNvPr id="13" name="Image 2" descr="C:\Users\whale\git\mwb-b03\presentations\_build\icons\FaUserClock.png"/>
+          <p:cNvPr id="13" name="Image 2">
+            <a:extLst>
+              <a:ext uri="{C183D7F6-B498-43B3-948B-1728B52AA6E4}">
+                <adec:decorative xmlns:adec="http://schemas.microsoft.com/office/drawing/2017/decorative" val="1"/>
+              </a:ext>
+            </a:extLst>
+          </p:cNvPr>
           <p:cNvPicPr>
             <a:picLocks noChangeAspect="1"/>
           </p:cNvPicPr>
@@ -4699,7 +4959,13 @@
       </p:sp>
       <p:sp>
         <p:nvSpPr>
-          <p:cNvPr id="15" name="Token box"/>
+          <p:cNvPr id="15" name="Token box">
+            <a:extLst>
+              <a:ext uri="{C183D7F6-B498-43B3-948B-1728B52AA6E4}">
+                <adec:decorative xmlns:adec="http://schemas.microsoft.com/office/drawing/2017/decorative" val="1"/>
+              </a:ext>
+            </a:extLst>
+          </p:cNvPr>
           <p:cNvSpPr/>
           <p:nvPr/>
         </p:nvSpPr>
@@ -4733,7 +4999,13 @@
       </p:sp>
       <p:sp>
         <p:nvSpPr>
-          <p:cNvPr id="16" name="Icon FaIdCard"/>
+          <p:cNvPr id="16" name="Icon FaIdCard">
+            <a:extLst>
+              <a:ext uri="{C183D7F6-B498-43B3-948B-1728B52AA6E4}">
+                <adec:decorative xmlns:adec="http://schemas.microsoft.com/office/drawing/2017/decorative" val="1"/>
+              </a:ext>
+            </a:extLst>
+          </p:cNvPr>
           <p:cNvSpPr/>
           <p:nvPr/>
         </p:nvSpPr>
@@ -4758,7 +5030,13 @@
       </p:sp>
       <p:pic>
         <p:nvPicPr>
-          <p:cNvPr id="17" name="Image 3" descr="C:\Users\whale\git\mwb-b03\presentations\_build\icons\FaIdCard.png"/>
+          <p:cNvPr id="17" name="Image 3">
+            <a:extLst>
+              <a:ext uri="{C183D7F6-B498-43B3-948B-1728B52AA6E4}">
+                <adec:decorative xmlns:adec="http://schemas.microsoft.com/office/drawing/2017/decorative" val="1"/>
+              </a:ext>
+            </a:extLst>
+          </p:cNvPr>
           <p:cNvPicPr>
             <a:picLocks noChangeAspect="1"/>
           </p:cNvPicPr>
@@ -4947,7 +5225,13 @@
       </p:sp>
       <p:sp>
         <p:nvSpPr>
-          <p:cNvPr id="21" name="Do nothing"/>
+          <p:cNvPr id="21" name="Do nothing">
+            <a:extLst>
+              <a:ext uri="{C183D7F6-B498-43B3-948B-1728B52AA6E4}">
+                <adec:decorative xmlns:adec="http://schemas.microsoft.com/office/drawing/2017/decorative" val="1"/>
+              </a:ext>
+            </a:extLst>
+          </p:cNvPr>
           <p:cNvSpPr/>
           <p:nvPr/>
         </p:nvSpPr>
@@ -4981,7 +5265,13 @@
       </p:sp>
       <p:sp>
         <p:nvSpPr>
-          <p:cNvPr id="22" name="Icon FaTriangleExclamation"/>
+          <p:cNvPr id="22" name="Icon FaTriangleExclamation">
+            <a:extLst>
+              <a:ext uri="{C183D7F6-B498-43B3-948B-1728B52AA6E4}">
+                <adec:decorative xmlns:adec="http://schemas.microsoft.com/office/drawing/2017/decorative" val="1"/>
+              </a:ext>
+            </a:extLst>
+          </p:cNvPr>
           <p:cNvSpPr/>
           <p:nvPr/>
         </p:nvSpPr>
@@ -5006,7 +5296,13 @@
       </p:sp>
       <p:pic>
         <p:nvPicPr>
-          <p:cNvPr id="23" name="Image 4" descr="C:\Users\whale\git\mwb-b03\presentations\_build\icons\FaTriangleExclamation.png"/>
+          <p:cNvPr id="23" name="Image 4">
+            <a:extLst>
+              <a:ext uri="{C183D7F6-B498-43B3-948B-1728B52AA6E4}">
+                <adec:decorative xmlns:adec="http://schemas.microsoft.com/office/drawing/2017/decorative" val="1"/>
+              </a:ext>
+            </a:extLst>
+          </p:cNvPr>
           <p:cNvPicPr>
             <a:picLocks noChangeAspect="1"/>
           </p:cNvPicPr>
@@ -5155,11 +5451,11 @@
       </p:sp>
       <p:pic>
         <p:nvPicPr>
-          <p:cNvPr id="27" name="Narration">
+          <p:cNvPr id="27" name="Narration" descr="Narration for this slide; captions available">
             <a:hlinkClick r:id="" action="ppaction://media"/>
             <a:extLst>
               <a:ext uri="{FF2B5EF4-FFF2-40B4-BE49-F238E27FC236}">
-                <a16:creationId xmlns:a16="http://schemas.microsoft.com/office/drawing/2014/main" id="{63836521-355E-8E0D-AB57-04D487465DBF}"/>
+                <a16:creationId xmlns:a16="http://schemas.microsoft.com/office/drawing/2014/main" id="{63C2FF8B-D4E5-6972-1D54-8C34F9A859E0}"/>
               </a:ext>
             </a:extLst>
           </p:cNvPr>
@@ -5170,7 +5466,17 @@
             <a:audioFile r:link="rId2"/>
             <p:extLst>
               <p:ext uri="{DAA4B4D4-6D71-4841-9C94-3DE7FCFB9230}">
-                <p14:media xmlns:p14="http://schemas.microsoft.com/office/powerpoint/2010/main" r:embed="rId1"/>
+                <p14:media xmlns:p14="http://schemas.microsoft.com/office/powerpoint/2010/main" r:embed="rId1">
+                  <p14:extLst>
+                    <p:ext uri="{3AFAAA56-56D3-431D-BCD4-E75A35582382}">
+                      <p173:tracksInfo xmlns:p173="http://schemas.microsoft.com/office/powerpoint/2017/3/main" displayLoc="slide">
+                        <p173:trackLst>
+                          <p173:track id="{BAA8279A-A365-4891-A9BF-183FB10700B2}" label="English (captions)" lang="en-US" r:embed="rId11"/>
+                        </p173:trackLst>
+                      </p173:tracksInfo>
+                    </p:ext>
+                  </p14:extLst>
+                </p14:media>
               </p:ext>
             </p:extLst>
           </p:nvPr>
@@ -5337,7 +5643,13 @@
       </p:sp>
       <p:sp>
         <p:nvSpPr>
-          <p:cNvPr id="3" name="Tag Why"/>
+          <p:cNvPr id="3" name="Tag Why">
+            <a:extLst>
+              <a:ext uri="{C183D7F6-B498-43B3-948B-1728B52AA6E4}">
+                <adec:decorative xmlns:adec="http://schemas.microsoft.com/office/drawing/2017/decorative" val="1"/>
+              </a:ext>
+            </a:extLst>
+          </p:cNvPr>
           <p:cNvSpPr/>
           <p:nvPr/>
         </p:nvSpPr>
@@ -5400,7 +5712,13 @@
       </p:sp>
       <p:sp>
         <p:nvSpPr>
-          <p:cNvPr id="5" name="Col 0"/>
+          <p:cNvPr id="5" name="Col 0">
+            <a:extLst>
+              <a:ext uri="{C183D7F6-B498-43B3-948B-1728B52AA6E4}">
+                <adec:decorative xmlns:adec="http://schemas.microsoft.com/office/drawing/2017/decorative" val="1"/>
+              </a:ext>
+            </a:extLst>
+          </p:cNvPr>
           <p:cNvSpPr/>
           <p:nvPr/>
         </p:nvSpPr>
@@ -5434,7 +5752,13 @@
       </p:sp>
       <p:sp>
         <p:nvSpPr>
-          <p:cNvPr id="6" name="Icon FaBuildingColumns"/>
+          <p:cNvPr id="6" name="Icon FaBuildingColumns">
+            <a:extLst>
+              <a:ext uri="{C183D7F6-B498-43B3-948B-1728B52AA6E4}">
+                <adec:decorative xmlns:adec="http://schemas.microsoft.com/office/drawing/2017/decorative" val="1"/>
+              </a:ext>
+            </a:extLst>
+          </p:cNvPr>
           <p:cNvSpPr/>
           <p:nvPr/>
         </p:nvSpPr>
@@ -5459,7 +5783,13 @@
       </p:sp>
       <p:pic>
         <p:nvPicPr>
-          <p:cNvPr id="7" name="Image 0" descr="C:\Users\whale\git\mwb-b03\presentations\_build\icons\FaBuildingColumns.png"/>
+          <p:cNvPr id="7" name="Image 0">
+            <a:extLst>
+              <a:ext uri="{C183D7F6-B498-43B3-948B-1728B52AA6E4}">
+                <adec:decorative xmlns:adec="http://schemas.microsoft.com/office/drawing/2017/decorative" val="1"/>
+              </a:ext>
+            </a:extLst>
+          </p:cNvPr>
           <p:cNvPicPr>
             <a:picLocks noChangeAspect="1"/>
           </p:cNvPicPr>
@@ -5598,7 +5928,13 @@
       </p:sp>
       <p:sp>
         <p:nvSpPr>
-          <p:cNvPr id="10" name="Col 1"/>
+          <p:cNvPr id="10" name="Col 1">
+            <a:extLst>
+              <a:ext uri="{C183D7F6-B498-43B3-948B-1728B52AA6E4}">
+                <adec:decorative xmlns:adec="http://schemas.microsoft.com/office/drawing/2017/decorative" val="1"/>
+              </a:ext>
+            </a:extLst>
+          </p:cNvPr>
           <p:cNvSpPr/>
           <p:nvPr/>
         </p:nvSpPr>
@@ -5632,7 +5968,13 @@
       </p:sp>
       <p:sp>
         <p:nvSpPr>
-          <p:cNvPr id="11" name="Icon FaCloudArrowUp"/>
+          <p:cNvPr id="11" name="Icon FaCloudArrowUp">
+            <a:extLst>
+              <a:ext uri="{C183D7F6-B498-43B3-948B-1728B52AA6E4}">
+                <adec:decorative xmlns:adec="http://schemas.microsoft.com/office/drawing/2017/decorative" val="1"/>
+              </a:ext>
+            </a:extLst>
+          </p:cNvPr>
           <p:cNvSpPr/>
           <p:nvPr/>
         </p:nvSpPr>
@@ -5657,7 +5999,13 @@
       </p:sp>
       <p:pic>
         <p:nvPicPr>
-          <p:cNvPr id="12" name="Image 1" descr="C:\Users\whale\git\mwb-b03\presentations\_build\icons\FaCloudArrowUp.png"/>
+          <p:cNvPr id="12" name="Image 1">
+            <a:extLst>
+              <a:ext uri="{C183D7F6-B498-43B3-948B-1728B52AA6E4}">
+                <adec:decorative xmlns:adec="http://schemas.microsoft.com/office/drawing/2017/decorative" val="1"/>
+              </a:ext>
+            </a:extLst>
+          </p:cNvPr>
           <p:cNvPicPr>
             <a:picLocks noChangeAspect="1"/>
           </p:cNvPicPr>
@@ -5796,7 +6144,13 @@
       </p:sp>
       <p:sp>
         <p:nvSpPr>
-          <p:cNvPr id="15" name="Window"/>
+          <p:cNvPr id="15" name="Window">
+            <a:extLst>
+              <a:ext uri="{C183D7F6-B498-43B3-948B-1728B52AA6E4}">
+                <adec:decorative xmlns:adec="http://schemas.microsoft.com/office/drawing/2017/decorative" val="1"/>
+              </a:ext>
+            </a:extLst>
+          </p:cNvPr>
           <p:cNvSpPr/>
           <p:nvPr/>
         </p:nvSpPr>
@@ -5830,7 +6184,13 @@
       </p:sp>
       <p:sp>
         <p:nvSpPr>
-          <p:cNvPr id="16" name="Icon FaDoorOpen"/>
+          <p:cNvPr id="16" name="Icon FaDoorOpen">
+            <a:extLst>
+              <a:ext uri="{C183D7F6-B498-43B3-948B-1728B52AA6E4}">
+                <adec:decorative xmlns:adec="http://schemas.microsoft.com/office/drawing/2017/decorative" val="1"/>
+              </a:ext>
+            </a:extLst>
+          </p:cNvPr>
           <p:cNvSpPr/>
           <p:nvPr/>
         </p:nvSpPr>
@@ -5855,7 +6215,13 @@
       </p:sp>
       <p:pic>
         <p:nvPicPr>
-          <p:cNvPr id="17" name="Image 2" descr="C:\Users\whale\git\mwb-b03\presentations\_build\icons\FaDoorOpen.png"/>
+          <p:cNvPr id="17" name="Image 2">
+            <a:extLst>
+              <a:ext uri="{C183D7F6-B498-43B3-948B-1728B52AA6E4}">
+                <adec:decorative xmlns:adec="http://schemas.microsoft.com/office/drawing/2017/decorative" val="1"/>
+              </a:ext>
+            </a:extLst>
+          </p:cNvPr>
           <p:cNvPicPr>
             <a:picLocks noChangeAspect="1"/>
           </p:cNvPicPr>
@@ -5954,7 +6320,13 @@
       </p:sp>
       <p:sp>
         <p:nvSpPr>
-          <p:cNvPr id="20" name="Limit"/>
+          <p:cNvPr id="20" name="Limit">
+            <a:extLst>
+              <a:ext uri="{C183D7F6-B498-43B3-948B-1728B52AA6E4}">
+                <adec:decorative xmlns:adec="http://schemas.microsoft.com/office/drawing/2017/decorative" val="1"/>
+              </a:ext>
+            </a:extLst>
+          </p:cNvPr>
           <p:cNvSpPr/>
           <p:nvPr/>
         </p:nvSpPr>
@@ -5988,7 +6360,13 @@
       </p:sp>
       <p:sp>
         <p:nvSpPr>
-          <p:cNvPr id="21" name="Icon FaScaleBalanced"/>
+          <p:cNvPr id="21" name="Icon FaScaleBalanced">
+            <a:extLst>
+              <a:ext uri="{C183D7F6-B498-43B3-948B-1728B52AA6E4}">
+                <adec:decorative xmlns:adec="http://schemas.microsoft.com/office/drawing/2017/decorative" val="1"/>
+              </a:ext>
+            </a:extLst>
+          </p:cNvPr>
           <p:cNvSpPr/>
           <p:nvPr/>
         </p:nvSpPr>
@@ -6013,7 +6391,13 @@
       </p:sp>
       <p:pic>
         <p:nvPicPr>
-          <p:cNvPr id="22" name="Image 3" descr="C:\Users\whale\git\mwb-b03\presentations\_build\icons\FaScaleBalanced.png"/>
+          <p:cNvPr id="22" name="Image 3">
+            <a:extLst>
+              <a:ext uri="{C183D7F6-B498-43B3-948B-1728B52AA6E4}">
+                <adec:decorative xmlns:adec="http://schemas.microsoft.com/office/drawing/2017/decorative" val="1"/>
+              </a:ext>
+            </a:extLst>
+          </p:cNvPr>
           <p:cNvPicPr>
             <a:picLocks noChangeAspect="1"/>
           </p:cNvPicPr>
@@ -6162,11 +6546,11 @@
       </p:sp>
       <p:pic>
         <p:nvPicPr>
-          <p:cNvPr id="26" name="Narration">
+          <p:cNvPr id="26" name="Narration" descr="Narration for this slide; captions available">
             <a:hlinkClick r:id="" action="ppaction://media"/>
             <a:extLst>
               <a:ext uri="{FF2B5EF4-FFF2-40B4-BE49-F238E27FC236}">
-                <a16:creationId xmlns:a16="http://schemas.microsoft.com/office/drawing/2014/main" id="{6DD9AD34-D323-C9AD-2329-0BB58095CDDB}"/>
+                <a16:creationId xmlns:a16="http://schemas.microsoft.com/office/drawing/2014/main" id="{9B946C97-8040-9EE4-AD9E-D04ED0BD209D}"/>
               </a:ext>
             </a:extLst>
           </p:cNvPr>
@@ -6177,7 +6561,17 @@
             <a:audioFile r:link="rId2"/>
             <p:extLst>
               <p:ext uri="{DAA4B4D4-6D71-4841-9C94-3DE7FCFB9230}">
-                <p14:media xmlns:p14="http://schemas.microsoft.com/office/powerpoint/2010/main" r:embed="rId1"/>
+                <p14:media xmlns:p14="http://schemas.microsoft.com/office/powerpoint/2010/main" r:embed="rId1">
+                  <p14:extLst>
+                    <p:ext uri="{3AFAAA56-56D3-431D-BCD4-E75A35582382}">
+                      <p173:tracksInfo xmlns:p173="http://schemas.microsoft.com/office/powerpoint/2017/3/main" displayLoc="slide">
+                        <p173:trackLst>
+                          <p173:track id="{D40F5DE4-F02B-421F-81D7-B4A631D5BE45}" label="English (captions)" lang="en-US" r:embed="rId10"/>
+                        </p173:trackLst>
+                      </p173:tracksInfo>
+                    </p:ext>
+                  </p14:extLst>
+                </p14:media>
               </p:ext>
             </p:extLst>
           </p:nvPr>
@@ -6344,7 +6738,13 @@
       </p:sp>
       <p:sp>
         <p:nvSpPr>
-          <p:cNvPr id="3" name="Tag What"/>
+          <p:cNvPr id="3" name="Tag What">
+            <a:extLst>
+              <a:ext uri="{C183D7F6-B498-43B3-948B-1728B52AA6E4}">
+                <adec:decorative xmlns:adec="http://schemas.microsoft.com/office/drawing/2017/decorative" val="1"/>
+              </a:ext>
+            </a:extLst>
+          </p:cNvPr>
           <p:cNvSpPr/>
           <p:nvPr/>
         </p:nvSpPr>
@@ -6426,7 +6826,7 @@
         <a:graphic>
           <a:graphicData uri="http://schemas.openxmlformats.org/drawingml/2006/table">
             <a:tbl>
-              <a:tblPr/>
+              <a:tblPr firstRow="1" bandRow="1"/>
               <a:tblGrid>
                 <a:gridCol w="3520440">
                   <a:extLst>
@@ -8636,7 +9036,13 @@
       </p:graphicFrame>
       <p:sp>
         <p:nvSpPr>
-          <p:cNvPr id="6" name="Judgment"/>
+          <p:cNvPr id="6" name="Judgment">
+            <a:extLst>
+              <a:ext uri="{C183D7F6-B498-43B3-948B-1728B52AA6E4}">
+                <adec:decorative xmlns:adec="http://schemas.microsoft.com/office/drawing/2017/decorative" val="1"/>
+              </a:ext>
+            </a:extLst>
+          </p:cNvPr>
           <p:cNvSpPr/>
           <p:nvPr/>
         </p:nvSpPr>
@@ -8670,7 +9076,13 @@
       </p:sp>
       <p:sp>
         <p:nvSpPr>
-          <p:cNvPr id="7" name="Icon FaLightbulb"/>
+          <p:cNvPr id="7" name="Icon FaLightbulb">
+            <a:extLst>
+              <a:ext uri="{C183D7F6-B498-43B3-948B-1728B52AA6E4}">
+                <adec:decorative xmlns:adec="http://schemas.microsoft.com/office/drawing/2017/decorative" val="1"/>
+              </a:ext>
+            </a:extLst>
+          </p:cNvPr>
           <p:cNvSpPr/>
           <p:nvPr/>
         </p:nvSpPr>
@@ -8695,7 +9107,13 @@
       </p:sp>
       <p:pic>
         <p:nvPicPr>
-          <p:cNvPr id="8" name="Image 0" descr="C:\Users\whale\git\mwb-b03\presentations\_build\icons\FaLightbulb.png"/>
+          <p:cNvPr id="8" name="Image 0">
+            <a:extLst>
+              <a:ext uri="{C183D7F6-B498-43B3-948B-1728B52AA6E4}">
+                <adec:decorative xmlns:adec="http://schemas.microsoft.com/office/drawing/2017/decorative" val="1"/>
+              </a:ext>
+            </a:extLst>
+          </p:cNvPr>
           <p:cNvPicPr>
             <a:picLocks noChangeAspect="1"/>
           </p:cNvPicPr>
@@ -8844,11 +9262,11 @@
       </p:sp>
       <p:pic>
         <p:nvPicPr>
-          <p:cNvPr id="11" name="Narration">
+          <p:cNvPr id="11" name="Narration" descr="Narration for this slide; captions available">
             <a:hlinkClick r:id="" action="ppaction://media"/>
             <a:extLst>
               <a:ext uri="{FF2B5EF4-FFF2-40B4-BE49-F238E27FC236}">
-                <a16:creationId xmlns:a16="http://schemas.microsoft.com/office/drawing/2014/main" id="{714CDEAD-80B4-A1FA-637D-389E8BA9C99F}"/>
+                <a16:creationId xmlns:a16="http://schemas.microsoft.com/office/drawing/2014/main" id="{97E54415-1B68-8A0A-A814-5063FA58847A}"/>
               </a:ext>
             </a:extLst>
           </p:cNvPr>
@@ -8859,7 +9277,17 @@
             <a:audioFile r:link="rId2"/>
             <p:extLst>
               <p:ext uri="{DAA4B4D4-6D71-4841-9C94-3DE7FCFB9230}">
-                <p14:media xmlns:p14="http://schemas.microsoft.com/office/powerpoint/2010/main" r:embed="rId1"/>
+                <p14:media xmlns:p14="http://schemas.microsoft.com/office/powerpoint/2010/main" r:embed="rId1">
+                  <p14:extLst>
+                    <p:ext uri="{3AFAAA56-56D3-431D-BCD4-E75A35582382}">
+                      <p173:tracksInfo xmlns:p173="http://schemas.microsoft.com/office/powerpoint/2017/3/main" displayLoc="slide">
+                        <p173:trackLst>
+                          <p173:track id="{B282D164-CC6E-4584-80F8-D5846B19FA10}" label="English (captions)" lang="en-US" r:embed="rId7"/>
+                        </p173:trackLst>
+                      </p173:tracksInfo>
+                    </p:ext>
+                  </p14:extLst>
+                </p14:media>
               </p:ext>
             </p:extLst>
           </p:nvPr>
@@ -9026,7 +9454,13 @@
       </p:sp>
       <p:sp>
         <p:nvSpPr>
-          <p:cNvPr id="3" name="Tag What"/>
+          <p:cNvPr id="3" name="Tag What">
+            <a:extLst>
+              <a:ext uri="{C183D7F6-B498-43B3-948B-1728B52AA6E4}">
+                <adec:decorative xmlns:adec="http://schemas.microsoft.com/office/drawing/2017/decorative" val="1"/>
+              </a:ext>
+            </a:extLst>
+          </p:cNvPr>
           <p:cNvSpPr/>
           <p:nvPr/>
         </p:nvSpPr>
@@ -9108,7 +9542,7 @@
         <a:graphic>
           <a:graphicData uri="http://schemas.openxmlformats.org/drawingml/2006/table">
             <a:tbl>
-              <a:tblPr/>
+              <a:tblPr firstRow="1" bandRow="1"/>
               <a:tblGrid>
                 <a:gridCol w="2651760">
                   <a:extLst>
@@ -9703,7 +10137,13 @@
       </p:graphicFrame>
       <p:sp>
         <p:nvSpPr>
-          <p:cNvPr id="5" name="Model box"/>
+          <p:cNvPr id="5" name="Model box">
+            <a:extLst>
+              <a:ext uri="{C183D7F6-B498-43B3-948B-1728B52AA6E4}">
+                <adec:decorative xmlns:adec="http://schemas.microsoft.com/office/drawing/2017/decorative" val="1"/>
+              </a:ext>
+            </a:extLst>
+          </p:cNvPr>
           <p:cNvSpPr/>
           <p:nvPr/>
         </p:nvSpPr>
@@ -9737,7 +10177,13 @@
       </p:sp>
       <p:sp>
         <p:nvSpPr>
-          <p:cNvPr id="7" name="Icon FaSitemap"/>
+          <p:cNvPr id="7" name="Icon FaSitemap">
+            <a:extLst>
+              <a:ext uri="{C183D7F6-B498-43B3-948B-1728B52AA6E4}">
+                <adec:decorative xmlns:adec="http://schemas.microsoft.com/office/drawing/2017/decorative" val="1"/>
+              </a:ext>
+            </a:extLst>
+          </p:cNvPr>
           <p:cNvSpPr/>
           <p:nvPr/>
         </p:nvSpPr>
@@ -9762,7 +10208,13 @@
       </p:sp>
       <p:pic>
         <p:nvPicPr>
-          <p:cNvPr id="8" name="Image 0" descr="C:\Users\whale\git\mwb-b03\presentations\_build\icons\FaSitemap.png"/>
+          <p:cNvPr id="8" name="Image 0">
+            <a:extLst>
+              <a:ext uri="{C183D7F6-B498-43B3-948B-1728B52AA6E4}">
+                <adec:decorative xmlns:adec="http://schemas.microsoft.com/office/drawing/2017/decorative" val="1"/>
+              </a:ext>
+            </a:extLst>
+          </p:cNvPr>
           <p:cNvPicPr>
             <a:picLocks noChangeAspect="1"/>
           </p:cNvPicPr>
@@ -9901,7 +10353,13 @@
       </p:sp>
       <p:sp>
         <p:nvSpPr>
-          <p:cNvPr id="11" name="Rule"/>
+          <p:cNvPr id="11" name="Rule">
+            <a:extLst>
+              <a:ext uri="{C183D7F6-B498-43B3-948B-1728B52AA6E4}">
+                <adec:decorative xmlns:adec="http://schemas.microsoft.com/office/drawing/2017/decorative" val="1"/>
+              </a:ext>
+            </a:extLst>
+          </p:cNvPr>
           <p:cNvSpPr/>
           <p:nvPr/>
         </p:nvSpPr>
@@ -9935,7 +10393,13 @@
       </p:sp>
       <p:sp>
         <p:nvSpPr>
-          <p:cNvPr id="12" name="Icon FaKey"/>
+          <p:cNvPr id="12" name="Icon FaKey">
+            <a:extLst>
+              <a:ext uri="{C183D7F6-B498-43B3-948B-1728B52AA6E4}">
+                <adec:decorative xmlns:adec="http://schemas.microsoft.com/office/drawing/2017/decorative" val="1"/>
+              </a:ext>
+            </a:extLst>
+          </p:cNvPr>
           <p:cNvSpPr/>
           <p:nvPr/>
         </p:nvSpPr>
@@ -9960,7 +10424,13 @@
       </p:sp>
       <p:pic>
         <p:nvPicPr>
-          <p:cNvPr id="13" name="Image 1" descr="C:\Users\whale\git\mwb-b03\presentations\_build\icons\FaKey.png"/>
+          <p:cNvPr id="13" name="Image 1">
+            <a:extLst>
+              <a:ext uri="{C183D7F6-B498-43B3-948B-1728B52AA6E4}">
+                <adec:decorative xmlns:adec="http://schemas.microsoft.com/office/drawing/2017/decorative" val="1"/>
+              </a:ext>
+            </a:extLst>
+          </p:cNvPr>
           <p:cNvPicPr>
             <a:picLocks noChangeAspect="1"/>
           </p:cNvPicPr>
@@ -10109,11 +10579,11 @@
       </p:sp>
       <p:pic>
         <p:nvPicPr>
-          <p:cNvPr id="16" name="Narration">
+          <p:cNvPr id="16" name="Narration" descr="Narration for this slide; captions available">
             <a:hlinkClick r:id="" action="ppaction://media"/>
             <a:extLst>
               <a:ext uri="{FF2B5EF4-FFF2-40B4-BE49-F238E27FC236}">
-                <a16:creationId xmlns:a16="http://schemas.microsoft.com/office/drawing/2014/main" id="{A7A5B285-484C-E890-8ABA-024711AA6FDD}"/>
+                <a16:creationId xmlns:a16="http://schemas.microsoft.com/office/drawing/2014/main" id="{1C9CAB11-18FF-6164-F5CA-6E6AA76DF9D9}"/>
               </a:ext>
             </a:extLst>
           </p:cNvPr>
@@ -10124,7 +10594,17 @@
             <a:audioFile r:link="rId2"/>
             <p:extLst>
               <p:ext uri="{DAA4B4D4-6D71-4841-9C94-3DE7FCFB9230}">
-                <p14:media xmlns:p14="http://schemas.microsoft.com/office/powerpoint/2010/main" r:embed="rId1"/>
+                <p14:media xmlns:p14="http://schemas.microsoft.com/office/powerpoint/2010/main" r:embed="rId1">
+                  <p14:extLst>
+                    <p:ext uri="{3AFAAA56-56D3-431D-BCD4-E75A35582382}">
+                      <p173:tracksInfo xmlns:p173="http://schemas.microsoft.com/office/powerpoint/2017/3/main" displayLoc="slide">
+                        <p173:trackLst>
+                          <p173:track id="{F8D28914-D3BE-4DD8-BD76-F501169F6640}" label="English (captions)" lang="en-US" r:embed="rId8"/>
+                        </p173:trackLst>
+                      </p173:tracksInfo>
+                    </p:ext>
+                  </p14:extLst>
+                </p14:media>
               </p:ext>
             </p:extLst>
           </p:nvPr>
@@ -10291,7 +10771,13 @@
       </p:sp>
       <p:sp>
         <p:nvSpPr>
-          <p:cNvPr id="3" name="Tag What"/>
+          <p:cNvPr id="3" name="Tag What">
+            <a:extLst>
+              <a:ext uri="{C183D7F6-B498-43B3-948B-1728B52AA6E4}">
+                <adec:decorative xmlns:adec="http://schemas.microsoft.com/office/drawing/2017/decorative" val="1"/>
+              </a:ext>
+            </a:extLst>
+          </p:cNvPr>
           <p:cNvSpPr/>
           <p:nvPr/>
         </p:nvSpPr>
@@ -10354,7 +10840,13 @@
       </p:sp>
       <p:sp>
         <p:nvSpPr>
-          <p:cNvPr id="5" name="Pipe 0"/>
+          <p:cNvPr id="5" name="Pipe 0">
+            <a:extLst>
+              <a:ext uri="{C183D7F6-B498-43B3-948B-1728B52AA6E4}">
+                <adec:decorative xmlns:adec="http://schemas.microsoft.com/office/drawing/2017/decorative" val="1"/>
+              </a:ext>
+            </a:extLst>
+          </p:cNvPr>
           <p:cNvSpPr/>
           <p:nvPr/>
         </p:nvSpPr>
@@ -10447,7 +10939,13 @@
       </p:sp>
       <p:sp>
         <p:nvSpPr>
-          <p:cNvPr id="7" name="Pipe 1"/>
+          <p:cNvPr id="7" name="Pipe 1">
+            <a:extLst>
+              <a:ext uri="{C183D7F6-B498-43B3-948B-1728B52AA6E4}">
+                <adec:decorative xmlns:adec="http://schemas.microsoft.com/office/drawing/2017/decorative" val="1"/>
+              </a:ext>
+            </a:extLst>
+          </p:cNvPr>
           <p:cNvSpPr/>
           <p:nvPr/>
         </p:nvSpPr>
@@ -10540,7 +11038,13 @@
       </p:sp>
       <p:sp>
         <p:nvSpPr>
-          <p:cNvPr id="9" name="Pipe 2"/>
+          <p:cNvPr id="9" name="Pipe 2">
+            <a:extLst>
+              <a:ext uri="{C183D7F6-B498-43B3-948B-1728B52AA6E4}">
+                <adec:decorative xmlns:adec="http://schemas.microsoft.com/office/drawing/2017/decorative" val="1"/>
+              </a:ext>
+            </a:extLst>
+          </p:cNvPr>
           <p:cNvSpPr/>
           <p:nvPr/>
         </p:nvSpPr>
@@ -10633,7 +11137,13 @@
       </p:sp>
       <p:sp>
         <p:nvSpPr>
-          <p:cNvPr id="11" name="Pipe 3"/>
+          <p:cNvPr id="11" name="Pipe 3">
+            <a:extLst>
+              <a:ext uri="{C183D7F6-B498-43B3-948B-1728B52AA6E4}">
+                <adec:decorative xmlns:adec="http://schemas.microsoft.com/office/drawing/2017/decorative" val="1"/>
+              </a:ext>
+            </a:extLst>
+          </p:cNvPr>
           <p:cNvSpPr/>
           <p:nvPr/>
         </p:nvSpPr>
@@ -10770,7 +11280,13 @@
       </p:sp>
       <p:sp>
         <p:nvSpPr>
-          <p:cNvPr id="14" name="Example"/>
+          <p:cNvPr id="14" name="Example">
+            <a:extLst>
+              <a:ext uri="{C183D7F6-B498-43B3-948B-1728B52AA6E4}">
+                <adec:decorative xmlns:adec="http://schemas.microsoft.com/office/drawing/2017/decorative" val="1"/>
+              </a:ext>
+            </a:extLst>
+          </p:cNvPr>
           <p:cNvSpPr/>
           <p:nvPr/>
         </p:nvSpPr>
@@ -10804,7 +11320,13 @@
       </p:sp>
       <p:sp>
         <p:nvSpPr>
-          <p:cNvPr id="15" name="Icon FaRightLeft"/>
+          <p:cNvPr id="15" name="Icon FaRightLeft">
+            <a:extLst>
+              <a:ext uri="{C183D7F6-B498-43B3-948B-1728B52AA6E4}">
+                <adec:decorative xmlns:adec="http://schemas.microsoft.com/office/drawing/2017/decorative" val="1"/>
+              </a:ext>
+            </a:extLst>
+          </p:cNvPr>
           <p:cNvSpPr/>
           <p:nvPr/>
         </p:nvSpPr>
@@ -10829,7 +11351,13 @@
       </p:sp>
       <p:pic>
         <p:nvPicPr>
-          <p:cNvPr id="16" name="Image 0" descr="C:\Users\whale\git\mwb-b03\presentations\_build\icons\FaRightLeft.png"/>
+          <p:cNvPr id="16" name="Image 0">
+            <a:extLst>
+              <a:ext uri="{C183D7F6-B498-43B3-948B-1728B52AA6E4}">
+                <adec:decorative xmlns:adec="http://schemas.microsoft.com/office/drawing/2017/decorative" val="1"/>
+              </a:ext>
+            </a:extLst>
+          </p:cNvPr>
           <p:cNvPicPr>
             <a:picLocks noChangeAspect="1"/>
           </p:cNvPicPr>
@@ -10978,11 +11506,11 @@
       </p:sp>
       <p:pic>
         <p:nvPicPr>
-          <p:cNvPr id="19" name="Narration">
+          <p:cNvPr id="19" name="Narration" descr="Narration for this slide; captions available">
             <a:hlinkClick r:id="" action="ppaction://media"/>
             <a:extLst>
               <a:ext uri="{FF2B5EF4-FFF2-40B4-BE49-F238E27FC236}">
-                <a16:creationId xmlns:a16="http://schemas.microsoft.com/office/drawing/2014/main" id="{52B20AF7-BFC4-9D60-B852-5A23723EC350}"/>
+                <a16:creationId xmlns:a16="http://schemas.microsoft.com/office/drawing/2014/main" id="{8EC37B60-7E26-5246-52D2-8E5E3E7A0209}"/>
               </a:ext>
             </a:extLst>
           </p:cNvPr>
@@ -10993,7 +11521,17 @@
             <a:audioFile r:link="rId2"/>
             <p:extLst>
               <p:ext uri="{DAA4B4D4-6D71-4841-9C94-3DE7FCFB9230}">
-                <p14:media xmlns:p14="http://schemas.microsoft.com/office/powerpoint/2010/main" r:embed="rId1"/>
+                <p14:media xmlns:p14="http://schemas.microsoft.com/office/powerpoint/2010/main" r:embed="rId1">
+                  <p14:extLst>
+                    <p:ext uri="{3AFAAA56-56D3-431D-BCD4-E75A35582382}">
+                      <p173:tracksInfo xmlns:p173="http://schemas.microsoft.com/office/powerpoint/2017/3/main" displayLoc="slide">
+                        <p173:trackLst>
+                          <p173:track id="{59F8097B-B553-4346-A5C2-96C4E55FF6CE}" label="English (captions)" lang="en-US" r:embed="rId7"/>
+                        </p173:trackLst>
+                      </p173:tracksInfo>
+                    </p:ext>
+                  </p14:extLst>
+                </p14:media>
               </p:ext>
             </p:extLst>
           </p:nvPr>
@@ -11160,7 +11698,13 @@
       </p:sp>
       <p:sp>
         <p:nvSpPr>
-          <p:cNvPr id="3" name="Tag Who"/>
+          <p:cNvPr id="3" name="Tag Who">
+            <a:extLst>
+              <a:ext uri="{C183D7F6-B498-43B3-948B-1728B52AA6E4}">
+                <adec:decorative xmlns:adec="http://schemas.microsoft.com/office/drawing/2017/decorative" val="1"/>
+              </a:ext>
+            </a:extLst>
+          </p:cNvPr>
           <p:cNvSpPr/>
           <p:nvPr/>
         </p:nvSpPr>
@@ -11223,7 +11767,13 @@
       </p:sp>
       <p:sp>
         <p:nvSpPr>
-          <p:cNvPr id="5" name="Who col 1"/>
+          <p:cNvPr id="5" name="Who col 1">
+            <a:extLst>
+              <a:ext uri="{C183D7F6-B498-43B3-948B-1728B52AA6E4}">
+                <adec:decorative xmlns:adec="http://schemas.microsoft.com/office/drawing/2017/decorative" val="1"/>
+              </a:ext>
+            </a:extLst>
+          </p:cNvPr>
           <p:cNvSpPr/>
           <p:nvPr/>
         </p:nvSpPr>
@@ -11257,7 +11807,13 @@
       </p:sp>
       <p:sp>
         <p:nvSpPr>
-          <p:cNvPr id="6" name="Icon FaBuildingColumns"/>
+          <p:cNvPr id="6" name="Icon FaBuildingColumns">
+            <a:extLst>
+              <a:ext uri="{C183D7F6-B498-43B3-948B-1728B52AA6E4}">
+                <adec:decorative xmlns:adec="http://schemas.microsoft.com/office/drawing/2017/decorative" val="1"/>
+              </a:ext>
+            </a:extLst>
+          </p:cNvPr>
           <p:cNvSpPr/>
           <p:nvPr/>
         </p:nvSpPr>
@@ -11282,7 +11838,13 @@
       </p:sp>
       <p:pic>
         <p:nvPicPr>
-          <p:cNvPr id="7" name="Image 0" descr="C:\Users\whale\git\mwb-b03\presentations\_build\icons\FaBuildingColumns.png"/>
+          <p:cNvPr id="7" name="Image 0">
+            <a:extLst>
+              <a:ext uri="{C183D7F6-B498-43B3-948B-1728B52AA6E4}">
+                <adec:decorative xmlns:adec="http://schemas.microsoft.com/office/drawing/2017/decorative" val="1"/>
+              </a:ext>
+            </a:extLst>
+          </p:cNvPr>
           <p:cNvPicPr>
             <a:picLocks noChangeAspect="1"/>
           </p:cNvPicPr>
@@ -11469,7 +12031,13 @@
       </p:sp>
       <p:sp>
         <p:nvSpPr>
-          <p:cNvPr id="10" name="Who col 2"/>
+          <p:cNvPr id="10" name="Who col 2">
+            <a:extLst>
+              <a:ext uri="{C183D7F6-B498-43B3-948B-1728B52AA6E4}">
+                <adec:decorative xmlns:adec="http://schemas.microsoft.com/office/drawing/2017/decorative" val="1"/>
+              </a:ext>
+            </a:extLst>
+          </p:cNvPr>
           <p:cNvSpPr/>
           <p:nvPr/>
         </p:nvSpPr>
@@ -11503,7 +12071,13 @@
       </p:sp>
       <p:sp>
         <p:nvSpPr>
-          <p:cNvPr id="11" name="Icon FaUsersGear"/>
+          <p:cNvPr id="11" name="Icon FaUsersGear">
+            <a:extLst>
+              <a:ext uri="{C183D7F6-B498-43B3-948B-1728B52AA6E4}">
+                <adec:decorative xmlns:adec="http://schemas.microsoft.com/office/drawing/2017/decorative" val="1"/>
+              </a:ext>
+            </a:extLst>
+          </p:cNvPr>
           <p:cNvSpPr/>
           <p:nvPr/>
         </p:nvSpPr>
@@ -11528,7 +12102,13 @@
       </p:sp>
       <p:pic>
         <p:nvPicPr>
-          <p:cNvPr id="12" name="Image 1" descr="C:\Users\whale\git\mwb-b03\presentations\_build\icons\FaUsersGear.png"/>
+          <p:cNvPr id="12" name="Image 1">
+            <a:extLst>
+              <a:ext uri="{C183D7F6-B498-43B3-948B-1728B52AA6E4}">
+                <adec:decorative xmlns:adec="http://schemas.microsoft.com/office/drawing/2017/decorative" val="1"/>
+              </a:ext>
+            </a:extLst>
+          </p:cNvPr>
           <p:cNvPicPr>
             <a:picLocks noChangeAspect="1"/>
           </p:cNvPicPr>
@@ -11715,7 +12295,13 @@
       </p:sp>
       <p:sp>
         <p:nvSpPr>
-          <p:cNvPr id="15" name="Who col 3"/>
+          <p:cNvPr id="15" name="Who col 3">
+            <a:extLst>
+              <a:ext uri="{C183D7F6-B498-43B3-948B-1728B52AA6E4}">
+                <adec:decorative xmlns:adec="http://schemas.microsoft.com/office/drawing/2017/decorative" val="1"/>
+              </a:ext>
+            </a:extLst>
+          </p:cNvPr>
           <p:cNvSpPr/>
           <p:nvPr/>
         </p:nvSpPr>
@@ -11749,7 +12335,13 @@
       </p:sp>
       <p:sp>
         <p:nvSpPr>
-          <p:cNvPr id="16" name="Icon FaShieldHalved"/>
+          <p:cNvPr id="16" name="Icon FaShieldHalved">
+            <a:extLst>
+              <a:ext uri="{C183D7F6-B498-43B3-948B-1728B52AA6E4}">
+                <adec:decorative xmlns:adec="http://schemas.microsoft.com/office/drawing/2017/decorative" val="1"/>
+              </a:ext>
+            </a:extLst>
+          </p:cNvPr>
           <p:cNvSpPr/>
           <p:nvPr/>
         </p:nvSpPr>
@@ -11774,7 +12366,13 @@
       </p:sp>
       <p:pic>
         <p:nvPicPr>
-          <p:cNvPr id="17" name="Image 2" descr="C:\Users\whale\git\mwb-b03\presentations\_build\icons\FaShieldHalved.png"/>
+          <p:cNvPr id="17" name="Image 2">
+            <a:extLst>
+              <a:ext uri="{C183D7F6-B498-43B3-948B-1728B52AA6E4}">
+                <adec:decorative xmlns:adec="http://schemas.microsoft.com/office/drawing/2017/decorative" val="1"/>
+              </a:ext>
+            </a:extLst>
+          </p:cNvPr>
           <p:cNvPicPr>
             <a:picLocks noChangeAspect="1"/>
           </p:cNvPicPr>
@@ -11961,7 +12559,13 @@
       </p:sp>
       <p:sp>
         <p:nvSpPr>
-          <p:cNvPr id="20" name="Architect"/>
+          <p:cNvPr id="20" name="Architect">
+            <a:extLst>
+              <a:ext uri="{C183D7F6-B498-43B3-948B-1728B52AA6E4}">
+                <adec:decorative xmlns:adec="http://schemas.microsoft.com/office/drawing/2017/decorative" val="1"/>
+              </a:ext>
+            </a:extLst>
+          </p:cNvPr>
           <p:cNvSpPr/>
           <p:nvPr/>
         </p:nvSpPr>
@@ -11995,7 +12599,13 @@
       </p:sp>
       <p:sp>
         <p:nvSpPr>
-          <p:cNvPr id="21" name="Icon FaSitemap"/>
+          <p:cNvPr id="21" name="Icon FaSitemap">
+            <a:extLst>
+              <a:ext uri="{C183D7F6-B498-43B3-948B-1728B52AA6E4}">
+                <adec:decorative xmlns:adec="http://schemas.microsoft.com/office/drawing/2017/decorative" val="1"/>
+              </a:ext>
+            </a:extLst>
+          </p:cNvPr>
           <p:cNvSpPr/>
           <p:nvPr/>
         </p:nvSpPr>
@@ -12020,7 +12630,13 @@
       </p:sp>
       <p:pic>
         <p:nvPicPr>
-          <p:cNvPr id="22" name="Image 3" descr="C:\Users\whale\git\mwb-b03\presentations\_build\icons\FaSitemap.png"/>
+          <p:cNvPr id="22" name="Image 3">
+            <a:extLst>
+              <a:ext uri="{C183D7F6-B498-43B3-948B-1728B52AA6E4}">
+                <adec:decorative xmlns:adec="http://schemas.microsoft.com/office/drawing/2017/decorative" val="1"/>
+              </a:ext>
+            </a:extLst>
+          </p:cNvPr>
           <p:cNvPicPr>
             <a:picLocks noChangeAspect="1"/>
           </p:cNvPicPr>
@@ -12169,11 +12785,11 @@
       </p:sp>
       <p:pic>
         <p:nvPicPr>
-          <p:cNvPr id="26" name="Narration">
+          <p:cNvPr id="26" name="Narration" descr="Narration for this slide; captions available">
             <a:hlinkClick r:id="" action="ppaction://media"/>
             <a:extLst>
               <a:ext uri="{FF2B5EF4-FFF2-40B4-BE49-F238E27FC236}">
-                <a16:creationId xmlns:a16="http://schemas.microsoft.com/office/drawing/2014/main" id="{95B4156A-4643-62D8-DEA6-F3B0C47BBBDE}"/>
+                <a16:creationId xmlns:a16="http://schemas.microsoft.com/office/drawing/2014/main" id="{49012C26-AB8D-7FB2-4045-689332ED43FF}"/>
               </a:ext>
             </a:extLst>
           </p:cNvPr>
@@ -12184,7 +12800,17 @@
             <a:audioFile r:link="rId2"/>
             <p:extLst>
               <p:ext uri="{DAA4B4D4-6D71-4841-9C94-3DE7FCFB9230}">
-                <p14:media xmlns:p14="http://schemas.microsoft.com/office/powerpoint/2010/main" r:embed="rId1"/>
+                <p14:media xmlns:p14="http://schemas.microsoft.com/office/powerpoint/2010/main" r:embed="rId1">
+                  <p14:extLst>
+                    <p:ext uri="{3AFAAA56-56D3-431D-BCD4-E75A35582382}">
+                      <p173:tracksInfo xmlns:p173="http://schemas.microsoft.com/office/powerpoint/2017/3/main" displayLoc="slide">
+                        <p173:trackLst>
+                          <p173:track id="{8C24FB2D-2860-4EF2-9801-7E414D5BAD36}" label="English (captions)" lang="en-US" r:embed="rId10"/>
+                        </p173:trackLst>
+                      </p173:tracksInfo>
+                    </p:ext>
+                  </p14:extLst>
+                </p14:media>
               </p:ext>
             </p:extLst>
           </p:nvPr>
@@ -12351,7 +12977,13 @@
       </p:sp>
       <p:sp>
         <p:nvSpPr>
-          <p:cNvPr id="3" name="Tag How"/>
+          <p:cNvPr id="3" name="Tag How">
+            <a:extLst>
+              <a:ext uri="{C183D7F6-B498-43B3-948B-1728B52AA6E4}">
+                <adec:decorative xmlns:adec="http://schemas.microsoft.com/office/drawing/2017/decorative" val="1"/>
+              </a:ext>
+            </a:extLst>
+          </p:cNvPr>
           <p:cNvSpPr/>
           <p:nvPr/>
         </p:nvSpPr>
@@ -12414,7 +13046,13 @@
       </p:sp>
       <p:sp>
         <p:nvSpPr>
-          <p:cNvPr id="5" name="Ev 0"/>
+          <p:cNvPr id="5" name="Ev 0">
+            <a:extLst>
+              <a:ext uri="{C183D7F6-B498-43B3-948B-1728B52AA6E4}">
+                <adec:decorative xmlns:adec="http://schemas.microsoft.com/office/drawing/2017/decorative" val="1"/>
+              </a:ext>
+            </a:extLst>
+          </p:cNvPr>
           <p:cNvSpPr/>
           <p:nvPr/>
         </p:nvSpPr>
@@ -12498,7 +13136,13 @@
       </p:sp>
       <p:sp>
         <p:nvSpPr>
-          <p:cNvPr id="7" name="Ev 1"/>
+          <p:cNvPr id="7" name="Ev 1">
+            <a:extLst>
+              <a:ext uri="{C183D7F6-B498-43B3-948B-1728B52AA6E4}">
+                <adec:decorative xmlns:adec="http://schemas.microsoft.com/office/drawing/2017/decorative" val="1"/>
+              </a:ext>
+            </a:extLst>
+          </p:cNvPr>
           <p:cNvSpPr/>
           <p:nvPr/>
         </p:nvSpPr>
@@ -12582,7 +13226,13 @@
       </p:sp>
       <p:sp>
         <p:nvSpPr>
-          <p:cNvPr id="9" name="Ev 2"/>
+          <p:cNvPr id="9" name="Ev 2">
+            <a:extLst>
+              <a:ext uri="{C183D7F6-B498-43B3-948B-1728B52AA6E4}">
+                <adec:decorative xmlns:adec="http://schemas.microsoft.com/office/drawing/2017/decorative" val="1"/>
+              </a:ext>
+            </a:extLst>
+          </p:cNvPr>
           <p:cNvSpPr/>
           <p:nvPr/>
         </p:nvSpPr>
@@ -12666,7 +13316,13 @@
       </p:sp>
       <p:sp>
         <p:nvSpPr>
-          <p:cNvPr id="11" name="Facts"/>
+          <p:cNvPr id="11" name="Facts">
+            <a:extLst>
+              <a:ext uri="{C183D7F6-B498-43B3-948B-1728B52AA6E4}">
+                <adec:decorative xmlns:adec="http://schemas.microsoft.com/office/drawing/2017/decorative" val="1"/>
+              </a:ext>
+            </a:extLst>
+          </p:cNvPr>
           <p:cNvSpPr/>
           <p:nvPr/>
         </p:nvSpPr>
@@ -12830,7 +13486,13 @@
       </p:sp>
       <p:sp>
         <p:nvSpPr>
-          <p:cNvPr id="14" name="Codes"/>
+          <p:cNvPr id="14" name="Codes">
+            <a:extLst>
+              <a:ext uri="{C183D7F6-B498-43B3-948B-1728B52AA6E4}">
+                <adec:decorative xmlns:adec="http://schemas.microsoft.com/office/drawing/2017/decorative" val="1"/>
+              </a:ext>
+            </a:extLst>
+          </p:cNvPr>
           <p:cNvSpPr/>
           <p:nvPr/>
         </p:nvSpPr>
@@ -12864,7 +13526,13 @@
       </p:sp>
       <p:sp>
         <p:nvSpPr>
-          <p:cNvPr id="15" name="Icon FaListCheck"/>
+          <p:cNvPr id="15" name="Icon FaListCheck">
+            <a:extLst>
+              <a:ext uri="{C183D7F6-B498-43B3-948B-1728B52AA6E4}">
+                <adec:decorative xmlns:adec="http://schemas.microsoft.com/office/drawing/2017/decorative" val="1"/>
+              </a:ext>
+            </a:extLst>
+          </p:cNvPr>
           <p:cNvSpPr/>
           <p:nvPr/>
         </p:nvSpPr>
@@ -12889,7 +13557,13 @@
       </p:sp>
       <p:pic>
         <p:nvPicPr>
-          <p:cNvPr id="16" name="Image 0" descr="C:\Users\whale\git\mwb-b03\presentations\_build\icons\FaListCheck.png"/>
+          <p:cNvPr id="16" name="Image 0">
+            <a:extLst>
+              <a:ext uri="{C183D7F6-B498-43B3-948B-1728B52AA6E4}">
+                <adec:decorative xmlns:adec="http://schemas.microsoft.com/office/drawing/2017/decorative" val="1"/>
+              </a:ext>
+            </a:extLst>
+          </p:cNvPr>
           <p:cNvPicPr>
             <a:picLocks noChangeAspect="1"/>
           </p:cNvPicPr>
@@ -13038,11 +13712,11 @@
       </p:sp>
       <p:pic>
         <p:nvPicPr>
-          <p:cNvPr id="19" name="Narration">
+          <p:cNvPr id="19" name="Narration" descr="Narration for this slide; captions available">
             <a:hlinkClick r:id="" action="ppaction://media"/>
             <a:extLst>
               <a:ext uri="{FF2B5EF4-FFF2-40B4-BE49-F238E27FC236}">
-                <a16:creationId xmlns:a16="http://schemas.microsoft.com/office/drawing/2014/main" id="{5924EFDD-E005-3BD1-932F-4381FC37B1EF}"/>
+                <a16:creationId xmlns:a16="http://schemas.microsoft.com/office/drawing/2014/main" id="{70FF4B3C-2C88-0AF2-5D3C-5A441DB7F169}"/>
               </a:ext>
             </a:extLst>
           </p:cNvPr>
@@ -13053,7 +13727,17 @@
             <a:audioFile r:link="rId2"/>
             <p:extLst>
               <p:ext uri="{DAA4B4D4-6D71-4841-9C94-3DE7FCFB9230}">
-                <p14:media xmlns:p14="http://schemas.microsoft.com/office/powerpoint/2010/main" r:embed="rId1"/>
+                <p14:media xmlns:p14="http://schemas.microsoft.com/office/powerpoint/2010/main" r:embed="rId1">
+                  <p14:extLst>
+                    <p:ext uri="{3AFAAA56-56D3-431D-BCD4-E75A35582382}">
+                      <p173:tracksInfo xmlns:p173="http://schemas.microsoft.com/office/powerpoint/2017/3/main" displayLoc="slide">
+                        <p173:trackLst>
+                          <p173:track id="{1DB500FB-5DB9-4F39-B00E-A8FD9BC99DC8}" label="English (captions)" lang="en-US" r:embed="rId7"/>
+                        </p173:trackLst>
+                      </p173:tracksInfo>
+                    </p:ext>
+                  </p14:extLst>
+                </p14:media>
               </p:ext>
             </p:extLst>
           </p:nvPr>
@@ -13220,7 +13904,13 @@
       </p:sp>
       <p:sp>
         <p:nvSpPr>
-          <p:cNvPr id="3" name="Tag How"/>
+          <p:cNvPr id="3" name="Tag How">
+            <a:extLst>
+              <a:ext uri="{C183D7F6-B498-43B3-948B-1728B52AA6E4}">
+                <adec:decorative xmlns:adec="http://schemas.microsoft.com/office/drawing/2017/decorative" val="1"/>
+              </a:ext>
+            </a:extLst>
+          </p:cNvPr>
           <p:cNvSpPr/>
           <p:nvPr/>
         </p:nvSpPr>
@@ -13283,7 +13973,13 @@
       </p:sp>
       <p:sp>
         <p:nvSpPr>
-          <p:cNvPr id="5" name="Chain 0"/>
+          <p:cNvPr id="5" name="Chain 0">
+            <a:extLst>
+              <a:ext uri="{C183D7F6-B498-43B3-948B-1728B52AA6E4}">
+                <adec:decorative xmlns:adec="http://schemas.microsoft.com/office/drawing/2017/decorative" val="1"/>
+              </a:ext>
+            </a:extLst>
+          </p:cNvPr>
           <p:cNvSpPr/>
           <p:nvPr/>
         </p:nvSpPr>
@@ -13353,7 +14049,13 @@
       </p:sp>
       <p:sp>
         <p:nvSpPr>
-          <p:cNvPr id="7" name="Chain 1"/>
+          <p:cNvPr id="7" name="Chain 1">
+            <a:extLst>
+              <a:ext uri="{C183D7F6-B498-43B3-948B-1728B52AA6E4}">
+                <adec:decorative xmlns:adec="http://schemas.microsoft.com/office/drawing/2017/decorative" val="1"/>
+              </a:ext>
+            </a:extLst>
+          </p:cNvPr>
           <p:cNvSpPr/>
           <p:nvPr/>
         </p:nvSpPr>
@@ -13423,7 +14125,13 @@
       </p:sp>
       <p:sp>
         <p:nvSpPr>
-          <p:cNvPr id="9" name="Chain 2"/>
+          <p:cNvPr id="9" name="Chain 2">
+            <a:extLst>
+              <a:ext uri="{C183D7F6-B498-43B3-948B-1728B52AA6E4}">
+                <adec:decorative xmlns:adec="http://schemas.microsoft.com/office/drawing/2017/decorative" val="1"/>
+              </a:ext>
+            </a:extLst>
+          </p:cNvPr>
           <p:cNvSpPr/>
           <p:nvPr/>
         </p:nvSpPr>
@@ -13493,7 +14201,13 @@
       </p:sp>
       <p:sp>
         <p:nvSpPr>
-          <p:cNvPr id="11" name="Chain 3"/>
+          <p:cNvPr id="11" name="Chain 3">
+            <a:extLst>
+              <a:ext uri="{C183D7F6-B498-43B3-948B-1728B52AA6E4}">
+                <adec:decorative xmlns:adec="http://schemas.microsoft.com/office/drawing/2017/decorative" val="1"/>
+              </a:ext>
+            </a:extLst>
+          </p:cNvPr>
           <p:cNvSpPr/>
           <p:nvPr/>
         </p:nvSpPr>
@@ -13563,7 +14277,13 @@
       </p:sp>
       <p:sp>
         <p:nvSpPr>
-          <p:cNvPr id="13" name="Chain 4"/>
+          <p:cNvPr id="13" name="Chain 4">
+            <a:extLst>
+              <a:ext uri="{C183D7F6-B498-43B3-948B-1728B52AA6E4}">
+                <adec:decorative xmlns:adec="http://schemas.microsoft.com/office/drawing/2017/decorative" val="1"/>
+              </a:ext>
+            </a:extLst>
+          </p:cNvPr>
           <p:cNvSpPr/>
           <p:nvPr/>
         </p:nvSpPr>
@@ -13669,7 +14389,13 @@
       </p:sp>
       <p:sp>
         <p:nvSpPr>
-          <p:cNvPr id="16" name="Drift 0"/>
+          <p:cNvPr id="16" name="Drift 0">
+            <a:extLst>
+              <a:ext uri="{C183D7F6-B498-43B3-948B-1728B52AA6E4}">
+                <adec:decorative xmlns:adec="http://schemas.microsoft.com/office/drawing/2017/decorative" val="1"/>
+              </a:ext>
+            </a:extLst>
+          </p:cNvPr>
           <p:cNvSpPr/>
           <p:nvPr/>
         </p:nvSpPr>
@@ -13753,7 +14479,13 @@
       </p:sp>
       <p:sp>
         <p:nvSpPr>
-          <p:cNvPr id="18" name="Drift 1"/>
+          <p:cNvPr id="18" name="Drift 1">
+            <a:extLst>
+              <a:ext uri="{C183D7F6-B498-43B3-948B-1728B52AA6E4}">
+                <adec:decorative xmlns:adec="http://schemas.microsoft.com/office/drawing/2017/decorative" val="1"/>
+              </a:ext>
+            </a:extLst>
+          </p:cNvPr>
           <p:cNvSpPr/>
           <p:nvPr/>
         </p:nvSpPr>
@@ -13837,7 +14569,13 @@
       </p:sp>
       <p:sp>
         <p:nvSpPr>
-          <p:cNvPr id="20" name="Drift 2"/>
+          <p:cNvPr id="20" name="Drift 2">
+            <a:extLst>
+              <a:ext uri="{C183D7F6-B498-43B3-948B-1728B52AA6E4}">
+                <adec:decorative xmlns:adec="http://schemas.microsoft.com/office/drawing/2017/decorative" val="1"/>
+              </a:ext>
+            </a:extLst>
+          </p:cNvPr>
           <p:cNvSpPr/>
           <p:nvPr/>
         </p:nvSpPr>
@@ -13921,7 +14659,13 @@
       </p:sp>
       <p:sp>
         <p:nvSpPr>
-          <p:cNvPr id="22" name="Evidence"/>
+          <p:cNvPr id="22" name="Evidence">
+            <a:extLst>
+              <a:ext uri="{C183D7F6-B498-43B3-948B-1728B52AA6E4}">
+                <adec:decorative xmlns:adec="http://schemas.microsoft.com/office/drawing/2017/decorative" val="1"/>
+              </a:ext>
+            </a:extLst>
+          </p:cNvPr>
           <p:cNvSpPr/>
           <p:nvPr/>
         </p:nvSpPr>
@@ -13955,7 +14699,13 @@
       </p:sp>
       <p:sp>
         <p:nvSpPr>
-          <p:cNvPr id="23" name="Icon FaFileShield"/>
+          <p:cNvPr id="23" name="Icon FaFileShield">
+            <a:extLst>
+              <a:ext uri="{C183D7F6-B498-43B3-948B-1728B52AA6E4}">
+                <adec:decorative xmlns:adec="http://schemas.microsoft.com/office/drawing/2017/decorative" val="1"/>
+              </a:ext>
+            </a:extLst>
+          </p:cNvPr>
           <p:cNvSpPr/>
           <p:nvPr/>
         </p:nvSpPr>
@@ -13980,7 +14730,13 @@
       </p:sp>
       <p:pic>
         <p:nvPicPr>
-          <p:cNvPr id="24" name="Image 0" descr="C:\Users\whale\git\mwb-b03\presentations\_build\icons\FaFileShield.png"/>
+          <p:cNvPr id="24" name="Image 0">
+            <a:extLst>
+              <a:ext uri="{C183D7F6-B498-43B3-948B-1728B52AA6E4}">
+                <adec:decorative xmlns:adec="http://schemas.microsoft.com/office/drawing/2017/decorative" val="1"/>
+              </a:ext>
+            </a:extLst>
+          </p:cNvPr>
           <p:cNvPicPr>
             <a:picLocks noChangeAspect="1"/>
           </p:cNvPicPr>
@@ -14129,11 +14885,11 @@
       </p:sp>
       <p:pic>
         <p:nvPicPr>
-          <p:cNvPr id="28" name="Narration">
+          <p:cNvPr id="28" name="Narration" descr="Narration for this slide; captions available">
             <a:hlinkClick r:id="" action="ppaction://media"/>
             <a:extLst>
               <a:ext uri="{FF2B5EF4-FFF2-40B4-BE49-F238E27FC236}">
-                <a16:creationId xmlns:a16="http://schemas.microsoft.com/office/drawing/2014/main" id="{BA0F5658-AE23-0C6A-8162-80C393F2F874}"/>
+                <a16:creationId xmlns:a16="http://schemas.microsoft.com/office/drawing/2014/main" id="{45AD05F7-700D-A9DC-4ADF-0580489257EF}"/>
               </a:ext>
             </a:extLst>
           </p:cNvPr>
@@ -14144,7 +14900,17 @@
             <a:audioFile r:link="rId2"/>
             <p:extLst>
               <p:ext uri="{DAA4B4D4-6D71-4841-9C94-3DE7FCFB9230}">
-                <p14:media xmlns:p14="http://schemas.microsoft.com/office/powerpoint/2010/main" r:embed="rId1"/>
+                <p14:media xmlns:p14="http://schemas.microsoft.com/office/powerpoint/2010/main" r:embed="rId1">
+                  <p14:extLst>
+                    <p:ext uri="{3AFAAA56-56D3-431D-BCD4-E75A35582382}">
+                      <p173:tracksInfo xmlns:p173="http://schemas.microsoft.com/office/powerpoint/2017/3/main" displayLoc="slide">
+                        <p173:trackLst>
+                          <p173:track id="{1114AAAA-C54E-4031-83F8-6BE7A137F92E}" label="English (captions)" lang="en-US" r:embed="rId7"/>
+                        </p173:trackLst>
+                      </p173:tracksInfo>
+                    </p:ext>
+                  </p14:extLst>
+                </p14:media>
               </p:ext>
             </p:extLst>
           </p:nvPr>
@@ -14250,9 +15016,9 @@
 </file>
 
 <file path=ppt/theme/theme1.xml><?xml version="1.0" encoding="utf-8"?>
-<a:theme xmlns:a="http://schemas.openxmlformats.org/drawingml/2006/main" name="Modernization Workbook">
+<a:theme xmlns:a="http://schemas.openxmlformats.org/drawingml/2006/main" name="Federal Modernization Workbook">
   <a:themeElements>
-    <a:clrScheme name="Modernization Workbook">
+    <a:clrScheme name="Federal Modernization Workbook">
       <a:dk1>
         <a:srgbClr val="1F2A44"/>
       </a:dk1>
@@ -14290,7 +15056,7 @@
         <a:srgbClr val="334155"/>
       </a:folHlink>
     </a:clrScheme>
-    <a:fontScheme name="Modernization Workbook">
+    <a:fontScheme name="Federal Modernization Workbook">
       <a:majorFont>
         <a:latin typeface="Cambria"/>
         <a:ea typeface=""/>

--- a/presentations/b03-hr-identity/B03_HR_Identity_Narrated.pptx
+++ b/presentations/b03-hr-identity/B03_HR_Identity_Narrated.pptx
@@ -181,7 +181,7 @@
     </p:spTree>
     <p:extLst>
       <p:ext uri="{BB962C8B-B14F-4D97-AF65-F5344CB8AC3E}">
-        <p14:creationId xmlns:p14="http://schemas.microsoft.com/office/powerpoint/2010/main" val="1521767102"/>
+        <p14:creationId xmlns:p14="http://schemas.microsoft.com/office/powerpoint/2010/main" val="2794911298"/>
       </p:ext>
     </p:extLst>
   </p:cSld>
@@ -2251,7 +2251,7 @@
             <a:hlinkClick r:id="" action="ppaction://media"/>
             <a:extLst>
               <a:ext uri="{FF2B5EF4-FFF2-40B4-BE49-F238E27FC236}">
-                <a16:creationId xmlns:a16="http://schemas.microsoft.com/office/drawing/2014/main" id="{B49484A2-B0F4-E3F3-0EA4-7FAD78DAC4B8}"/>
+                <a16:creationId xmlns:a16="http://schemas.microsoft.com/office/drawing/2014/main" id="{09561653-56DF-BAB8-00FC-7CC92897617D}"/>
               </a:ext>
             </a:extLst>
           </p:cNvPr>
@@ -2267,7 +2267,7 @@
                     <p:ext uri="{3AFAAA56-56D3-431D-BCD4-E75A35582382}">
                       <p173:tracksInfo xmlns:p173="http://schemas.microsoft.com/office/powerpoint/2017/3/main" displayLoc="slide">
                         <p173:trackLst>
-                          <p173:track id="{1D422634-24FB-4BBE-8AB5-7D35321FD3D3}" label="English (captions)" lang="en-US" r:embed="rId6"/>
+                          <p173:track id="{F2471C24-6CDA-4A26-AB49-0A04E2552BEF}" label="English (captions)" lang="en-US" r:embed="rId6"/>
                         </p173:trackLst>
                       </p173:tracksInfo>
                     </p:ext>
@@ -3483,7 +3483,7 @@
             <a:hlinkClick r:id="" action="ppaction://media"/>
             <a:extLst>
               <a:ext uri="{FF2B5EF4-FFF2-40B4-BE49-F238E27FC236}">
-                <a16:creationId xmlns:a16="http://schemas.microsoft.com/office/drawing/2014/main" id="{11584D60-6A55-5F85-7538-0AA36E5E103A}"/>
+                <a16:creationId xmlns:a16="http://schemas.microsoft.com/office/drawing/2014/main" id="{9EDC308A-E861-EC9C-1F19-36A3AA1D2474}"/>
               </a:ext>
             </a:extLst>
           </p:cNvPr>
@@ -3499,7 +3499,7 @@
                     <p:ext uri="{3AFAAA56-56D3-431D-BCD4-E75A35582382}">
                       <p173:tracksInfo xmlns:p173="http://schemas.microsoft.com/office/powerpoint/2017/3/main" displayLoc="slide">
                         <p173:trackLst>
-                          <p173:track id="{0DBCACDF-07D6-4E1E-8BDA-5D6647BF01BB}" label="English (captions)" lang="en-US" r:embed="rId7"/>
+                          <p173:track id="{C2DD7D9C-63A3-449E-9F65-3B92D4165218}" label="English (captions)" lang="en-US" r:embed="rId7"/>
                         </p173:trackLst>
                       </p173:tracksInfo>
                     </p:ext>
@@ -4333,7 +4333,7 @@
             <a:hlinkClick r:id="" action="ppaction://media"/>
             <a:extLst>
               <a:ext uri="{FF2B5EF4-FFF2-40B4-BE49-F238E27FC236}">
-                <a16:creationId xmlns:a16="http://schemas.microsoft.com/office/drawing/2014/main" id="{D776F4C7-06AB-0465-7033-581314F04920}"/>
+                <a16:creationId xmlns:a16="http://schemas.microsoft.com/office/drawing/2014/main" id="{5C798436-0E64-89D0-71D9-40B34474C9CC}"/>
               </a:ext>
             </a:extLst>
           </p:cNvPr>
@@ -4349,7 +4349,7 @@
                     <p:ext uri="{3AFAAA56-56D3-431D-BCD4-E75A35582382}">
                       <p173:tracksInfo xmlns:p173="http://schemas.microsoft.com/office/powerpoint/2017/3/main" displayLoc="slide">
                         <p173:trackLst>
-                          <p173:track id="{46C3E400-F4B2-4F0E-93CD-6F743958342F}" label="English (captions)" lang="en-US" r:embed="rId8"/>
+                          <p173:track id="{AF9F84BF-55D9-4701-8132-CD2B03E0C8A0}" label="English (captions)" lang="en-US" r:embed="rId8"/>
                         </p173:trackLst>
                       </p173:tracksInfo>
                     </p:ext>
@@ -4382,10 +4382,10 @@
   </p:clrMapOvr>
   <mc:AlternateContent xmlns:mc="http://schemas.openxmlformats.org/markup-compatibility/2006">
     <mc:Choice xmlns:p14="http://schemas.microsoft.com/office/powerpoint/2010/main" Requires="p14">
-      <p:transition spd="slow" p14:dur="2000" advTm="64550"/>
+      <p:transition spd="slow" p14:dur="2000" advTm="66330"/>
     </mc:Choice>
     <mc:Fallback>
-      <p:transition spd="slow" advTm="64550"/>
+      <p:transition spd="slow" advTm="66330"/>
     </mc:Fallback>
   </mc:AlternateContent>
   <p:timing>
@@ -4419,7 +4419,7 @@
                                   <p:childTnLst>
                                     <p:cmd type="call" cmd="playFrom(0.0)">
                                       <p:cBhvr>
-                                        <p:cTn id="6" dur="63552" fill="hold"/>
+                                        <p:cTn id="6" dur="65328" fill="hold"/>
                                         <p:tgtEl>
                                           <p:spTgt spid="16"/>
                                         </p:tgtEl>
@@ -5455,7 +5455,7 @@
             <a:hlinkClick r:id="" action="ppaction://media"/>
             <a:extLst>
               <a:ext uri="{FF2B5EF4-FFF2-40B4-BE49-F238E27FC236}">
-                <a16:creationId xmlns:a16="http://schemas.microsoft.com/office/drawing/2014/main" id="{63C2FF8B-D4E5-6972-1D54-8C34F9A859E0}"/>
+                <a16:creationId xmlns:a16="http://schemas.microsoft.com/office/drawing/2014/main" id="{34A687C7-84A6-7FF8-5B8F-70AE1B177CFD}"/>
               </a:ext>
             </a:extLst>
           </p:cNvPr>
@@ -5471,7 +5471,7 @@
                     <p:ext uri="{3AFAAA56-56D3-431D-BCD4-E75A35582382}">
                       <p173:tracksInfo xmlns:p173="http://schemas.microsoft.com/office/powerpoint/2017/3/main" displayLoc="slide">
                         <p173:trackLst>
-                          <p173:track id="{BAA8279A-A365-4891-A9BF-183FB10700B2}" label="English (captions)" lang="en-US" r:embed="rId11"/>
+                          <p173:track id="{3111E321-9AA1-45C0-92FE-C063834E3759}" label="English (captions)" lang="en-US" r:embed="rId11"/>
                         </p173:trackLst>
                       </p173:tracksInfo>
                     </p:ext>
@@ -6550,7 +6550,7 @@
             <a:hlinkClick r:id="" action="ppaction://media"/>
             <a:extLst>
               <a:ext uri="{FF2B5EF4-FFF2-40B4-BE49-F238E27FC236}">
-                <a16:creationId xmlns:a16="http://schemas.microsoft.com/office/drawing/2014/main" id="{9B946C97-8040-9EE4-AD9E-D04ED0BD209D}"/>
+                <a16:creationId xmlns:a16="http://schemas.microsoft.com/office/drawing/2014/main" id="{8525C9CE-FA96-302C-D7E4-54F3E433C366}"/>
               </a:ext>
             </a:extLst>
           </p:cNvPr>
@@ -6566,7 +6566,7 @@
                     <p:ext uri="{3AFAAA56-56D3-431D-BCD4-E75A35582382}">
                       <p173:tracksInfo xmlns:p173="http://schemas.microsoft.com/office/powerpoint/2017/3/main" displayLoc="slide">
                         <p173:trackLst>
-                          <p173:track id="{D40F5DE4-F02B-421F-81D7-B4A631D5BE45}" label="English (captions)" lang="en-US" r:embed="rId10"/>
+                          <p173:track id="{350A31E1-1E49-4FF1-B1BF-E2E4A7EAEA1C}" label="English (captions)" lang="en-US" r:embed="rId10"/>
                         </p173:trackLst>
                       </p173:tracksInfo>
                     </p:ext>
@@ -6599,10 +6599,10 @@
   </p:clrMapOvr>
   <mc:AlternateContent xmlns:mc="http://schemas.openxmlformats.org/markup-compatibility/2006">
     <mc:Choice xmlns:p14="http://schemas.microsoft.com/office/powerpoint/2010/main" Requires="p14">
-      <p:transition spd="slow" p14:dur="2000" advTm="72040"/>
+      <p:transition spd="slow" p14:dur="2000" advTm="74010"/>
     </mc:Choice>
     <mc:Fallback>
-      <p:transition spd="slow" advTm="72040"/>
+      <p:transition spd="slow" advTm="74010"/>
     </mc:Fallback>
   </mc:AlternateContent>
   <p:timing>
@@ -6636,7 +6636,7 @@
                                   <p:childTnLst>
                                     <p:cmd type="call" cmd="playFrom(0.0)">
                                       <p:cBhvr>
-                                        <p:cTn id="6" dur="71040" fill="hold"/>
+                                        <p:cTn id="6" dur="73008" fill="hold"/>
                                         <p:tgtEl>
                                           <p:spTgt spid="26"/>
                                         </p:tgtEl>
@@ -9266,7 +9266,7 @@
             <a:hlinkClick r:id="" action="ppaction://media"/>
             <a:extLst>
               <a:ext uri="{FF2B5EF4-FFF2-40B4-BE49-F238E27FC236}">
-                <a16:creationId xmlns:a16="http://schemas.microsoft.com/office/drawing/2014/main" id="{97E54415-1B68-8A0A-A814-5063FA58847A}"/>
+                <a16:creationId xmlns:a16="http://schemas.microsoft.com/office/drawing/2014/main" id="{9E1344E1-00F0-8550-5328-5F64BEA6AA53}"/>
               </a:ext>
             </a:extLst>
           </p:cNvPr>
@@ -9282,7 +9282,7 @@
                     <p:ext uri="{3AFAAA56-56D3-431D-BCD4-E75A35582382}">
                       <p173:tracksInfo xmlns:p173="http://schemas.microsoft.com/office/powerpoint/2017/3/main" displayLoc="slide">
                         <p173:trackLst>
-                          <p173:track id="{B282D164-CC6E-4584-80F8-D5846B19FA10}" label="English (captions)" lang="en-US" r:embed="rId7"/>
+                          <p173:track id="{957C7A58-9AE0-4D2E-B697-E78F97435031}" label="English (captions)" lang="en-US" r:embed="rId7"/>
                         </p173:trackLst>
                       </p173:tracksInfo>
                     </p:ext>
@@ -10583,7 +10583,7 @@
             <a:hlinkClick r:id="" action="ppaction://media"/>
             <a:extLst>
               <a:ext uri="{FF2B5EF4-FFF2-40B4-BE49-F238E27FC236}">
-                <a16:creationId xmlns:a16="http://schemas.microsoft.com/office/drawing/2014/main" id="{1C9CAB11-18FF-6164-F5CA-6E6AA76DF9D9}"/>
+                <a16:creationId xmlns:a16="http://schemas.microsoft.com/office/drawing/2014/main" id="{E29F3A37-2832-B742-C137-24E51482882E}"/>
               </a:ext>
             </a:extLst>
           </p:cNvPr>
@@ -10599,7 +10599,7 @@
                     <p:ext uri="{3AFAAA56-56D3-431D-BCD4-E75A35582382}">
                       <p173:tracksInfo xmlns:p173="http://schemas.microsoft.com/office/powerpoint/2017/3/main" displayLoc="slide">
                         <p173:trackLst>
-                          <p173:track id="{F8D28914-D3BE-4DD8-BD76-F501169F6640}" label="English (captions)" lang="en-US" r:embed="rId8"/>
+                          <p173:track id="{AF1A1275-15ED-4DC7-AAB1-9DB9E75D0CD8}" label="English (captions)" lang="en-US" r:embed="rId8"/>
                         </p173:trackLst>
                       </p173:tracksInfo>
                     </p:ext>
@@ -11510,7 +11510,7 @@
             <a:hlinkClick r:id="" action="ppaction://media"/>
             <a:extLst>
               <a:ext uri="{FF2B5EF4-FFF2-40B4-BE49-F238E27FC236}">
-                <a16:creationId xmlns:a16="http://schemas.microsoft.com/office/drawing/2014/main" id="{8EC37B60-7E26-5246-52D2-8E5E3E7A0209}"/>
+                <a16:creationId xmlns:a16="http://schemas.microsoft.com/office/drawing/2014/main" id="{2157790A-6647-5E9D-1C25-A437B1303A1E}"/>
               </a:ext>
             </a:extLst>
           </p:cNvPr>
@@ -11526,7 +11526,7 @@
                     <p:ext uri="{3AFAAA56-56D3-431D-BCD4-E75A35582382}">
                       <p173:tracksInfo xmlns:p173="http://schemas.microsoft.com/office/powerpoint/2017/3/main" displayLoc="slide">
                         <p173:trackLst>
-                          <p173:track id="{59F8097B-B553-4346-A5C2-96C4E55FF6CE}" label="English (captions)" lang="en-US" r:embed="rId7"/>
+                          <p173:track id="{22C0DD09-3F9A-4E27-8AAD-D25125FAC783}" label="English (captions)" lang="en-US" r:embed="rId7"/>
                         </p173:trackLst>
                       </p173:tracksInfo>
                     </p:ext>
@@ -12789,7 +12789,7 @@
             <a:hlinkClick r:id="" action="ppaction://media"/>
             <a:extLst>
               <a:ext uri="{FF2B5EF4-FFF2-40B4-BE49-F238E27FC236}">
-                <a16:creationId xmlns:a16="http://schemas.microsoft.com/office/drawing/2014/main" id="{49012C26-AB8D-7FB2-4045-689332ED43FF}"/>
+                <a16:creationId xmlns:a16="http://schemas.microsoft.com/office/drawing/2014/main" id="{FD2FE65C-0B0E-CF82-AEE9-F6E1F0E0D8E4}"/>
               </a:ext>
             </a:extLst>
           </p:cNvPr>
@@ -12805,7 +12805,7 @@
                     <p:ext uri="{3AFAAA56-56D3-431D-BCD4-E75A35582382}">
                       <p173:tracksInfo xmlns:p173="http://schemas.microsoft.com/office/powerpoint/2017/3/main" displayLoc="slide">
                         <p173:trackLst>
-                          <p173:track id="{8C24FB2D-2860-4EF2-9801-7E414D5BAD36}" label="English (captions)" lang="en-US" r:embed="rId10"/>
+                          <p173:track id="{A11D2510-0EE7-4C48-B1B3-5B0535340893}" label="English (captions)" lang="en-US" r:embed="rId10"/>
                         </p173:trackLst>
                       </p173:tracksInfo>
                     </p:ext>
@@ -13716,7 +13716,7 @@
             <a:hlinkClick r:id="" action="ppaction://media"/>
             <a:extLst>
               <a:ext uri="{FF2B5EF4-FFF2-40B4-BE49-F238E27FC236}">
-                <a16:creationId xmlns:a16="http://schemas.microsoft.com/office/drawing/2014/main" id="{70FF4B3C-2C88-0AF2-5D3C-5A441DB7F169}"/>
+                <a16:creationId xmlns:a16="http://schemas.microsoft.com/office/drawing/2014/main" id="{CB59A3F6-251F-7BCA-9BC9-DA2DF5FC3303}"/>
               </a:ext>
             </a:extLst>
           </p:cNvPr>
@@ -13732,7 +13732,7 @@
                     <p:ext uri="{3AFAAA56-56D3-431D-BCD4-E75A35582382}">
                       <p173:tracksInfo xmlns:p173="http://schemas.microsoft.com/office/powerpoint/2017/3/main" displayLoc="slide">
                         <p173:trackLst>
-                          <p173:track id="{1DB500FB-5DB9-4F39-B00E-A8FD9BC99DC8}" label="English (captions)" lang="en-US" r:embed="rId7"/>
+                          <p173:track id="{81491A8D-28F7-4E97-9F84-4D606EBC997D}" label="English (captions)" lang="en-US" r:embed="rId7"/>
                         </p173:trackLst>
                       </p173:tracksInfo>
                     </p:ext>
@@ -14889,7 +14889,7 @@
             <a:hlinkClick r:id="" action="ppaction://media"/>
             <a:extLst>
               <a:ext uri="{FF2B5EF4-FFF2-40B4-BE49-F238E27FC236}">
-                <a16:creationId xmlns:a16="http://schemas.microsoft.com/office/drawing/2014/main" id="{45AD05F7-700D-A9DC-4ADF-0580489257EF}"/>
+                <a16:creationId xmlns:a16="http://schemas.microsoft.com/office/drawing/2014/main" id="{3036EBFA-1AF5-B3EC-CDAB-54BD2EFF4F3D}"/>
               </a:ext>
             </a:extLst>
           </p:cNvPr>
@@ -14905,7 +14905,7 @@
                     <p:ext uri="{3AFAAA56-56D3-431D-BCD4-E75A35582382}">
                       <p173:tracksInfo xmlns:p173="http://schemas.microsoft.com/office/powerpoint/2017/3/main" displayLoc="slide">
                         <p173:trackLst>
-                          <p173:track id="{1114AAAA-C54E-4031-83F8-6BE7A137F92E}" label="English (captions)" lang="en-US" r:embed="rId7"/>
+                          <p173:track id="{CD80A87F-8BFA-4DD4-A782-ED2614A3A878}" label="English (captions)" lang="en-US" r:embed="rId7"/>
                         </p173:trackLst>
                       </p173:tracksInfo>
                     </p:ext>

--- a/presentations/b03-hr-identity/B03_HR_Identity_Narrated.pptx
+++ b/presentations/b03-hr-identity/B03_HR_Identity_Narrated.pptx
@@ -181,7 +181,7 @@
     </p:spTree>
     <p:extLst>
       <p:ext uri="{BB962C8B-B14F-4D97-AF65-F5344CB8AC3E}">
-        <p14:creationId xmlns:p14="http://schemas.microsoft.com/office/powerpoint/2010/main" val="2794911298"/>
+        <p14:creationId xmlns:p14="http://schemas.microsoft.com/office/powerpoint/2010/main" val="2666785235"/>
       </p:ext>
     </p:extLst>
   </p:cSld>
@@ -2251,7 +2251,7 @@
             <a:hlinkClick r:id="" action="ppaction://media"/>
             <a:extLst>
               <a:ext uri="{FF2B5EF4-FFF2-40B4-BE49-F238E27FC236}">
-                <a16:creationId xmlns:a16="http://schemas.microsoft.com/office/drawing/2014/main" id="{09561653-56DF-BAB8-00FC-7CC92897617D}"/>
+                <a16:creationId xmlns:a16="http://schemas.microsoft.com/office/drawing/2014/main" id="{13874654-1B91-4746-A9B0-CD3F05790B11}"/>
               </a:ext>
             </a:extLst>
           </p:cNvPr>
@@ -2267,7 +2267,7 @@
                     <p:ext uri="{3AFAAA56-56D3-431D-BCD4-E75A35582382}">
                       <p173:tracksInfo xmlns:p173="http://schemas.microsoft.com/office/powerpoint/2017/3/main" displayLoc="slide">
                         <p173:trackLst>
-                          <p173:track id="{F2471C24-6CDA-4A26-AB49-0A04E2552BEF}" label="English (captions)" lang="en-US" r:embed="rId6"/>
+                          <p173:track id="{BA1483D9-899D-47DA-9647-5FAABA86BFE5}" label="English (captions)" lang="en-US" r:embed="rId6"/>
                         </p173:trackLst>
                       </p173:tracksInfo>
                     </p:ext>
@@ -2300,10 +2300,10 @@
   </p:clrMapOvr>
   <mc:AlternateContent xmlns:mc="http://schemas.openxmlformats.org/markup-compatibility/2006">
     <mc:Choice xmlns:p14="http://schemas.microsoft.com/office/powerpoint/2010/main" Requires="p14">
-      <p:transition spd="slow" p14:dur="2000" advTm="31460"/>
+      <p:transition spd="slow" p14:dur="2000" advTm="40000"/>
     </mc:Choice>
     <mc:Fallback>
-      <p:transition spd="slow" advTm="31460"/>
+      <p:transition spd="slow" advTm="40000"/>
     </mc:Fallback>
   </mc:AlternateContent>
   <p:timing>
@@ -2337,7 +2337,7 @@
                                   <p:childTnLst>
                                     <p:cmd type="call" cmd="playFrom(0.0)">
                                       <p:cBhvr>
-                                        <p:cTn id="6" dur="30456" fill="hold"/>
+                                        <p:cTn id="6" dur="36000" fill="hold"/>
                                         <p:tgtEl>
                                           <p:spTgt spid="8"/>
                                         </p:tgtEl>
@@ -3483,7 +3483,7 @@
             <a:hlinkClick r:id="" action="ppaction://media"/>
             <a:extLst>
               <a:ext uri="{FF2B5EF4-FFF2-40B4-BE49-F238E27FC236}">
-                <a16:creationId xmlns:a16="http://schemas.microsoft.com/office/drawing/2014/main" id="{9EDC308A-E861-EC9C-1F19-36A3AA1D2474}"/>
+                <a16:creationId xmlns:a16="http://schemas.microsoft.com/office/drawing/2014/main" id="{F12A40A4-29CF-E38B-F03E-85A37A354DDE}"/>
               </a:ext>
             </a:extLst>
           </p:cNvPr>
@@ -3499,7 +3499,7 @@
                     <p:ext uri="{3AFAAA56-56D3-431D-BCD4-E75A35582382}">
                       <p173:tracksInfo xmlns:p173="http://schemas.microsoft.com/office/powerpoint/2017/3/main" displayLoc="slide">
                         <p173:trackLst>
-                          <p173:track id="{C2DD7D9C-63A3-449E-9F65-3B92D4165218}" label="English (captions)" lang="en-US" r:embed="rId7"/>
+                          <p173:track id="{B2383994-3201-457C-9293-184679E554CB}" label="English (captions)" lang="en-US" r:embed="rId7"/>
                         </p173:trackLst>
                       </p173:tracksInfo>
                     </p:ext>
@@ -3532,10 +3532,10 @@
   </p:clrMapOvr>
   <mc:AlternateContent xmlns:mc="http://schemas.openxmlformats.org/markup-compatibility/2006">
     <mc:Choice xmlns:p14="http://schemas.microsoft.com/office/powerpoint/2010/main" Requires="p14">
-      <p:transition spd="slow" p14:dur="2000" advTm="71490"/>
+      <p:transition spd="slow" p14:dur="2000" advTm="56920"/>
     </mc:Choice>
     <mc:Fallback>
-      <p:transition spd="slow" advTm="71490"/>
+      <p:transition spd="slow" advTm="56920"/>
     </mc:Fallback>
   </mc:AlternateContent>
   <p:timing>
@@ -3569,7 +3569,7 @@
                                   <p:childTnLst>
                                     <p:cmd type="call" cmd="playFrom(0.0)">
                                       <p:cBhvr>
-                                        <p:cTn id="6" dur="70488" fill="hold"/>
+                                        <p:cTn id="6" dur="52920" fill="hold"/>
                                         <p:tgtEl>
                                           <p:spTgt spid="26"/>
                                         </p:tgtEl>
@@ -4333,7 +4333,7 @@
             <a:hlinkClick r:id="" action="ppaction://media"/>
             <a:extLst>
               <a:ext uri="{FF2B5EF4-FFF2-40B4-BE49-F238E27FC236}">
-                <a16:creationId xmlns:a16="http://schemas.microsoft.com/office/drawing/2014/main" id="{5C798436-0E64-89D0-71D9-40B34474C9CC}"/>
+                <a16:creationId xmlns:a16="http://schemas.microsoft.com/office/drawing/2014/main" id="{4870A512-BC8D-4647-B45A-FB546F46962D}"/>
               </a:ext>
             </a:extLst>
           </p:cNvPr>
@@ -4349,7 +4349,7 @@
                     <p:ext uri="{3AFAAA56-56D3-431D-BCD4-E75A35582382}">
                       <p173:tracksInfo xmlns:p173="http://schemas.microsoft.com/office/powerpoint/2017/3/main" displayLoc="slide">
                         <p173:trackLst>
-                          <p173:track id="{AF9F84BF-55D9-4701-8132-CD2B03E0C8A0}" label="English (captions)" lang="en-US" r:embed="rId8"/>
+                          <p173:track id="{77FA6C07-8BDB-48AC-8914-15859DDCB31F}" label="English (captions)" lang="en-US" r:embed="rId8"/>
                         </p173:trackLst>
                       </p173:tracksInfo>
                     </p:ext>
@@ -4382,10 +4382,10 @@
   </p:clrMapOvr>
   <mc:AlternateContent xmlns:mc="http://schemas.openxmlformats.org/markup-compatibility/2006">
     <mc:Choice xmlns:p14="http://schemas.microsoft.com/office/powerpoint/2010/main" Requires="p14">
-      <p:transition spd="slow" p14:dur="2000" advTm="66330"/>
+      <p:transition spd="slow" p14:dur="2000" advTm="60930"/>
     </mc:Choice>
     <mc:Fallback>
-      <p:transition spd="slow" advTm="66330"/>
+      <p:transition spd="slow" advTm="60930"/>
     </mc:Fallback>
   </mc:AlternateContent>
   <p:timing>
@@ -4419,7 +4419,7 @@
                                   <p:childTnLst>
                                     <p:cmd type="call" cmd="playFrom(0.0)">
                                       <p:cBhvr>
-                                        <p:cTn id="6" dur="65328" fill="hold"/>
+                                        <p:cTn id="6" dur="56928" fill="hold"/>
                                         <p:tgtEl>
                                           <p:spTgt spid="16"/>
                                         </p:tgtEl>
@@ -5455,7 +5455,7 @@
             <a:hlinkClick r:id="" action="ppaction://media"/>
             <a:extLst>
               <a:ext uri="{FF2B5EF4-FFF2-40B4-BE49-F238E27FC236}">
-                <a16:creationId xmlns:a16="http://schemas.microsoft.com/office/drawing/2014/main" id="{34A687C7-84A6-7FF8-5B8F-70AE1B177CFD}"/>
+                <a16:creationId xmlns:a16="http://schemas.microsoft.com/office/drawing/2014/main" id="{C33FC3D9-DA02-3854-4E79-F5FFCB686E45}"/>
               </a:ext>
             </a:extLst>
           </p:cNvPr>
@@ -5471,7 +5471,7 @@
                     <p:ext uri="{3AFAAA56-56D3-431D-BCD4-E75A35582382}">
                       <p173:tracksInfo xmlns:p173="http://schemas.microsoft.com/office/powerpoint/2017/3/main" displayLoc="slide">
                         <p173:trackLst>
-                          <p173:track id="{3111E321-9AA1-45C0-92FE-C063834E3759}" label="English (captions)" lang="en-US" r:embed="rId11"/>
+                          <p173:track id="{D4487268-9FC2-4289-B832-BF03EE68A42B}" label="English (captions)" lang="en-US" r:embed="rId11"/>
                         </p173:trackLst>
                       </p173:tracksInfo>
                     </p:ext>
@@ -5504,10 +5504,10 @@
   </p:clrMapOvr>
   <mc:AlternateContent xmlns:mc="http://schemas.openxmlformats.org/markup-compatibility/2006">
     <mc:Choice xmlns:p14="http://schemas.microsoft.com/office/powerpoint/2010/main" Requires="p14">
-      <p:transition spd="slow" p14:dur="2000" advTm="68680"/>
+      <p:transition spd="slow" p14:dur="2000" advTm="58310"/>
     </mc:Choice>
     <mc:Fallback>
-      <p:transition spd="slow" advTm="68680"/>
+      <p:transition spd="slow" advTm="58310"/>
     </mc:Fallback>
   </mc:AlternateContent>
   <p:timing>
@@ -5541,7 +5541,7 @@
                                   <p:childTnLst>
                                     <p:cmd type="call" cmd="playFrom(0.0)">
                                       <p:cBhvr>
-                                        <p:cTn id="6" dur="67680" fill="hold"/>
+                                        <p:cTn id="6" dur="54312" fill="hold"/>
                                         <p:tgtEl>
                                           <p:spTgt spid="27"/>
                                         </p:tgtEl>
@@ -6550,7 +6550,7 @@
             <a:hlinkClick r:id="" action="ppaction://media"/>
             <a:extLst>
               <a:ext uri="{FF2B5EF4-FFF2-40B4-BE49-F238E27FC236}">
-                <a16:creationId xmlns:a16="http://schemas.microsoft.com/office/drawing/2014/main" id="{8525C9CE-FA96-302C-D7E4-54F3E433C366}"/>
+                <a16:creationId xmlns:a16="http://schemas.microsoft.com/office/drawing/2014/main" id="{991A7F71-E971-86BF-798D-0CB1929A1176}"/>
               </a:ext>
             </a:extLst>
           </p:cNvPr>
@@ -6566,7 +6566,7 @@
                     <p:ext uri="{3AFAAA56-56D3-431D-BCD4-E75A35582382}">
                       <p173:tracksInfo xmlns:p173="http://schemas.microsoft.com/office/powerpoint/2017/3/main" displayLoc="slide">
                         <p173:trackLst>
-                          <p173:track id="{350A31E1-1E49-4FF1-B1BF-E2E4A7EAEA1C}" label="English (captions)" lang="en-US" r:embed="rId10"/>
+                          <p173:track id="{BD1144B7-0497-4D36-9DE5-CEBAC2E2E99F}" label="English (captions)" lang="en-US" r:embed="rId10"/>
                         </p173:trackLst>
                       </p173:tracksInfo>
                     </p:ext>
@@ -6599,10 +6599,10 @@
   </p:clrMapOvr>
   <mc:AlternateContent xmlns:mc="http://schemas.openxmlformats.org/markup-compatibility/2006">
     <mc:Choice xmlns:p14="http://schemas.microsoft.com/office/powerpoint/2010/main" Requires="p14">
-      <p:transition spd="slow" p14:dur="2000" advTm="74010"/>
+      <p:transition spd="slow" p14:dur="2000" advTm="66280"/>
     </mc:Choice>
     <mc:Fallback>
-      <p:transition spd="slow" advTm="74010"/>
+      <p:transition spd="slow" advTm="66280"/>
     </mc:Fallback>
   </mc:AlternateContent>
   <p:timing>
@@ -6636,7 +6636,7 @@
                                   <p:childTnLst>
                                     <p:cmd type="call" cmd="playFrom(0.0)">
                                       <p:cBhvr>
-                                        <p:cTn id="6" dur="73008" fill="hold"/>
+                                        <p:cTn id="6" dur="62280" fill="hold"/>
                                         <p:tgtEl>
                                           <p:spTgt spid="26"/>
                                         </p:tgtEl>
@@ -9266,7 +9266,7 @@
             <a:hlinkClick r:id="" action="ppaction://media"/>
             <a:extLst>
               <a:ext uri="{FF2B5EF4-FFF2-40B4-BE49-F238E27FC236}">
-                <a16:creationId xmlns:a16="http://schemas.microsoft.com/office/drawing/2014/main" id="{9E1344E1-00F0-8550-5328-5F64BEA6AA53}"/>
+                <a16:creationId xmlns:a16="http://schemas.microsoft.com/office/drawing/2014/main" id="{43FC4DDD-1067-4F6A-9F7D-5B85020D8D3D}"/>
               </a:ext>
             </a:extLst>
           </p:cNvPr>
@@ -9282,7 +9282,7 @@
                     <p:ext uri="{3AFAAA56-56D3-431D-BCD4-E75A35582382}">
                       <p173:tracksInfo xmlns:p173="http://schemas.microsoft.com/office/powerpoint/2017/3/main" displayLoc="slide">
                         <p173:trackLst>
-                          <p173:track id="{957C7A58-9AE0-4D2E-B697-E78F97435031}" label="English (captions)" lang="en-US" r:embed="rId7"/>
+                          <p173:track id="{103E6781-2EE5-4C92-A4FF-7F44A86508D8}" label="English (captions)" lang="en-US" r:embed="rId7"/>
                         </p173:trackLst>
                       </p173:tracksInfo>
                     </p:ext>
@@ -9315,10 +9315,10 @@
   </p:clrMapOvr>
   <mc:AlternateContent xmlns:mc="http://schemas.openxmlformats.org/markup-compatibility/2006">
     <mc:Choice xmlns:p14="http://schemas.microsoft.com/office/powerpoint/2010/main" Requires="p14">
-      <p:transition spd="slow" p14:dur="2000" advTm="79840"/>
+      <p:transition spd="slow" p14:dur="2000" advTm="65130"/>
     </mc:Choice>
     <mc:Fallback>
-      <p:transition spd="slow" advTm="79840"/>
+      <p:transition spd="slow" advTm="65130"/>
     </mc:Fallback>
   </mc:AlternateContent>
   <p:timing>
@@ -9352,7 +9352,7 @@
                                   <p:childTnLst>
                                     <p:cmd type="call" cmd="playFrom(0.0)">
                                       <p:cBhvr>
-                                        <p:cTn id="6" dur="78840" fill="hold"/>
+                                        <p:cTn id="6" dur="61128" fill="hold"/>
                                         <p:tgtEl>
                                           <p:spTgt spid="11"/>
                                         </p:tgtEl>
@@ -10583,7 +10583,7 @@
             <a:hlinkClick r:id="" action="ppaction://media"/>
             <a:extLst>
               <a:ext uri="{FF2B5EF4-FFF2-40B4-BE49-F238E27FC236}">
-                <a16:creationId xmlns:a16="http://schemas.microsoft.com/office/drawing/2014/main" id="{E29F3A37-2832-B742-C137-24E51482882E}"/>
+                <a16:creationId xmlns:a16="http://schemas.microsoft.com/office/drawing/2014/main" id="{19155E5F-59E0-AF59-9E6B-E1A4E990AB0E}"/>
               </a:ext>
             </a:extLst>
           </p:cNvPr>
@@ -10599,7 +10599,7 @@
                     <p:ext uri="{3AFAAA56-56D3-431D-BCD4-E75A35582382}">
                       <p173:tracksInfo xmlns:p173="http://schemas.microsoft.com/office/powerpoint/2017/3/main" displayLoc="slide">
                         <p173:trackLst>
-                          <p173:track id="{AF1A1275-15ED-4DC7-AAB1-9DB9E75D0CD8}" label="English (captions)" lang="en-US" r:embed="rId8"/>
+                          <p173:track id="{F966C6FE-EEA4-47C9-B559-0D4AD96B0345}" label="English (captions)" lang="en-US" r:embed="rId8"/>
                         </p173:trackLst>
                       </p173:tracksInfo>
                     </p:ext>
@@ -10632,10 +10632,10 @@
   </p:clrMapOvr>
   <mc:AlternateContent xmlns:mc="http://schemas.openxmlformats.org/markup-compatibility/2006">
     <mc:Choice xmlns:p14="http://schemas.microsoft.com/office/powerpoint/2010/main" Requires="p14">
-      <p:transition spd="slow" p14:dur="2000" advTm="65900"/>
+      <p:transition spd="slow" p14:dur="2000" advTm="60590"/>
     </mc:Choice>
     <mc:Fallback>
-      <p:transition spd="slow" advTm="65900"/>
+      <p:transition spd="slow" advTm="60590"/>
     </mc:Fallback>
   </mc:AlternateContent>
   <p:timing>
@@ -10669,7 +10669,7 @@
                                   <p:childTnLst>
                                     <p:cmd type="call" cmd="playFrom(0.0)">
                                       <p:cBhvr>
-                                        <p:cTn id="6" dur="64896" fill="hold"/>
+                                        <p:cTn id="6" dur="56592" fill="hold"/>
                                         <p:tgtEl>
                                           <p:spTgt spid="16"/>
                                         </p:tgtEl>
@@ -11510,7 +11510,7 @@
             <a:hlinkClick r:id="" action="ppaction://media"/>
             <a:extLst>
               <a:ext uri="{FF2B5EF4-FFF2-40B4-BE49-F238E27FC236}">
-                <a16:creationId xmlns:a16="http://schemas.microsoft.com/office/drawing/2014/main" id="{2157790A-6647-5E9D-1C25-A437B1303A1E}"/>
+                <a16:creationId xmlns:a16="http://schemas.microsoft.com/office/drawing/2014/main" id="{614A0775-5494-2DCC-AF90-67BD9BA6AAE0}"/>
               </a:ext>
             </a:extLst>
           </p:cNvPr>
@@ -11526,7 +11526,7 @@
                     <p:ext uri="{3AFAAA56-56D3-431D-BCD4-E75A35582382}">
                       <p173:tracksInfo xmlns:p173="http://schemas.microsoft.com/office/powerpoint/2017/3/main" displayLoc="slide">
                         <p173:trackLst>
-                          <p173:track id="{22C0DD09-3F9A-4E27-8AAD-D25125FAC783}" label="English (captions)" lang="en-US" r:embed="rId7"/>
+                          <p173:track id="{61140AC4-478A-43EB-9A36-EB18190A7515}" label="English (captions)" lang="en-US" r:embed="rId7"/>
                         </p173:trackLst>
                       </p173:tracksInfo>
                     </p:ext>
@@ -11559,10 +11559,10 @@
   </p:clrMapOvr>
   <mc:AlternateContent xmlns:mc="http://schemas.openxmlformats.org/markup-compatibility/2006">
     <mc:Choice xmlns:p14="http://schemas.microsoft.com/office/powerpoint/2010/main" Requires="p14">
-      <p:transition spd="slow" p14:dur="2000" advTm="67720"/>
+      <p:transition spd="slow" p14:dur="2000" advTm="62540"/>
     </mc:Choice>
     <mc:Fallback>
-      <p:transition spd="slow" advTm="67720"/>
+      <p:transition spd="slow" advTm="62540"/>
     </mc:Fallback>
   </mc:AlternateContent>
   <p:timing>
@@ -11596,7 +11596,7 @@
                                   <p:childTnLst>
                                     <p:cmd type="call" cmd="playFrom(0.0)">
                                       <p:cBhvr>
-                                        <p:cTn id="6" dur="66720" fill="hold"/>
+                                        <p:cTn id="6" dur="58536" fill="hold"/>
                                         <p:tgtEl>
                                           <p:spTgt spid="19"/>
                                         </p:tgtEl>
@@ -12789,7 +12789,7 @@
             <a:hlinkClick r:id="" action="ppaction://media"/>
             <a:extLst>
               <a:ext uri="{FF2B5EF4-FFF2-40B4-BE49-F238E27FC236}">
-                <a16:creationId xmlns:a16="http://schemas.microsoft.com/office/drawing/2014/main" id="{FD2FE65C-0B0E-CF82-AEE9-F6E1F0E0D8E4}"/>
+                <a16:creationId xmlns:a16="http://schemas.microsoft.com/office/drawing/2014/main" id="{B47719F6-6C62-494A-BDEB-244D12A909D7}"/>
               </a:ext>
             </a:extLst>
           </p:cNvPr>
@@ -12805,7 +12805,7 @@
                     <p:ext uri="{3AFAAA56-56D3-431D-BCD4-E75A35582382}">
                       <p173:tracksInfo xmlns:p173="http://schemas.microsoft.com/office/powerpoint/2017/3/main" displayLoc="slide">
                         <p173:trackLst>
-                          <p173:track id="{A11D2510-0EE7-4C48-B1B3-5B0535340893}" label="English (captions)" lang="en-US" r:embed="rId10"/>
+                          <p173:track id="{11B3AC0A-2613-4B61-B243-97DB2110E417}" label="English (captions)" lang="en-US" r:embed="rId10"/>
                         </p173:trackLst>
                       </p173:tracksInfo>
                     </p:ext>
@@ -12838,10 +12838,10 @@
   </p:clrMapOvr>
   <mc:AlternateContent xmlns:mc="http://schemas.openxmlformats.org/markup-compatibility/2006">
     <mc:Choice xmlns:p14="http://schemas.microsoft.com/office/powerpoint/2010/main" Requires="p14">
-      <p:transition spd="slow" p14:dur="2000" advTm="78380"/>
+      <p:transition spd="slow" p14:dur="2000" advTm="60620"/>
     </mc:Choice>
     <mc:Fallback>
-      <p:transition spd="slow" advTm="78380"/>
+      <p:transition spd="slow" advTm="60620"/>
     </mc:Fallback>
   </mc:AlternateContent>
   <p:timing>
@@ -12875,7 +12875,7 @@
                                   <p:childTnLst>
                                     <p:cmd type="call" cmd="playFrom(0.0)">
                                       <p:cBhvr>
-                                        <p:cTn id="6" dur="77376" fill="hold"/>
+                                        <p:cTn id="6" dur="56616" fill="hold"/>
                                         <p:tgtEl>
                                           <p:spTgt spid="26"/>
                                         </p:tgtEl>
@@ -13716,7 +13716,7 @@
             <a:hlinkClick r:id="" action="ppaction://media"/>
             <a:extLst>
               <a:ext uri="{FF2B5EF4-FFF2-40B4-BE49-F238E27FC236}">
-                <a16:creationId xmlns:a16="http://schemas.microsoft.com/office/drawing/2014/main" id="{CB59A3F6-251F-7BCA-9BC9-DA2DF5FC3303}"/>
+                <a16:creationId xmlns:a16="http://schemas.microsoft.com/office/drawing/2014/main" id="{052F2C38-9D76-A44A-F148-C063EB1F180B}"/>
               </a:ext>
             </a:extLst>
           </p:cNvPr>
@@ -13732,7 +13732,7 @@
                     <p:ext uri="{3AFAAA56-56D3-431D-BCD4-E75A35582382}">
                       <p173:tracksInfo xmlns:p173="http://schemas.microsoft.com/office/powerpoint/2017/3/main" displayLoc="slide">
                         <p173:trackLst>
-                          <p173:track id="{81491A8D-28F7-4E97-9F84-4D606EBC997D}" label="English (captions)" lang="en-US" r:embed="rId7"/>
+                          <p173:track id="{6090180E-D873-4993-955B-3AA0C75807C2}" label="English (captions)" lang="en-US" r:embed="rId7"/>
                         </p173:trackLst>
                       </p173:tracksInfo>
                     </p:ext>
@@ -13765,10 +13765,10 @@
   </p:clrMapOvr>
   <mc:AlternateContent xmlns:mc="http://schemas.openxmlformats.org/markup-compatibility/2006">
     <mc:Choice xmlns:p14="http://schemas.microsoft.com/office/powerpoint/2010/main" Requires="p14">
-      <p:transition spd="slow" p14:dur="2000" advTm="68300"/>
+      <p:transition spd="slow" p14:dur="2000" advTm="57690"/>
     </mc:Choice>
     <mc:Fallback>
-      <p:transition spd="slow" advTm="68300"/>
+      <p:transition spd="slow" advTm="57690"/>
     </mc:Fallback>
   </mc:AlternateContent>
   <p:timing>
@@ -13802,7 +13802,7 @@
                                   <p:childTnLst>
                                     <p:cmd type="call" cmd="playFrom(0.0)">
                                       <p:cBhvr>
-                                        <p:cTn id="6" dur="67296" fill="hold"/>
+                                        <p:cTn id="6" dur="53688" fill="hold"/>
                                         <p:tgtEl>
                                           <p:spTgt spid="19"/>
                                         </p:tgtEl>
@@ -14889,7 +14889,7 @@
             <a:hlinkClick r:id="" action="ppaction://media"/>
             <a:extLst>
               <a:ext uri="{FF2B5EF4-FFF2-40B4-BE49-F238E27FC236}">
-                <a16:creationId xmlns:a16="http://schemas.microsoft.com/office/drawing/2014/main" id="{3036EBFA-1AF5-B3EC-CDAB-54BD2EFF4F3D}"/>
+                <a16:creationId xmlns:a16="http://schemas.microsoft.com/office/drawing/2014/main" id="{5B7E22CB-A5DC-72FE-3C02-8F90710EF78C}"/>
               </a:ext>
             </a:extLst>
           </p:cNvPr>
@@ -14905,7 +14905,7 @@
                     <p:ext uri="{3AFAAA56-56D3-431D-BCD4-E75A35582382}">
                       <p173:tracksInfo xmlns:p173="http://schemas.microsoft.com/office/powerpoint/2017/3/main" displayLoc="slide">
                         <p173:trackLst>
-                          <p173:track id="{CD80A87F-8BFA-4DD4-A782-ED2614A3A878}" label="English (captions)" lang="en-US" r:embed="rId7"/>
+                          <p173:track id="{EA03DD7D-75F4-4C44-A3F5-336152C489B2}" label="English (captions)" lang="en-US" r:embed="rId7"/>
                         </p173:trackLst>
                       </p173:tracksInfo>
                     </p:ext>
@@ -14938,10 +14938,10 @@
   </p:clrMapOvr>
   <mc:AlternateContent xmlns:mc="http://schemas.openxmlformats.org/markup-compatibility/2006">
     <mc:Choice xmlns:p14="http://schemas.microsoft.com/office/powerpoint/2010/main" Requires="p14">
-      <p:transition spd="slow" p14:dur="2000" advTm="62900"/>
+      <p:transition spd="slow" p14:dur="2000" advTm="59490"/>
     </mc:Choice>
     <mc:Fallback>
-      <p:transition spd="slow" advTm="62900"/>
+      <p:transition spd="slow" advTm="59490"/>
     </mc:Fallback>
   </mc:AlternateContent>
   <p:timing>
@@ -14975,7 +14975,7 @@
                                   <p:childTnLst>
                                     <p:cmd type="call" cmd="playFrom(0.0)">
                                       <p:cBhvr>
-                                        <p:cTn id="6" dur="61896" fill="hold"/>
+                                        <p:cTn id="6" dur="55488" fill="hold"/>
                                         <p:tgtEl>
                                           <p:spTgt spid="28"/>
                                         </p:tgtEl>

--- a/presentations/b03-hr-identity/B03_HR_Identity_Narrated.pptx
+++ b/presentations/b03-hr-identity/B03_HR_Identity_Narrated.pptx
@@ -181,7 +181,7 @@
     </p:spTree>
     <p:extLst>
       <p:ext uri="{BB962C8B-B14F-4D97-AF65-F5344CB8AC3E}">
-        <p14:creationId xmlns:p14="http://schemas.microsoft.com/office/powerpoint/2010/main" val="2666785235"/>
+        <p14:creationId xmlns:p14="http://schemas.microsoft.com/office/powerpoint/2010/main" val="2936407606"/>
       </p:ext>
     </p:extLst>
   </p:cSld>
@@ -2251,7 +2251,7 @@
             <a:hlinkClick r:id="" action="ppaction://media"/>
             <a:extLst>
               <a:ext uri="{FF2B5EF4-FFF2-40B4-BE49-F238E27FC236}">
-                <a16:creationId xmlns:a16="http://schemas.microsoft.com/office/drawing/2014/main" id="{13874654-1B91-4746-A9B0-CD3F05790B11}"/>
+                <a16:creationId xmlns:a16="http://schemas.microsoft.com/office/drawing/2014/main" id="{0A3E8B00-A0A4-2DE2-F5CD-94835F71C835}"/>
               </a:ext>
             </a:extLst>
           </p:cNvPr>
@@ -2267,7 +2267,7 @@
                     <p:ext uri="{3AFAAA56-56D3-431D-BCD4-E75A35582382}">
                       <p173:tracksInfo xmlns:p173="http://schemas.microsoft.com/office/powerpoint/2017/3/main" displayLoc="slide">
                         <p173:trackLst>
-                          <p173:track id="{BA1483D9-899D-47DA-9647-5FAABA86BFE5}" label="English (captions)" lang="en-US" r:embed="rId6"/>
+                          <p173:track id="{CF9199F8-41AB-4D76-807F-66229885DFBA}" label="English (captions)" lang="en-US" r:embed="rId6"/>
                         </p173:trackLst>
                       </p173:tracksInfo>
                     </p:ext>
@@ -2285,7 +2285,7 @@
         </p:blipFill>
         <p:spPr>
           <a:xfrm>
-            <a:off x="127000" y="6350000"/>
+            <a:off x="12446000" y="127000"/>
             <a:ext cx="304800" cy="304800"/>
           </a:xfrm>
           <a:prstGeom prst="rect">
@@ -3483,7 +3483,7 @@
             <a:hlinkClick r:id="" action="ppaction://media"/>
             <a:extLst>
               <a:ext uri="{FF2B5EF4-FFF2-40B4-BE49-F238E27FC236}">
-                <a16:creationId xmlns:a16="http://schemas.microsoft.com/office/drawing/2014/main" id="{F12A40A4-29CF-E38B-F03E-85A37A354DDE}"/>
+                <a16:creationId xmlns:a16="http://schemas.microsoft.com/office/drawing/2014/main" id="{E1AE9745-F1C7-9634-50DD-A020B9A860AB}"/>
               </a:ext>
             </a:extLst>
           </p:cNvPr>
@@ -3499,7 +3499,7 @@
                     <p:ext uri="{3AFAAA56-56D3-431D-BCD4-E75A35582382}">
                       <p173:tracksInfo xmlns:p173="http://schemas.microsoft.com/office/powerpoint/2017/3/main" displayLoc="slide">
                         <p173:trackLst>
-                          <p173:track id="{B2383994-3201-457C-9293-184679E554CB}" label="English (captions)" lang="en-US" r:embed="rId7"/>
+                          <p173:track id="{DDE4FF36-96FB-4C6E-AEA7-75B639C956D3}" label="English (captions)" lang="en-US" r:embed="rId7"/>
                         </p173:trackLst>
                       </p173:tracksInfo>
                     </p:ext>
@@ -3517,7 +3517,7 @@
         </p:blipFill>
         <p:spPr>
           <a:xfrm>
-            <a:off x="127000" y="6350000"/>
+            <a:off x="12446000" y="127000"/>
             <a:ext cx="304800" cy="304800"/>
           </a:xfrm>
           <a:prstGeom prst="rect">
@@ -4333,7 +4333,7 @@
             <a:hlinkClick r:id="" action="ppaction://media"/>
             <a:extLst>
               <a:ext uri="{FF2B5EF4-FFF2-40B4-BE49-F238E27FC236}">
-                <a16:creationId xmlns:a16="http://schemas.microsoft.com/office/drawing/2014/main" id="{4870A512-BC8D-4647-B45A-FB546F46962D}"/>
+                <a16:creationId xmlns:a16="http://schemas.microsoft.com/office/drawing/2014/main" id="{57ADF4C7-3109-D1CC-6316-12A8389954CD}"/>
               </a:ext>
             </a:extLst>
           </p:cNvPr>
@@ -4349,7 +4349,7 @@
                     <p:ext uri="{3AFAAA56-56D3-431D-BCD4-E75A35582382}">
                       <p173:tracksInfo xmlns:p173="http://schemas.microsoft.com/office/powerpoint/2017/3/main" displayLoc="slide">
                         <p173:trackLst>
-                          <p173:track id="{77FA6C07-8BDB-48AC-8914-15859DDCB31F}" label="English (captions)" lang="en-US" r:embed="rId8"/>
+                          <p173:track id="{1C0F2D3B-37C1-4343-B89F-8127C49E2193}" label="English (captions)" lang="en-US" r:embed="rId8"/>
                         </p173:trackLst>
                       </p173:tracksInfo>
                     </p:ext>
@@ -4367,7 +4367,7 @@
         </p:blipFill>
         <p:spPr>
           <a:xfrm>
-            <a:off x="127000" y="6350000"/>
+            <a:off x="12446000" y="127000"/>
             <a:ext cx="304800" cy="304800"/>
           </a:xfrm>
           <a:prstGeom prst="rect">
@@ -5455,7 +5455,7 @@
             <a:hlinkClick r:id="" action="ppaction://media"/>
             <a:extLst>
               <a:ext uri="{FF2B5EF4-FFF2-40B4-BE49-F238E27FC236}">
-                <a16:creationId xmlns:a16="http://schemas.microsoft.com/office/drawing/2014/main" id="{C33FC3D9-DA02-3854-4E79-F5FFCB686E45}"/>
+                <a16:creationId xmlns:a16="http://schemas.microsoft.com/office/drawing/2014/main" id="{8E1448A6-DF62-1E72-A66B-EAC8E81BB302}"/>
               </a:ext>
             </a:extLst>
           </p:cNvPr>
@@ -5471,7 +5471,7 @@
                     <p:ext uri="{3AFAAA56-56D3-431D-BCD4-E75A35582382}">
                       <p173:tracksInfo xmlns:p173="http://schemas.microsoft.com/office/powerpoint/2017/3/main" displayLoc="slide">
                         <p173:trackLst>
-                          <p173:track id="{D4487268-9FC2-4289-B832-BF03EE68A42B}" label="English (captions)" lang="en-US" r:embed="rId11"/>
+                          <p173:track id="{063FDE7D-7F9D-4996-AD5D-D757525050FD}" label="English (captions)" lang="en-US" r:embed="rId11"/>
                         </p173:trackLst>
                       </p173:tracksInfo>
                     </p:ext>
@@ -5489,7 +5489,7 @@
         </p:blipFill>
         <p:spPr>
           <a:xfrm>
-            <a:off x="127000" y="6350000"/>
+            <a:off x="12446000" y="127000"/>
             <a:ext cx="304800" cy="304800"/>
           </a:xfrm>
           <a:prstGeom prst="rect">
@@ -6550,7 +6550,7 @@
             <a:hlinkClick r:id="" action="ppaction://media"/>
             <a:extLst>
               <a:ext uri="{FF2B5EF4-FFF2-40B4-BE49-F238E27FC236}">
-                <a16:creationId xmlns:a16="http://schemas.microsoft.com/office/drawing/2014/main" id="{991A7F71-E971-86BF-798D-0CB1929A1176}"/>
+                <a16:creationId xmlns:a16="http://schemas.microsoft.com/office/drawing/2014/main" id="{837DEF36-1816-10CE-8B19-1D54DFCD0CD1}"/>
               </a:ext>
             </a:extLst>
           </p:cNvPr>
@@ -6566,7 +6566,7 @@
                     <p:ext uri="{3AFAAA56-56D3-431D-BCD4-E75A35582382}">
                       <p173:tracksInfo xmlns:p173="http://schemas.microsoft.com/office/powerpoint/2017/3/main" displayLoc="slide">
                         <p173:trackLst>
-                          <p173:track id="{BD1144B7-0497-4D36-9DE5-CEBAC2E2E99F}" label="English (captions)" lang="en-US" r:embed="rId10"/>
+                          <p173:track id="{0CB414E8-ABFA-4B5F-88E6-A2769B5A8B3D}" label="English (captions)" lang="en-US" r:embed="rId10"/>
                         </p173:trackLst>
                       </p173:tracksInfo>
                     </p:ext>
@@ -6584,7 +6584,7 @@
         </p:blipFill>
         <p:spPr>
           <a:xfrm>
-            <a:off x="127000" y="6350000"/>
+            <a:off x="12446000" y="127000"/>
             <a:ext cx="304800" cy="304800"/>
           </a:xfrm>
           <a:prstGeom prst="rect">
@@ -9266,7 +9266,7 @@
             <a:hlinkClick r:id="" action="ppaction://media"/>
             <a:extLst>
               <a:ext uri="{FF2B5EF4-FFF2-40B4-BE49-F238E27FC236}">
-                <a16:creationId xmlns:a16="http://schemas.microsoft.com/office/drawing/2014/main" id="{43FC4DDD-1067-4F6A-9F7D-5B85020D8D3D}"/>
+                <a16:creationId xmlns:a16="http://schemas.microsoft.com/office/drawing/2014/main" id="{028416FA-3E2F-4FFA-EFE8-C81033D8CA39}"/>
               </a:ext>
             </a:extLst>
           </p:cNvPr>
@@ -9282,7 +9282,7 @@
                     <p:ext uri="{3AFAAA56-56D3-431D-BCD4-E75A35582382}">
                       <p173:tracksInfo xmlns:p173="http://schemas.microsoft.com/office/powerpoint/2017/3/main" displayLoc="slide">
                         <p173:trackLst>
-                          <p173:track id="{103E6781-2EE5-4C92-A4FF-7F44A86508D8}" label="English (captions)" lang="en-US" r:embed="rId7"/>
+                          <p173:track id="{F2E03C80-929B-4E0E-9C7E-10F43AD316D4}" label="English (captions)" lang="en-US" r:embed="rId7"/>
                         </p173:trackLst>
                       </p173:tracksInfo>
                     </p:ext>
@@ -9300,7 +9300,7 @@
         </p:blipFill>
         <p:spPr>
           <a:xfrm>
-            <a:off x="127000" y="6350000"/>
+            <a:off x="12446000" y="127000"/>
             <a:ext cx="304800" cy="304800"/>
           </a:xfrm>
           <a:prstGeom prst="rect">
@@ -10583,7 +10583,7 @@
             <a:hlinkClick r:id="" action="ppaction://media"/>
             <a:extLst>
               <a:ext uri="{FF2B5EF4-FFF2-40B4-BE49-F238E27FC236}">
-                <a16:creationId xmlns:a16="http://schemas.microsoft.com/office/drawing/2014/main" id="{19155E5F-59E0-AF59-9E6B-E1A4E990AB0E}"/>
+                <a16:creationId xmlns:a16="http://schemas.microsoft.com/office/drawing/2014/main" id="{CF17662D-7B5E-A1A4-1167-8B3374384EE0}"/>
               </a:ext>
             </a:extLst>
           </p:cNvPr>
@@ -10599,7 +10599,7 @@
                     <p:ext uri="{3AFAAA56-56D3-431D-BCD4-E75A35582382}">
                       <p173:tracksInfo xmlns:p173="http://schemas.microsoft.com/office/powerpoint/2017/3/main" displayLoc="slide">
                         <p173:trackLst>
-                          <p173:track id="{F966C6FE-EEA4-47C9-B559-0D4AD96B0345}" label="English (captions)" lang="en-US" r:embed="rId8"/>
+                          <p173:track id="{6C0C5B4C-AA8A-44C6-ACAD-E4D50DC10F0B}" label="English (captions)" lang="en-US" r:embed="rId8"/>
                         </p173:trackLst>
                       </p173:tracksInfo>
                     </p:ext>
@@ -10617,7 +10617,7 @@
         </p:blipFill>
         <p:spPr>
           <a:xfrm>
-            <a:off x="127000" y="6350000"/>
+            <a:off x="12446000" y="127000"/>
             <a:ext cx="304800" cy="304800"/>
           </a:xfrm>
           <a:prstGeom prst="rect">
@@ -11510,7 +11510,7 @@
             <a:hlinkClick r:id="" action="ppaction://media"/>
             <a:extLst>
               <a:ext uri="{FF2B5EF4-FFF2-40B4-BE49-F238E27FC236}">
-                <a16:creationId xmlns:a16="http://schemas.microsoft.com/office/drawing/2014/main" id="{614A0775-5494-2DCC-AF90-67BD9BA6AAE0}"/>
+                <a16:creationId xmlns:a16="http://schemas.microsoft.com/office/drawing/2014/main" id="{3C7EFB51-7A9C-A4B9-E9FE-7CFA65985BFE}"/>
               </a:ext>
             </a:extLst>
           </p:cNvPr>
@@ -11526,7 +11526,7 @@
                     <p:ext uri="{3AFAAA56-56D3-431D-BCD4-E75A35582382}">
                       <p173:tracksInfo xmlns:p173="http://schemas.microsoft.com/office/powerpoint/2017/3/main" displayLoc="slide">
                         <p173:trackLst>
-                          <p173:track id="{61140AC4-478A-43EB-9A36-EB18190A7515}" label="English (captions)" lang="en-US" r:embed="rId7"/>
+                          <p173:track id="{C832C5C1-FE4F-48F1-896F-4EB06C1E4746}" label="English (captions)" lang="en-US" r:embed="rId7"/>
                         </p173:trackLst>
                       </p173:tracksInfo>
                     </p:ext>
@@ -11544,7 +11544,7 @@
         </p:blipFill>
         <p:spPr>
           <a:xfrm>
-            <a:off x="127000" y="6350000"/>
+            <a:off x="12446000" y="127000"/>
             <a:ext cx="304800" cy="304800"/>
           </a:xfrm>
           <a:prstGeom prst="rect">
@@ -12789,7 +12789,7 @@
             <a:hlinkClick r:id="" action="ppaction://media"/>
             <a:extLst>
               <a:ext uri="{FF2B5EF4-FFF2-40B4-BE49-F238E27FC236}">
-                <a16:creationId xmlns:a16="http://schemas.microsoft.com/office/drawing/2014/main" id="{B47719F6-6C62-494A-BDEB-244D12A909D7}"/>
+                <a16:creationId xmlns:a16="http://schemas.microsoft.com/office/drawing/2014/main" id="{9929AF0E-0D66-8331-DFC7-B2BA6AC41C6D}"/>
               </a:ext>
             </a:extLst>
           </p:cNvPr>
@@ -12805,7 +12805,7 @@
                     <p:ext uri="{3AFAAA56-56D3-431D-BCD4-E75A35582382}">
                       <p173:tracksInfo xmlns:p173="http://schemas.microsoft.com/office/powerpoint/2017/3/main" displayLoc="slide">
                         <p173:trackLst>
-                          <p173:track id="{11B3AC0A-2613-4B61-B243-97DB2110E417}" label="English (captions)" lang="en-US" r:embed="rId10"/>
+                          <p173:track id="{F633FFC6-3C59-4207-A5A3-A4661F350321}" label="English (captions)" lang="en-US" r:embed="rId10"/>
                         </p173:trackLst>
                       </p173:tracksInfo>
                     </p:ext>
@@ -12823,7 +12823,7 @@
         </p:blipFill>
         <p:spPr>
           <a:xfrm>
-            <a:off x="127000" y="6350000"/>
+            <a:off x="12446000" y="127000"/>
             <a:ext cx="304800" cy="304800"/>
           </a:xfrm>
           <a:prstGeom prst="rect">
@@ -13716,7 +13716,7 @@
             <a:hlinkClick r:id="" action="ppaction://media"/>
             <a:extLst>
               <a:ext uri="{FF2B5EF4-FFF2-40B4-BE49-F238E27FC236}">
-                <a16:creationId xmlns:a16="http://schemas.microsoft.com/office/drawing/2014/main" id="{052F2C38-9D76-A44A-F148-C063EB1F180B}"/>
+                <a16:creationId xmlns:a16="http://schemas.microsoft.com/office/drawing/2014/main" id="{911EE902-383B-7490-6D96-45324E733EED}"/>
               </a:ext>
             </a:extLst>
           </p:cNvPr>
@@ -13732,7 +13732,7 @@
                     <p:ext uri="{3AFAAA56-56D3-431D-BCD4-E75A35582382}">
                       <p173:tracksInfo xmlns:p173="http://schemas.microsoft.com/office/powerpoint/2017/3/main" displayLoc="slide">
                         <p173:trackLst>
-                          <p173:track id="{6090180E-D873-4993-955B-3AA0C75807C2}" label="English (captions)" lang="en-US" r:embed="rId7"/>
+                          <p173:track id="{346EFACC-32A4-44A7-9D5B-81E6AD3984AD}" label="English (captions)" lang="en-US" r:embed="rId7"/>
                         </p173:trackLst>
                       </p173:tracksInfo>
                     </p:ext>
@@ -13750,7 +13750,7 @@
         </p:blipFill>
         <p:spPr>
           <a:xfrm>
-            <a:off x="127000" y="6350000"/>
+            <a:off x="12446000" y="127000"/>
             <a:ext cx="304800" cy="304800"/>
           </a:xfrm>
           <a:prstGeom prst="rect">
@@ -14889,7 +14889,7 @@
             <a:hlinkClick r:id="" action="ppaction://media"/>
             <a:extLst>
               <a:ext uri="{FF2B5EF4-FFF2-40B4-BE49-F238E27FC236}">
-                <a16:creationId xmlns:a16="http://schemas.microsoft.com/office/drawing/2014/main" id="{5B7E22CB-A5DC-72FE-3C02-8F90710EF78C}"/>
+                <a16:creationId xmlns:a16="http://schemas.microsoft.com/office/drawing/2014/main" id="{ED7154DD-5183-D450-67D1-362B2E710EB3}"/>
               </a:ext>
             </a:extLst>
           </p:cNvPr>
@@ -14905,7 +14905,7 @@
                     <p:ext uri="{3AFAAA56-56D3-431D-BCD4-E75A35582382}">
                       <p173:tracksInfo xmlns:p173="http://schemas.microsoft.com/office/powerpoint/2017/3/main" displayLoc="slide">
                         <p173:trackLst>
-                          <p173:track id="{EA03DD7D-75F4-4C44-A3F5-336152C489B2}" label="English (captions)" lang="en-US" r:embed="rId7"/>
+                          <p173:track id="{1DFAB087-D4B4-4D6A-B054-5BB2AE777063}" label="English (captions)" lang="en-US" r:embed="rId7"/>
                         </p173:trackLst>
                       </p173:tracksInfo>
                     </p:ext>
@@ -14923,7 +14923,7 @@
         </p:blipFill>
         <p:spPr>
           <a:xfrm>
-            <a:off x="127000" y="6350000"/>
+            <a:off x="12446000" y="127000"/>
             <a:ext cx="304800" cy="304800"/>
           </a:xfrm>
           <a:prstGeom prst="rect">

--- a/presentations/b03-hr-identity/B03_HR_Identity_Narrated.pptx
+++ b/presentations/b03-hr-identity/B03_HR_Identity_Narrated.pptx
@@ -5,7 +5,7 @@
     <p:sldMasterId id="2147483648" r:id="rId1"/>
   </p:sldMasterIdLst>
   <p:notesMasterIdLst>
-    <p:notesMasterId r:id="rId13"/>
+    <p:notesMasterId r:id="rId14"/>
   </p:notesMasterIdLst>
   <p:sldIdLst>
     <p:sldId id="256" r:id="rId2"/>
@@ -19,6 +19,7 @@
     <p:sldId id="264" r:id="rId10"/>
     <p:sldId id="265" r:id="rId11"/>
     <p:sldId id="266" r:id="rId12"/>
+    <p:sldId id="267" r:id="rId13"/>
   </p:sldIdLst>
   <p:sldSz cx="12192000" cy="6858000"/>
   <p:notesSz cx="6858000" cy="12192000"/>
@@ -117,34 +118,35 @@
   <p:extLst>
     <p:ext uri="{521415D9-36F7-43E2-AB2F-B90AF26B5E84}">
       <p14:sectionLst xmlns:p14="http://schemas.microsoft.com/office/powerpoint/2010/main">
-        <p14:section name="Why HR decides" id="{3EDD7C59-8318-FDD1-BBF8-20C4D34FC889}">
+        <p14:section name="Why HR decides" id="{3F5CD546-9B98-9504-0230-EB6ED5E4E8C0}">
           <p14:sldIdLst>
             <p14:sldId id="256"/>
             <p14:sldId id="257"/>
             <p14:sldId id="258"/>
+            <p14:sldId id="259"/>
           </p14:sldIdLst>
         </p14:section>
-        <p14:section name="What we should do" id="{90B6B281-E1B0-4B64-A21C-100967F343E3}">
+        <p14:section name="What we should do" id="{E8C318AA-1AD2-CA61-F418-4A86C92EEF74}">
           <p14:sldIdLst>
-            <p14:sldId id="259"/>
             <p14:sldId id="260"/>
             <p14:sldId id="261"/>
-          </p14:sldIdLst>
-        </p14:section>
-        <p14:section name="Who owns it" id="{A8A206A4-3B33-4AF1-3E4C-823C2E912C4E}">
-          <p14:sldIdLst>
             <p14:sldId id="262"/>
           </p14:sldIdLst>
         </p14:section>
-        <p14:section name="How to do it" id="{13CD08CA-5AFB-6881-4AB9-B3BB02BF7BE2}">
+        <p14:section name="Who owns it" id="{7FE7344D-8820-CA0F-630D-881AA1996D05}">
           <p14:sldIdLst>
             <p14:sldId id="263"/>
+          </p14:sldIdLst>
+        </p14:section>
+        <p14:section name="How to do it" id="{D031150B-B6C9-51C4-849A-33771AFF2EA4}">
+          <p14:sldIdLst>
             <p14:sldId id="264"/>
             <p14:sldId id="265"/>
             <p14:sldId id="266"/>
+            <p14:sldId id="267"/>
           </p14:sldIdLst>
         </p14:section>
-        <p14:section name="Backup" id="{FC1024E8-21A6-2722-C676-DDC6501BD909}">
+        <p14:section name="Backup" id="{CABEB526-4615-8EA4-2F66-78B5A812F285}">
           <p14:sldIdLst/>
         </p14:section>
       </p14:sectionLst>
@@ -181,7 +183,7 @@
     </p:spTree>
     <p:extLst>
       <p:ext uri="{BB962C8B-B14F-4D97-AF65-F5344CB8AC3E}">
-        <p14:creationId xmlns:p14="http://schemas.microsoft.com/office/powerpoint/2010/main" val="2936407606"/>
+        <p14:creationId xmlns:p14="http://schemas.microsoft.com/office/powerpoint/2010/main" val="3281910490"/>
       </p:ext>
     </p:extLst>
   </p:cSld>
@@ -417,11 +419,10 @@
           <a:p>
             <a:r>
               <a:rPr lang="en-US" dirty="0"/>
-              <a:t>[9:45–10:56]  The execution plan has seven phases, and each gate is the next phase's precondition.
-Phase zero aligns the program, naming identity as a consumer in both migrations. Phase one settles attribute authority and the schema. Phase two builds and tests the pipeline. Phase three is the pilot. Phase four turns on lifecycle automation and attribute-derived access. Phase five cuts over population by population. And phase six sustains it.
-Four rules run through it. Start now, from the HR data the agency already has, and switch the source to Core HCM when it arrives. Run in shadow mode first, comparing what HR says with what the directories hold, and fix the gaps. Cut over one population at a time, with a signed validation report and a rollback. And close the ticket path for a population only when the data proves HR is the sole source.
-The gate thresholds, like ninety-nine percent correlation, are proposals. They're starting criteria the agency approves through its own risk governance, not federal requirements. Chapter 13 walks an illustrative agency through all seven phases.
-Workbook: Book 03, Chapter 12 — Execution Plan; Appendix C; Chapter 13.</a:t>
+              <a:t>[9:43–10:45]  Next, access. Once the attributes are trustworthy, access is derived from them. A personnel record becomes a canonical attribute, a rule or access package turns that into an entitlement, and an evidence record captures why. Every entitlement then traces back to a rule, an approved exception, an authoritative attribute, or a privileged-access decision. That's what makes access explainable.
+Drift is found by comparison, not by complaint: scheduled checks compare HR, the model and the directories. It's measured in business terms leadership can read: time from separation to blocked access, orphaned accounts, and access ready on day one. And the records have to be kept long enough. Entra ID keeps audit and provisioning logs for thirty days with P1 or P2, so the book exports them from the pilot onward.
+The evidence comes as a byproduct. The same records that run the lifecycle answer the auditor's oldest question: does every account belong to a current person with a current reason?
+Workbook: Book 03, Chapter 10 — From Attributes to Access; Chapter 11 — Drift, Metrics and Evidence.</a:t>
             </a:r>
           </a:p>
         </p:txBody>
@@ -508,11 +509,11 @@
           <a:p>
             <a:r>
               <a:rPr lang="en-US" dirty="0"/>
-              <a:t>[10:56–11:59]  How we'll know it's working, and what we need.
-Five measures, each baselined in phase one, and each one a business measure leadership can read. Time from separation to blocked access, in hours. Accounts tied to a person, with orphaned accounts trending to zero. Joiner and mover tickets going down, with access ready on day one. The manager and organization in the directory matching HR. And every exception with an owner and an age.
-What we need from leadership is one decision: start HR-driven identity now, as a design requirement of the HR 2.0 onboarding and the Entra ID migration. And to act on it: a sponsor across HR, the identity team and privacy; identity named as a consumer in the HR 2.0 interconnection plan; data owners designated and the person key confirmed; and a small team for the pre-onboarding data work.
-Book 03 has the full design, with every external claim footnoted, and Book 02 covers the directory migration it builds on. Thank you.
-Workbook: Book 03, Chapters 11 and 12.</a:t>
+              <a:t>[10:45–11:56]  The execution plan has seven phases, and each gate is the next phase's precondition.
+Phase zero aligns the program, naming identity as a consumer in both migrations. Phase one settles attribute authority and the schema. Phase two builds and tests the pipeline. Phase three is the pilot. Phase four turns on lifecycle automation and attribute-derived access. Phase five cuts over population by population. And phase six sustains it.
+Four rules run through it. Start now, from the HR data the agency already has, and switch the source to Core HCM when it arrives. Run in shadow mode first, comparing what HR says with what the directories hold, and fix the gaps. Cut over one population at a time, with a signed validation report and a rollback. And close the ticket path for a population only when the data proves HR is the sole source.
+The gate thresholds, like ninety-nine percent correlation, are proposals. They're starting criteria the agency approves through its own risk governance, not federal requirements. Chapter 13 walks an illustrative agency through all seven phases.
+Workbook: Book 03, Chapter 12 — Execution Plan; Appendix C; Chapter 13.</a:t>
             </a:r>
           </a:p>
         </p:txBody>
@@ -535,6 +536,97 @@
             <a:fld id="{F7021451-1387-4CA6-816F-3879F97B5CBC}" type="slidenum">
               <a:rPr lang="en-US"/>
               <a:t>11</a:t>
+            </a:fld>
+            <a:endParaRPr lang="en-US"/>
+          </a:p>
+        </p:txBody>
+      </p:sp>
+    </p:spTree>
+    <p:extLst>
+      <p:ext uri="{BB962C8B-B14F-4D97-AF65-F5344CB8AC3E}">
+        <p14:creationId xmlns:p14="http://schemas.microsoft.com/office/powerpoint/2010/main" val="1024086991"/>
+      </p:ext>
+    </p:extLst>
+  </p:cSld>
+  <p:clrMapOvr>
+    <a:masterClrMapping/>
+  </p:clrMapOvr>
+</p:notes>
+</file>
+
+<file path=ppt/notesSlides/notesSlide12.xml><?xml version="1.0" encoding="utf-8"?>
+<p:notes xmlns:a="http://schemas.openxmlformats.org/drawingml/2006/main" xmlns:r="http://schemas.openxmlformats.org/officeDocument/2006/relationships" xmlns:p="http://schemas.openxmlformats.org/presentationml/2006/main">
+  <p:cSld>
+    <p:spTree>
+      <p:nvGrpSpPr>
+        <p:cNvPr id="1" name=""/>
+        <p:cNvGrpSpPr/>
+        <p:nvPr/>
+      </p:nvGrpSpPr>
+      <p:grpSpPr>
+        <a:xfrm>
+          <a:off x="0" y="0"/>
+          <a:ext cx="0" cy="0"/>
+          <a:chOff x="0" y="0"/>
+          <a:chExt cx="0" cy="0"/>
+        </a:xfrm>
+      </p:grpSpPr>
+      <p:sp>
+        <p:nvSpPr>
+          <p:cNvPr id="2" name="Slide Image Placeholder 1"/>
+          <p:cNvSpPr>
+            <a:spLocks noGrp="1" noRot="1" noChangeAspect="1"/>
+          </p:cNvSpPr>
+          <p:nvPr>
+            <p:ph type="sldImg"/>
+          </p:nvPr>
+        </p:nvSpPr>
+        <p:spPr/>
+      </p:sp>
+      <p:sp>
+        <p:nvSpPr>
+          <p:cNvPr id="3" name="Notes Placeholder 2"/>
+          <p:cNvSpPr>
+            <a:spLocks noGrp="1"/>
+          </p:cNvSpPr>
+          <p:nvPr>
+            <p:ph type="body" idx="1"/>
+          </p:nvPr>
+        </p:nvSpPr>
+        <p:spPr/>
+        <p:txBody>
+          <a:bodyPr/>
+          <a:lstStyle/>
+          <a:p>
+            <a:r>
+              <a:rPr lang="en-US" dirty="0"/>
+              <a:t>[11:56–12:59]  How we'll know it's working, and what we need.
+Five measures, each baselined in phase one, and each one a business measure leadership can read. Time from separation to blocked access, in hours. Accounts tied to a person, with orphaned accounts trending to zero. Joiner and mover tickets going down, with access ready on day one. The manager and organization in the directory matching HR. And every exception with an owner and an age.
+What we need from leadership is one decision: start HR-driven identity now, as a design requirement of the HR 2.0 onboarding and the Entra ID migration. And to act on it: a sponsor across HR, the identity team and privacy; identity named as a consumer in the HR 2.0 interconnection plan; data owners designated and the person key confirmed; and a small team for the pre-onboarding data work.
+Book 03 has the full design, with every external claim footnoted, and Book 02 covers the directory migration it builds on. Thank you.
+Workbook: Book 03, Chapters 11 and 12.</a:t>
+            </a:r>
+          </a:p>
+        </p:txBody>
+      </p:sp>
+      <p:sp>
+        <p:nvSpPr>
+          <p:cNvPr id="4" name="Slide Number Placeholder 3"/>
+          <p:cNvSpPr>
+            <a:spLocks noGrp="1"/>
+          </p:cNvSpPr>
+          <p:nvPr>
+            <p:ph type="sldNum" sz="quarter" idx="10"/>
+          </p:nvPr>
+        </p:nvSpPr>
+        <p:spPr/>
+        <p:txBody>
+          <a:bodyPr/>
+          <a:lstStyle/>
+          <a:p>
+            <a:fld id="{F7021451-1387-4CA6-816F-3879F97B5CBC}" type="slidenum">
+              <a:rPr lang="en-US"/>
+              <a:t>12</a:t>
             </a:fld>
             <a:endParaRPr lang="en-US"/>
           </a:p>
@@ -599,11 +691,11 @@
           <a:p>
             <a:r>
               <a:rPr lang="en-US" dirty="0"/>
-              <a:t>[0:30–1:37]  Why. In many agencies today, nothing connects HR to identity. Accounts, access and credentials are created and removed by ticket, and that costs three ways.
-Access outlives the job. When someone leaves or changes roles, removal waits for a ticket. Yet the federal PIV standard, FIPS 201-3, requires a card that can't be collected to be terminated within eighteen hours of notification. A ticket-driven process struggles to meet that. Records drift: the phone book, the manager and the approval routing are wrong until someone files a ticket. And every joiner, mover and leaver is help-desk work.
-Zero Trust makes the gap visible. A token proves cryptographically who signed it. It can't prove the claim is true: that the person still works here, still holds the position the access was granted for, still reports to the supervisor who approved it. Those are workforce facts, and they live in HR.
-If we do nothing, HR moves to Core HCM, identity moves to Entra ID, and we rebuild the same manual process twice, on new platforms.
-Workbook: Book 03, Chapters 01 and 02; Chapter 07 for the PIV office.</a:t>
+              <a:t>[0:30–1:30]  First, where this book sits. The series moves four populations to the cloud, each on its own track, and Book 03 is the HR track: people.
+It accomplishes one thing. Every employee account follows the HR record, and every contractor account follows the contractor source of authority, which the agency still has to designate. Joiners, movers and leavers then change access by rule, with no ticket and no hand-edited group.
+You know you're there when every enabled account matches an authoritative record or carries an owned exception, every group that used to come from an OU is a validated rule, and the drift checks run clean. Those criteria are program design guidance.
+What this book doesn't cover: devices and servers, which are Book 05, and service accounts, application principals and AI agents, which are Books 02, 06 and 17. HR never describes them.
+Workbook: Book 03, Chapters 01, 06, 08, 10 and 11; Book 05, Chapter 03; the attribute-driven migration guide, "Beyond users."</a:t>
             </a:r>
           </a:p>
         </p:txBody>
@@ -690,12 +782,11 @@
           <a:p>
             <a:r>
               <a:rPr lang="en-US" dirty="0"/>
-              <a:t>[1:37–2:48]  Why now? Because two migrations open one design window.
-On the HR side: the December 10, 2025 memo from OMB and OPM creates Federal HR 2.0, one government-wide core human capital platform. OPM awarded the platform contract on June 10, 2026, and the first agencies begin moving as fiscal year 2027 starts. The memo's sample timeline runs about eight months per agency, with the agency's interconnections going live around month five.
-On the identity side: agencies are moving from Active Directory to Entra ID anyway, which is Book 02. In Entra ID, attributes drive Conditional Access, groups and delegation, and inbound provisioning from an HR system is a documented, supported path.
-So there's a window. The identity feed has to be designed in during onboarding, before the interconnection goes live, not bolted on afterward.
-One honest limit: Federal HR 2.0 covers federal employees only. Contractors and vendors need their own authoritative source, and the onboarding is the right time to decide it too.
-Workbook: Book 03, Chapter 03 — Federal HR 2.0 and the Core HCM Platform.</a:t>
+              <a:t>[1:30–2:37]  Why. In many agencies today, nothing connects HR to identity. Accounts, access and credentials are created and removed by ticket, and that costs three ways.
+Access outlives the job. When someone leaves or changes roles, removal waits for a ticket. Yet the federal PIV standard, FIPS 201-3, requires a card that can't be collected to be terminated within eighteen hours of notification. A ticket-driven process struggles to meet that. Records drift: the phone book, the manager and the approval routing are wrong until someone files a ticket. And every joiner, mover and leaver is help-desk work.
+Zero Trust makes the gap visible. A token proves cryptographically who signed it. It can't prove the claim is true: that the person still works here, still holds the position the access was granted for, still reports to the supervisor who approved it. Those are workforce facts, and they live in HR.
+If we do nothing, HR moves to Core HCM, identity moves to Entra ID, and we rebuild the same manual process twice, on new platforms.
+Workbook: Book 03, Chapters 01 and 02; Chapter 07 for the PIV office.</a:t>
             </a:r>
           </a:p>
         </p:txBody>
@@ -782,13 +873,12 @@
           <a:p>
             <a:r>
               <a:rPr lang="en-US" dirty="0"/>
-              <a:t>[2:48–4:07]  What should we do? There are four realistic options, weighed against what leadership has to balance: the mission and the public, security, cost and resilience. Compliance matters, but on its own it isn't a reason to invest.
-Option A keeps ticket-driven identity. No new investment, but the risk and the manual work stay where they are: the cost of doing nothing.
-Option B automates inside the directories with scripts and exports. It's quick and cheap, but it automates a source that isn't authoritative, so it spreads bad data faster, and it has to be rebuilt when HR changes platforms.
-Option C waits for HR 2.0 and integrates afterward. That's defensible, and it's less work this year. But the interconnection decisions are made during onboarding, so waiting means retrofitting after go-live.
-Option D starts now: HR as the source of truth, expressed in OPM's standard personnel data and designed into both the HR onboarding and the Entra ID migration. It costs design effort up front and needs shared governance, which is why it's only partial on cost.
-The judgment call: if HR 2.0 slipped a long way, C becomes reasonable. But D's first step, data standards, ownership and the person key, is no-regret either way.
-Workbook: Book 03, Chapters 01 and 03.</a:t>
+              <a:t>[2:37–3:48]  Why now? Because two migrations open one design window.
+On the HR side: the December 10, 2025 memo from OMB and OPM creates Federal HR 2.0, one government-wide core human capital platform. OPM awarded the platform contract on June 10, 2026, and the first agencies begin moving as fiscal year 2027 starts. The memo's sample timeline runs about eight months per agency, with the agency's interconnections going live around month five.
+On the identity side: agencies are moving from Active Directory to Entra ID anyway, which is Book 02. In Entra ID, attributes drive Conditional Access, groups and delegation, and inbound provisioning from an HR system is a documented, supported path.
+So there's a window. The identity feed has to be designed in during onboarding, before the interconnection goes live, not bolted on afterward.
+One honest limit: Federal HR 2.0 covers federal employees only. Contractors and vendors need their own authoritative source, and the onboarding is the right time to decide it too.
+Workbook: Book 03, Chapter 03 — Federal HR 2.0 and the Core HCM Platform.</a:t>
             </a:r>
           </a:p>
         </p:txBody>
@@ -875,11 +965,13 @@
           <a:p>
             <a:r>
               <a:rPr lang="en-US" dirty="0"/>
-              <a:t>[4:07–5:12]  What does "HR as the source of truth" actually mean? It means one owner for every fact.
-The HR system of record is authoritative for employment status, position, organization, supervisor and effective dates. The identity platform stays authoritative for what it does: credentials, authentication, sessions, directory objects and policy. And contractors, whom HR 2.0 doesn't cover, get their own authoritative source mapped into the same model.
-That model is the canonical workforce identity model. Its contract is OPM's standard data elements and nature-of-action codes, the government-wide personnel data standards, so vendor field names stay at the boundary and can be replaced. It's keyed on an enterprise person key the agency controls, and that key has to fit Entra ID's employeeId attribute, which holds at most sixteen characters.
-The rule that makes it work: every attribute gets one name, one definition and one accountable owner. When a fact is wrong, it gets fixed in its source, never patched in the directory.
-Workbook: Book 03, Chapter 04 — Attribute Authority; Chapter 06 — The Canonical Workforce Identity Model.</a:t>
+              <a:t>[3:48–5:07]  What should we do? There are four realistic options, weighed against what leadership has to balance: the mission and the public, security, cost and resilience. Compliance matters, but on its own it isn't a reason to invest.
+Option A keeps ticket-driven identity. No new investment, but the risk and the manual work stay where they are: the cost of doing nothing.
+Option B automates inside the directories with scripts and exports. It's quick and cheap, but it automates a source that isn't authoritative, so it spreads bad data faster, and it has to be rebuilt when HR changes platforms.
+Option C waits for HR 2.0 and integrates afterward. That's defensible, and it's less work this year. But the interconnection decisions are made during onboarding, so waiting means retrofitting after go-live.
+Option D starts now: HR as the source of truth, expressed in OPM's standard personnel data and designed into both the HR onboarding and the Entra ID migration. It costs design effort up front and needs shared governance, which is why it's only partial on cost.
+The judgment call: if HR 2.0 slipped a long way, C becomes reasonable. But D's first step, data standards, ownership and the person key, is no-regret either way.
+Workbook: Book 03, Chapters 01 and 03.</a:t>
             </a:r>
           </a:p>
         </p:txBody>
@@ -966,11 +1058,11 @@
           <a:p>
             <a:r>
               <a:rPr lang="en-US" dirty="0"/>
-              <a:t>[5:12–6:19]  Provisioning turns personnel records into governed identities.
-Core HCM publishes worker records and personnel actions. A small middleware, inside the agency's authorization boundary, does five things for every event: it validates the record, applies events in order, normalizes them to the SCIM standard, writes a provenance record, and reconciles the result. Then Entra ID's API-driven inbound provisioning creates and updates the accounts in Entra ID and, through the provisioning agent, in Active Directory. That interface has daily call limits that scale with the license, which the book sizes against the agency's population.
-The design fails closed. Unknown worker types are refused. A failed record is retried and recorded, never silently skipped. And every event leaves a provenance record before the call returns, which is where the evidence comes from later.
-The technology is the example, not the point. Today it's Oracle Core HCM feeding Entra ID. If the vendors change, the model and the rules hold; only the boundary changes.
-Workbook: Book 03, Chapter 05 — Provisioning Services.</a:t>
+              <a:t>[5:07–6:12]  What does "HR as the source of truth" actually mean? It means one owner for every fact.
+The HR system of record is authoritative for employment status, position, organization, supervisor and effective dates. The identity platform stays authoritative for what it does: credentials, authentication, sessions, directory objects and policy. And contractors, whom HR 2.0 doesn't cover, get their own authoritative source mapped into the same model.
+That model is the canonical workforce identity model. Its contract is OPM's standard data elements and nature-of-action codes, the government-wide personnel data standards, so vendor field names stay at the boundary and can be replaced. It's keyed on an enterprise person key the agency controls, and that key has to fit Entra ID's employeeId attribute, which holds at most sixteen characters.
+The rule that makes it work: every attribute gets one name, one definition and one accountable owner. When a fact is wrong, it gets fixed in its source, never patched in the directory.
+Workbook: Book 03, Chapter 04 — Attribute Authority; Chapter 06 — The Canonical Workforce Identity Model.</a:t>
             </a:r>
           </a:p>
         </p:txBody>
@@ -1057,12 +1149,11 @@
           <a:p>
             <a:r>
               <a:rPr lang="en-US" dirty="0"/>
-              <a:t>[6:19–7:36]  Who has to be involved. This is an organizational change as much as a technical one.
-Owners. HR owns the personnel data and its quality, at the source. The OPM HR 2.0 program owns the platform, the standards and the interconnection. And each contractor source owns its own record.
-Users. The CIO's identity team runs Entra ID, Active Directory and access from that data. Security sets the Zero Trust policy and owns the leaver path. And the help desk moves from routine tickets to handling exceptions.
-Guards. The privacy office is in from the start. Sharing HR records with identity inside the agency normally rests on the Privacy Act's need-to-know provision, while disclosures outside the agency need a routine use, so the privacy office decides the basis for each leg, along with the privacy impact assessment and minimization. The PIV office owns issuance and termination. And the ISSO and authorizing official own the evidence and any accepted risk.
-The data architect ties it together: owning the standards, the crosswalk and the person key, making sure every attribute has one accountable owner, and carrying the standard to the interagency forums where it's adopted.
-Workbook: Book 03, Chapter 07 — Who Owns Workforce Identity.</a:t>
+              <a:t>[6:12–7:19]  Provisioning turns personnel records into governed identities.
+Core HCM publishes worker records and personnel actions. A small middleware, inside the agency's authorization boundary, does five things for every event: it validates the record, applies events in order, normalizes them to the SCIM standard, writes a provenance record, and reconciles the result. Then Entra ID's API-driven inbound provisioning creates and updates the accounts in Entra ID and, through the provisioning agent, in Active Directory. That interface has daily call limits that scale with the license, which the book sizes against the agency's population.
+The design fails closed. Unknown worker types are refused. A failed record is retried and recorded, never silently skipped. And every event leaves a provenance record before the call returns, which is where the evidence comes from later.
+The technology is the example, not the point. Today it's Oracle Core HCM feeding Entra ID. If the vendors change, the model and the rules hold; only the boundary changes.
+Workbook: Book 03, Chapter 05 — Provisioning Services.</a:t>
             </a:r>
           </a:p>
         </p:txBody>
@@ -1149,11 +1240,12 @@
           <a:p>
             <a:r>
               <a:rPr lang="en-US" dirty="0"/>
-              <a:t>[7:36–8:43]  How. Personnel actions drive the three identity events, by code, not by ticket.
-A joiner gets an account and baseline access ready on day one. A mover has the old assignment's access removed, the new baseline applied, and any exceptions reviewed. And a leaver is blocked first: the account disabled and sessions revoked at the effective separation time, then credentials, devices and access removed in parallel, each one reconciled.
-The book is precise about what the platform actually does. Lifecycle Workflows run on one tenant-wide schedule and need an Entra ID Governance license. Revoking sessions stops new tokens being issued, but tokens already issued last until they expire. Privileged leavers need their own verified block path, because the built-in disable task doesn't support users with admin roles. And synced users must be deleted in Active Directory, or the next sync brings them back.
-Credentials follow the same events: PIV issuance, certificate binding and termination, and device certificates retired before the account is deleted.
-Workbook: Book 03, Chapter 08 — Joiner, Mover, Leaver; Chapter 09 — Credentials and Certificates; Appendix A.</a:t>
+              <a:t>[7:19–8:36]  Who has to be involved. This is an organizational change as much as a technical one.
+Owners. HR owns the personnel data and its quality, at the source. The OPM HR 2.0 program owns the platform, the standards and the interconnection. And each contractor source owns its own record.
+Users. The CIO's identity team runs Entra ID, Active Directory and access from that data. Security sets the Zero Trust policy and owns the leaver path. And the help desk moves from routine tickets to handling exceptions.
+Guards. The privacy office is in from the start. Sharing HR records with identity inside the agency normally rests on the Privacy Act's need-to-know provision, while disclosures outside the agency need a routine use, so the privacy office decides the basis for each leg, along with the privacy impact assessment and minimization. The PIV office owns issuance and termination. And the ISSO and authorizing official own the evidence and any accepted risk.
+The data architect ties it together: owning the standards, the crosswalk and the person key, making sure every attribute has one accountable owner, and carrying the standard to the interagency forums where it's adopted.
+Workbook: Book 03, Chapter 07 — Who Owns Workforce Identity.</a:t>
             </a:r>
           </a:p>
         </p:txBody>
@@ -1240,10 +1332,11 @@
           <a:p>
             <a:r>
               <a:rPr lang="en-US" dirty="0"/>
-              <a:t>[8:43–9:45]  Next, access. Once the attributes are trustworthy, access is derived from them. A personnel record becomes a canonical attribute, a rule or access package turns that into an entitlement, and an evidence record captures why. Every entitlement then traces back to a rule, an approved exception, an authoritative attribute, or a privileged-access decision. That's what makes access explainable.
-Drift is found by comparison, not by complaint: scheduled checks compare HR, the model and the directories. It's measured in business terms leadership can read: time from separation to blocked access, orphaned accounts, and access ready on day one. And the records have to be kept long enough. Entra ID keeps audit and provisioning logs for thirty days with P1 or P2, so the book exports them from the pilot onward.
-The evidence comes as a byproduct. The same records that run the lifecycle answer the auditor's oldest question: does every account belong to a current person with a current reason?
-Workbook: Book 03, Chapter 10 — From Attributes to Access; Chapter 11 — Drift, Metrics and Evidence.</a:t>
+              <a:t>[8:36–9:43]  How. Personnel actions drive the three identity events, by code, not by ticket.
+A joiner gets an account and baseline access ready on day one. A mover has the old assignment's access removed, the new baseline applied, and any exceptions reviewed. And a leaver is blocked first: the account disabled and sessions revoked at the effective separation time, then credentials, devices and access removed in parallel, each one reconciled.
+The book is precise about what the platform actually does. Lifecycle Workflows run on one tenant-wide schedule and need an Entra ID Governance license. Revoking sessions stops new tokens being issued, but tokens already issued last until they expire. Privileged leavers need their own verified block path, because the built-in disable task doesn't support users with admin roles. And synced users must be deleted in Active Directory, or the next sync brings them back.
+Credentials follow the same events: PIV issuance, certificate binding and termination, and device certificates retired before the account is deleted.
+Workbook: Book 03, Chapter 08 — Joiner, Mover, Leaver; Chapter 09 — Credentials and Certificates; Appendix A.</a:t>
             </a:r>
           </a:p>
         </p:txBody>
@@ -2251,7 +2344,7 @@
             <a:hlinkClick r:id="" action="ppaction://media"/>
             <a:extLst>
               <a:ext uri="{FF2B5EF4-FFF2-40B4-BE49-F238E27FC236}">
-                <a16:creationId xmlns:a16="http://schemas.microsoft.com/office/drawing/2014/main" id="{0A3E8B00-A0A4-2DE2-F5CD-94835F71C835}"/>
+                <a16:creationId xmlns:a16="http://schemas.microsoft.com/office/drawing/2014/main" id="{BB47614A-65A8-29B8-6966-F82689BCFFBF}"/>
               </a:ext>
             </a:extLst>
           </p:cNvPr>
@@ -2267,7 +2360,7 @@
                     <p:ext uri="{3AFAAA56-56D3-431D-BCD4-E75A35582382}">
                       <p173:tracksInfo xmlns:p173="http://schemas.microsoft.com/office/powerpoint/2017/3/main" displayLoc="slide">
                         <p173:trackLst>
-                          <p173:track id="{CF9199F8-41AB-4D76-807F-66229885DFBA}" label="English (captions)" lang="en-US" r:embed="rId6"/>
+                          <p173:track id="{A204C773-1457-4BDC-8E7A-82DABAD585E6}" label="English (captions)" lang="en-US" r:embed="rId6"/>
                         </p173:trackLst>
                       </p173:tracksInfo>
                     </p:ext>
@@ -2300,10 +2393,10 @@
   </p:clrMapOvr>
   <mc:AlternateContent xmlns:mc="http://schemas.openxmlformats.org/markup-compatibility/2006">
     <mc:Choice xmlns:p14="http://schemas.microsoft.com/office/powerpoint/2010/main" Requires="p14">
-      <p:transition spd="slow" p14:dur="2000" advTm="40000"/>
+      <p:transition spd="slow" p14:dur="2000" advTm="40020"/>
     </mc:Choice>
     <mc:Fallback>
-      <p:transition spd="slow" advTm="40000"/>
+      <p:transition spd="slow" advTm="40020"/>
     </mc:Fallback>
   </mc:AlternateContent>
   <p:timing>
@@ -2337,7 +2430,7 @@
                                   <p:childTnLst>
                                     <p:cmd type="call" cmd="playFrom(0.0)">
                                       <p:cBhvr>
-                                        <p:cTn id="6" dur="36000" fill="hold"/>
+                                        <p:cTn id="6" dur="36024" fill="hold"/>
                                         <p:tgtEl>
                                           <p:spTgt spid="8"/>
                                         </p:tgtEl>
@@ -2431,7 +2524,7 @@
                 <a:ea typeface="Cambria" pitchFamily="34" charset="-122"/>
                 <a:cs typeface="Cambria" pitchFamily="34" charset="-120"/>
               </a:rPr>
-              <a:t>Seven phases, each gate the next phase's precondition</a:t>
+              <a:t>From attributes to access, with evidence built in</a:t>
             </a:r>
             <a:endParaRPr lang="en-US" sz="3000" dirty="0"/>
           </a:p>
@@ -2508,7 +2601,7 @@
       </p:sp>
       <p:sp>
         <p:nvSpPr>
-          <p:cNvPr id="5" name="Phase 0">
+          <p:cNvPr id="5" name="Chain 0">
             <a:extLst>
               <a:ext uri="{C183D7F6-B498-43B3-948B-1728B52AA6E4}">
                 <adec:decorative xmlns:adec="http://schemas.microsoft.com/office/drawing/2017/decorative" val="1"/>
@@ -2520,12 +2613,12 @@
         </p:nvSpPr>
         <p:spPr>
           <a:xfrm>
-            <a:off x="548640" y="1508760"/>
-            <a:ext cx="1463040" cy="1463040"/>
+            <a:off x="548640" y="1554480"/>
+            <a:ext cx="2057400" cy="914400"/>
           </a:xfrm>
           <a:prstGeom prst="roundRect">
             <a:avLst>
-              <a:gd name="adj" fmla="val 5000"/>
+              <a:gd name="adj" fmla="val 8000"/>
             </a:avLst>
           </a:prstGeom>
           <a:solidFill>
@@ -2548,14 +2641,14 @@
       </p:sp>
       <p:sp>
         <p:nvSpPr>
-          <p:cNvPr id="6" name="Phase 0 text"/>
+          <p:cNvPr id="6" name="Chain 0 text"/>
           <p:cNvSpPr txBox="1"/>
           <p:nvPr/>
         </p:nvSpPr>
         <p:spPr>
           <a:xfrm>
-            <a:off x="658368" y="1572768"/>
-            <a:ext cx="1280160" cy="1325880"/>
+            <a:off x="640080" y="1554480"/>
+            <a:ext cx="1874520" cy="914400"/>
           </a:xfrm>
           <a:prstGeom prst="rect">
             <a:avLst/>
@@ -2564,44 +2657,27 @@
           <a:ln/>
         </p:spPr>
         <p:txBody>
-          <a:bodyPr wrap="square" lIns="0" tIns="0" rIns="0" bIns="0" rtlCol="0" anchor="t"/>
+          <a:bodyPr wrap="square" lIns="0" tIns="0" rIns="0" bIns="0" rtlCol="0" anchor="ctr"/>
           <a:lstStyle/>
           <a:p>
             <a:pPr marL="0" indent="0" algn="ctr">
               <a:buNone/>
             </a:pPr>
             <a:r>
-              <a:rPr lang="en-US" sz="2600" b="1" dirty="0">
+              <a:rPr lang="en-US" sz="1500" b="1" dirty="0">
                 <a:solidFill>
                   <a:srgbClr val="1F2A44"/>
                 </a:solidFill>
-                <a:latin typeface="Cambria" pitchFamily="34" charset="0"/>
-                <a:ea typeface="Cambria" pitchFamily="34" charset="-122"/>
-                <a:cs typeface="Cambria" pitchFamily="34" charset="-120"/>
-              </a:rPr>
-              <a:t>0</a:t>
-            </a:r>
-            <a:endParaRPr lang="en-US" sz="1400" dirty="0"/>
-          </a:p>
-          <a:p>
-            <a:pPr marL="0" indent="0" algn="ctr">
-              <a:buNone/>
-            </a:pPr>
-            <a:r>
-              <a:rPr lang="en-US" sz="1350" b="1" dirty="0">
-                <a:solidFill>
-                  <a:schemeClr val="tx2"/>
-                </a:solidFill>
-              </a:rPr>
-              <a:t>Align</a:t>
-            </a:r>
-            <a:endParaRPr lang="en-US" sz="1400" dirty="0"/>
+              </a:rPr>
+              <a:t>Personnel record</a:t>
+            </a:r>
+            <a:endParaRPr lang="en-US" sz="1500" dirty="0"/>
           </a:p>
         </p:txBody>
       </p:sp>
       <p:sp>
         <p:nvSpPr>
-          <p:cNvPr id="7" name="Phase 1">
+          <p:cNvPr id="7" name="Chain 1">
             <a:extLst>
               <a:ext uri="{C183D7F6-B498-43B3-948B-1728B52AA6E4}">
                 <adec:decorative xmlns:adec="http://schemas.microsoft.com/office/drawing/2017/decorative" val="1"/>
@@ -2613,12 +2689,12 @@
         </p:nvSpPr>
         <p:spPr>
           <a:xfrm>
-            <a:off x="2148840" y="1508760"/>
-            <a:ext cx="1463040" cy="1463040"/>
+            <a:off x="2798064" y="1554480"/>
+            <a:ext cx="2057400" cy="914400"/>
           </a:xfrm>
           <a:prstGeom prst="roundRect">
             <a:avLst>
-              <a:gd name="adj" fmla="val 5000"/>
+              <a:gd name="adj" fmla="val 8000"/>
             </a:avLst>
           </a:prstGeom>
           <a:solidFill>
@@ -2641,14 +2717,14 @@
       </p:sp>
       <p:sp>
         <p:nvSpPr>
-          <p:cNvPr id="8" name="Phase 1 text"/>
+          <p:cNvPr id="8" name="Chain 1 text"/>
           <p:cNvSpPr txBox="1"/>
           <p:nvPr/>
         </p:nvSpPr>
         <p:spPr>
           <a:xfrm>
-            <a:off x="2258568" y="1572768"/>
-            <a:ext cx="1280160" cy="1325880"/>
+            <a:off x="2889504" y="1554480"/>
+            <a:ext cx="1874520" cy="914400"/>
           </a:xfrm>
           <a:prstGeom prst="rect">
             <a:avLst/>
@@ -2657,44 +2733,27 @@
           <a:ln/>
         </p:spPr>
         <p:txBody>
-          <a:bodyPr wrap="square" lIns="0" tIns="0" rIns="0" bIns="0" rtlCol="0" anchor="t"/>
+          <a:bodyPr wrap="square" lIns="0" tIns="0" rIns="0" bIns="0" rtlCol="0" anchor="ctr"/>
           <a:lstStyle/>
           <a:p>
             <a:pPr marL="0" indent="0" algn="ctr">
               <a:buNone/>
             </a:pPr>
             <a:r>
-              <a:rPr lang="en-US" sz="2600" b="1" dirty="0">
-                <a:solidFill>
-                  <a:srgbClr val="0F766E"/>
-                </a:solidFill>
-                <a:latin typeface="Cambria" pitchFamily="34" charset="0"/>
-                <a:ea typeface="Cambria" pitchFamily="34" charset="-122"/>
-                <a:cs typeface="Cambria" pitchFamily="34" charset="-120"/>
-              </a:rPr>
-              <a:t>1</a:t>
-            </a:r>
-            <a:endParaRPr lang="en-US" sz="1400" dirty="0"/>
-          </a:p>
-          <a:p>
-            <a:pPr marL="0" indent="0" algn="ctr">
-              <a:buNone/>
-            </a:pPr>
-            <a:r>
-              <a:rPr lang="en-US" sz="1350" b="1" dirty="0">
-                <a:solidFill>
-                  <a:schemeClr val="tx2"/>
-                </a:solidFill>
-              </a:rPr>
-              <a:t>Authority and schema</a:t>
-            </a:r>
-            <a:endParaRPr lang="en-US" sz="1400" dirty="0"/>
+              <a:rPr lang="en-US" sz="1500" b="1" dirty="0">
+                <a:solidFill>
+                  <a:srgbClr val="1F2A44"/>
+                </a:solidFill>
+              </a:rPr>
+              <a:t>Canonical attribute</a:t>
+            </a:r>
+            <a:endParaRPr lang="en-US" sz="1500" dirty="0"/>
           </a:p>
         </p:txBody>
       </p:sp>
       <p:sp>
         <p:nvSpPr>
-          <p:cNvPr id="9" name="Phase 2">
+          <p:cNvPr id="9" name="Chain 2">
             <a:extLst>
               <a:ext uri="{C183D7F6-B498-43B3-948B-1728B52AA6E4}">
                 <adec:decorative xmlns:adec="http://schemas.microsoft.com/office/drawing/2017/decorative" val="1"/>
@@ -2706,12 +2765,12 @@
         </p:nvSpPr>
         <p:spPr>
           <a:xfrm>
-            <a:off x="3749040" y="1508760"/>
-            <a:ext cx="1463040" cy="1463040"/>
+            <a:off x="5047488" y="1554480"/>
+            <a:ext cx="2057400" cy="914400"/>
           </a:xfrm>
           <a:prstGeom prst="roundRect">
             <a:avLst>
-              <a:gd name="adj" fmla="val 5000"/>
+              <a:gd name="adj" fmla="val 8000"/>
             </a:avLst>
           </a:prstGeom>
           <a:solidFill>
@@ -2734,14 +2793,14 @@
       </p:sp>
       <p:sp>
         <p:nvSpPr>
-          <p:cNvPr id="10" name="Phase 2 text"/>
+          <p:cNvPr id="10" name="Chain 2 text"/>
           <p:cNvSpPr txBox="1"/>
           <p:nvPr/>
         </p:nvSpPr>
         <p:spPr>
           <a:xfrm>
-            <a:off x="3858768" y="1572768"/>
-            <a:ext cx="1280160" cy="1325880"/>
+            <a:off x="5138928" y="1554480"/>
+            <a:ext cx="1874520" cy="914400"/>
           </a:xfrm>
           <a:prstGeom prst="rect">
             <a:avLst/>
@@ -2750,44 +2809,27 @@
           <a:ln/>
         </p:spPr>
         <p:txBody>
-          <a:bodyPr wrap="square" lIns="0" tIns="0" rIns="0" bIns="0" rtlCol="0" anchor="t"/>
+          <a:bodyPr wrap="square" lIns="0" tIns="0" rIns="0" bIns="0" rtlCol="0" anchor="ctr"/>
           <a:lstStyle/>
           <a:p>
             <a:pPr marL="0" indent="0" algn="ctr">
               <a:buNone/>
             </a:pPr>
             <a:r>
-              <a:rPr lang="en-US" sz="2600" b="1" dirty="0">
+              <a:rPr lang="en-US" sz="1500" b="1" dirty="0">
                 <a:solidFill>
                   <a:srgbClr val="1F2A44"/>
                 </a:solidFill>
-                <a:latin typeface="Cambria" pitchFamily="34" charset="0"/>
-                <a:ea typeface="Cambria" pitchFamily="34" charset="-122"/>
-                <a:cs typeface="Cambria" pitchFamily="34" charset="-120"/>
-              </a:rPr>
-              <a:t>2</a:t>
-            </a:r>
-            <a:endParaRPr lang="en-US" sz="1400" dirty="0"/>
-          </a:p>
-          <a:p>
-            <a:pPr marL="0" indent="0" algn="ctr">
-              <a:buNone/>
-            </a:pPr>
-            <a:r>
-              <a:rPr lang="en-US" sz="1350" b="1" dirty="0">
-                <a:solidFill>
-                  <a:schemeClr val="tx2"/>
-                </a:solidFill>
-              </a:rPr>
-              <a:t>Build and test</a:t>
-            </a:r>
-            <a:endParaRPr lang="en-US" sz="1400" dirty="0"/>
+              </a:rPr>
+              <a:t>Rule or access package</a:t>
+            </a:r>
+            <a:endParaRPr lang="en-US" sz="1500" dirty="0"/>
           </a:p>
         </p:txBody>
       </p:sp>
       <p:sp>
         <p:nvSpPr>
-          <p:cNvPr id="11" name="Phase 3">
+          <p:cNvPr id="11" name="Chain 3">
             <a:extLst>
               <a:ext uri="{C183D7F6-B498-43B3-948B-1728B52AA6E4}">
                 <adec:decorative xmlns:adec="http://schemas.microsoft.com/office/drawing/2017/decorative" val="1"/>
@@ -2799,12 +2841,12 @@
         </p:nvSpPr>
         <p:spPr>
           <a:xfrm>
-            <a:off x="5349240" y="1508760"/>
-            <a:ext cx="1463040" cy="1463040"/>
+            <a:off x="7296912" y="1554480"/>
+            <a:ext cx="2057400" cy="914400"/>
           </a:xfrm>
           <a:prstGeom prst="roundRect">
             <a:avLst>
-              <a:gd name="adj" fmla="val 5000"/>
+              <a:gd name="adj" fmla="val 8000"/>
             </a:avLst>
           </a:prstGeom>
           <a:solidFill>
@@ -2827,14 +2869,14 @@
       </p:sp>
       <p:sp>
         <p:nvSpPr>
-          <p:cNvPr id="12" name="Phase 3 text"/>
+          <p:cNvPr id="12" name="Chain 3 text"/>
           <p:cNvSpPr txBox="1"/>
           <p:nvPr/>
         </p:nvSpPr>
         <p:spPr>
           <a:xfrm>
-            <a:off x="5458968" y="1572768"/>
-            <a:ext cx="1280160" cy="1325880"/>
+            <a:off x="7388352" y="1554480"/>
+            <a:ext cx="1874520" cy="914400"/>
           </a:xfrm>
           <a:prstGeom prst="rect">
             <a:avLst/>
@@ -2843,44 +2885,27 @@
           <a:ln/>
         </p:spPr>
         <p:txBody>
-          <a:bodyPr wrap="square" lIns="0" tIns="0" rIns="0" bIns="0" rtlCol="0" anchor="t"/>
+          <a:bodyPr wrap="square" lIns="0" tIns="0" rIns="0" bIns="0" rtlCol="0" anchor="ctr"/>
           <a:lstStyle/>
           <a:p>
             <a:pPr marL="0" indent="0" algn="ctr">
               <a:buNone/>
             </a:pPr>
             <a:r>
-              <a:rPr lang="en-US" sz="2600" b="1" dirty="0">
-                <a:solidFill>
-                  <a:srgbClr val="0F766E"/>
-                </a:solidFill>
-                <a:latin typeface="Cambria" pitchFamily="34" charset="0"/>
-                <a:ea typeface="Cambria" pitchFamily="34" charset="-122"/>
-                <a:cs typeface="Cambria" pitchFamily="34" charset="-120"/>
-              </a:rPr>
-              <a:t>3</a:t>
-            </a:r>
-            <a:endParaRPr lang="en-US" sz="1400" dirty="0"/>
-          </a:p>
-          <a:p>
-            <a:pPr marL="0" indent="0" algn="ctr">
-              <a:buNone/>
-            </a:pPr>
-            <a:r>
-              <a:rPr lang="en-US" sz="1350" b="1" dirty="0">
-                <a:solidFill>
-                  <a:schemeClr val="tx2"/>
-                </a:solidFill>
-              </a:rPr>
-              <a:t>Pilot</a:t>
-            </a:r>
-            <a:endParaRPr lang="en-US" sz="1400" dirty="0"/>
+              <a:rPr lang="en-US" sz="1500" b="1" dirty="0">
+                <a:solidFill>
+                  <a:srgbClr val="1F2A44"/>
+                </a:solidFill>
+              </a:rPr>
+              <a:t>Entitlement</a:t>
+            </a:r>
+            <a:endParaRPr lang="en-US" sz="1500" dirty="0"/>
           </a:p>
         </p:txBody>
       </p:sp>
       <p:sp>
         <p:nvSpPr>
-          <p:cNvPr id="13" name="Phase 4">
+          <p:cNvPr id="13" name="Chain 4">
             <a:extLst>
               <a:ext uri="{C183D7F6-B498-43B3-948B-1728B52AA6E4}">
                 <adec:decorative xmlns:adec="http://schemas.microsoft.com/office/drawing/2017/decorative" val="1"/>
@@ -2892,7 +2917,876 @@
         </p:nvSpPr>
         <p:spPr>
           <a:xfrm>
-            <a:off x="6949440" y="1508760"/>
+            <a:off x="9546336" y="1554480"/>
+            <a:ext cx="2057400" cy="914400"/>
+          </a:xfrm>
+          <a:prstGeom prst="roundRect">
+            <a:avLst>
+              <a:gd name="adj" fmla="val 8000"/>
+            </a:avLst>
+          </a:prstGeom>
+          <a:solidFill>
+            <a:srgbClr val="FBEEDC"/>
+          </a:solidFill>
+          <a:ln w="12700">
+            <a:solidFill>
+              <a:srgbClr val="FBEEDC"/>
+            </a:solidFill>
+            <a:prstDash val="solid"/>
+          </a:ln>
+          <a:effectLst>
+            <a:outerShdw blurRad="76200" dist="25400" dir="5400000" algn="bl" rotWithShape="0">
+              <a:srgbClr val="64748B">
+                <a:alpha val="22000"/>
+              </a:srgbClr>
+            </a:outerShdw>
+          </a:effectLst>
+        </p:spPr>
+      </p:sp>
+      <p:sp>
+        <p:nvSpPr>
+          <p:cNvPr id="14" name="Chain 4 text"/>
+          <p:cNvSpPr txBox="1"/>
+          <p:nvPr/>
+        </p:nvSpPr>
+        <p:spPr>
+          <a:xfrm>
+            <a:off x="9637776" y="1554480"/>
+            <a:ext cx="1874520" cy="914400"/>
+          </a:xfrm>
+          <a:prstGeom prst="rect">
+            <a:avLst/>
+          </a:prstGeom>
+          <a:noFill/>
+          <a:ln/>
+        </p:spPr>
+        <p:txBody>
+          <a:bodyPr wrap="square" lIns="0" tIns="0" rIns="0" bIns="0" rtlCol="0" anchor="ctr"/>
+          <a:lstStyle/>
+          <a:p>
+            <a:pPr marL="0" indent="0" algn="ctr">
+              <a:buNone/>
+            </a:pPr>
+            <a:r>
+              <a:rPr lang="en-US" sz="1500" b="1" dirty="0">
+                <a:solidFill>
+                  <a:srgbClr val="B45309"/>
+                </a:solidFill>
+              </a:rPr>
+              <a:t>Evidence record</a:t>
+            </a:r>
+            <a:endParaRPr lang="en-US" sz="1500" dirty="0"/>
+          </a:p>
+        </p:txBody>
+      </p:sp>
+      <p:sp>
+        <p:nvSpPr>
+          <p:cNvPr id="15" name="Chain note"/>
+          <p:cNvSpPr txBox="1"/>
+          <p:nvPr/>
+        </p:nvSpPr>
+        <p:spPr>
+          <a:xfrm>
+            <a:off x="548640" y="2697480"/>
+            <a:ext cx="11109960" cy="457200"/>
+          </a:xfrm>
+          <a:prstGeom prst="rect">
+            <a:avLst/>
+          </a:prstGeom>
+          <a:noFill/>
+          <a:ln/>
+        </p:spPr>
+        <p:txBody>
+          <a:bodyPr wrap="square" lIns="0" tIns="0" rIns="0" bIns="0" rtlCol="0" anchor="t"/>
+          <a:lstStyle/>
+          <a:p>
+            <a:pPr marL="0" indent="0">
+              <a:buNone/>
+            </a:pPr>
+            <a:r>
+              <a:rPr lang="en-US" sz="1550" i="1" dirty="0">
+                <a:solidFill>
+                  <a:srgbClr val="334155"/>
+                </a:solidFill>
+              </a:rPr>
+              <a:t>Every entitlement traces back to a rule, an approved exception, an authoritative attribute, or a privileged-access decision.</a:t>
+            </a:r>
+            <a:endParaRPr lang="en-US" sz="1550" dirty="0"/>
+          </a:p>
+        </p:txBody>
+      </p:sp>
+      <p:sp>
+        <p:nvSpPr>
+          <p:cNvPr id="16" name="Drift 0">
+            <a:extLst>
+              <a:ext uri="{C183D7F6-B498-43B3-948B-1728B52AA6E4}">
+                <adec:decorative xmlns:adec="http://schemas.microsoft.com/office/drawing/2017/decorative" val="1"/>
+              </a:ext>
+            </a:extLst>
+          </p:cNvPr>
+          <p:cNvSpPr/>
+          <p:nvPr/>
+        </p:nvSpPr>
+        <p:spPr>
+          <a:xfrm>
+            <a:off x="548640" y="3291840"/>
+            <a:ext cx="3611880" cy="1325880"/>
+          </a:xfrm>
+          <a:prstGeom prst="roundRect">
+            <a:avLst>
+              <a:gd name="adj" fmla="val 5517"/>
+            </a:avLst>
+          </a:prstGeom>
+          <a:solidFill>
+            <a:srgbClr val="FFFFFF"/>
+          </a:solidFill>
+          <a:ln w="12700">
+            <a:solidFill>
+              <a:srgbClr val="CBD5E1"/>
+            </a:solidFill>
+            <a:prstDash val="solid"/>
+          </a:ln>
+          <a:effectLst>
+            <a:outerShdw blurRad="76200" dist="25400" dir="5400000" algn="bl" rotWithShape="0">
+              <a:srgbClr val="64748B">
+                <a:alpha val="22000"/>
+              </a:srgbClr>
+            </a:outerShdw>
+          </a:effectLst>
+        </p:spPr>
+      </p:sp>
+      <p:sp>
+        <p:nvSpPr>
+          <p:cNvPr id="17" name="Drift 0 text"/>
+          <p:cNvSpPr txBox="1"/>
+          <p:nvPr/>
+        </p:nvSpPr>
+        <p:spPr>
+          <a:xfrm>
+            <a:off x="731520" y="3383280"/>
+            <a:ext cx="3246120" cy="1188720"/>
+          </a:xfrm>
+          <a:prstGeom prst="rect">
+            <a:avLst/>
+          </a:prstGeom>
+          <a:noFill/>
+          <a:ln/>
+        </p:spPr>
+        <p:txBody>
+          <a:bodyPr wrap="square" lIns="0" tIns="0" rIns="0" bIns="0" rtlCol="0" anchor="t"/>
+          <a:lstStyle/>
+          <a:p>
+            <a:pPr marL="0" indent="0">
+              <a:buNone/>
+            </a:pPr>
+            <a:r>
+              <a:rPr lang="en-US" sz="1500" b="1" dirty="0">
+                <a:solidFill>
+                  <a:srgbClr val="0F766E"/>
+                </a:solidFill>
+              </a:rPr>
+              <a:t>Drift found by comparison</a:t>
+            </a:r>
+            <a:endParaRPr lang="en-US" sz="1400" dirty="0"/>
+          </a:p>
+          <a:p>
+            <a:pPr marL="0" indent="0">
+              <a:buNone/>
+            </a:pPr>
+            <a:r>
+              <a:rPr lang="en-US" sz="1350" dirty="0">
+                <a:solidFill>
+                  <a:schemeClr val="tx2"/>
+                </a:solidFill>
+              </a:rPr>
+              <a:t>Scheduled checks compare HR, the model and the directories</a:t>
+            </a:r>
+            <a:endParaRPr lang="en-US" sz="1400" dirty="0"/>
+          </a:p>
+        </p:txBody>
+      </p:sp>
+      <p:sp>
+        <p:nvSpPr>
+          <p:cNvPr id="18" name="Drift 1">
+            <a:extLst>
+              <a:ext uri="{C183D7F6-B498-43B3-948B-1728B52AA6E4}">
+                <adec:decorative xmlns:adec="http://schemas.microsoft.com/office/drawing/2017/decorative" val="1"/>
+              </a:ext>
+            </a:extLst>
+          </p:cNvPr>
+          <p:cNvSpPr/>
+          <p:nvPr/>
+        </p:nvSpPr>
+        <p:spPr>
+          <a:xfrm>
+            <a:off x="4297680" y="3291840"/>
+            <a:ext cx="3611880" cy="1325880"/>
+          </a:xfrm>
+          <a:prstGeom prst="roundRect">
+            <a:avLst>
+              <a:gd name="adj" fmla="val 5517"/>
+            </a:avLst>
+          </a:prstGeom>
+          <a:solidFill>
+            <a:srgbClr val="FFFFFF"/>
+          </a:solidFill>
+          <a:ln w="12700">
+            <a:solidFill>
+              <a:srgbClr val="CBD5E1"/>
+            </a:solidFill>
+            <a:prstDash val="solid"/>
+          </a:ln>
+          <a:effectLst>
+            <a:outerShdw blurRad="76200" dist="25400" dir="5400000" algn="bl" rotWithShape="0">
+              <a:srgbClr val="64748B">
+                <a:alpha val="22000"/>
+              </a:srgbClr>
+            </a:outerShdw>
+          </a:effectLst>
+        </p:spPr>
+      </p:sp>
+      <p:sp>
+        <p:nvSpPr>
+          <p:cNvPr id="19" name="Drift 1 text"/>
+          <p:cNvSpPr txBox="1"/>
+          <p:nvPr/>
+        </p:nvSpPr>
+        <p:spPr>
+          <a:xfrm>
+            <a:off x="4480560" y="3383280"/>
+            <a:ext cx="3246120" cy="1188720"/>
+          </a:xfrm>
+          <a:prstGeom prst="rect">
+            <a:avLst/>
+          </a:prstGeom>
+          <a:noFill/>
+          <a:ln/>
+        </p:spPr>
+        <p:txBody>
+          <a:bodyPr wrap="square" lIns="0" tIns="0" rIns="0" bIns="0" rtlCol="0" anchor="t"/>
+          <a:lstStyle/>
+          <a:p>
+            <a:pPr marL="0" indent="0">
+              <a:buNone/>
+            </a:pPr>
+            <a:r>
+              <a:rPr lang="en-US" sz="1500" b="1" dirty="0">
+                <a:solidFill>
+                  <a:srgbClr val="0F766E"/>
+                </a:solidFill>
+              </a:rPr>
+              <a:t>Measured in business terms</a:t>
+            </a:r>
+            <a:endParaRPr lang="en-US" sz="1400" dirty="0"/>
+          </a:p>
+          <a:p>
+            <a:pPr marL="0" indent="0">
+              <a:buNone/>
+            </a:pPr>
+            <a:r>
+              <a:rPr lang="en-US" sz="1350" dirty="0">
+                <a:solidFill>
+                  <a:schemeClr val="tx2"/>
+                </a:solidFill>
+              </a:rPr>
+              <a:t>Separation-to-block time, orphan accounts, day-one readiness</a:t>
+            </a:r>
+            <a:endParaRPr lang="en-US" sz="1400" dirty="0"/>
+          </a:p>
+        </p:txBody>
+      </p:sp>
+      <p:sp>
+        <p:nvSpPr>
+          <p:cNvPr id="20" name="Drift 2">
+            <a:extLst>
+              <a:ext uri="{C183D7F6-B498-43B3-948B-1728B52AA6E4}">
+                <adec:decorative xmlns:adec="http://schemas.microsoft.com/office/drawing/2017/decorative" val="1"/>
+              </a:ext>
+            </a:extLst>
+          </p:cNvPr>
+          <p:cNvSpPr/>
+          <p:nvPr/>
+        </p:nvSpPr>
+        <p:spPr>
+          <a:xfrm>
+            <a:off x="8046720" y="3291840"/>
+            <a:ext cx="3611880" cy="1325880"/>
+          </a:xfrm>
+          <a:prstGeom prst="roundRect">
+            <a:avLst>
+              <a:gd name="adj" fmla="val 5517"/>
+            </a:avLst>
+          </a:prstGeom>
+          <a:solidFill>
+            <a:srgbClr val="FFFFFF"/>
+          </a:solidFill>
+          <a:ln w="12700">
+            <a:solidFill>
+              <a:srgbClr val="CBD5E1"/>
+            </a:solidFill>
+            <a:prstDash val="solid"/>
+          </a:ln>
+          <a:effectLst>
+            <a:outerShdw blurRad="76200" dist="25400" dir="5400000" algn="bl" rotWithShape="0">
+              <a:srgbClr val="64748B">
+                <a:alpha val="22000"/>
+              </a:srgbClr>
+            </a:outerShdw>
+          </a:effectLst>
+        </p:spPr>
+      </p:sp>
+      <p:sp>
+        <p:nvSpPr>
+          <p:cNvPr id="21" name="Drift 2 text"/>
+          <p:cNvSpPr txBox="1"/>
+          <p:nvPr/>
+        </p:nvSpPr>
+        <p:spPr>
+          <a:xfrm>
+            <a:off x="8229600" y="3383280"/>
+            <a:ext cx="3246120" cy="1188720"/>
+          </a:xfrm>
+          <a:prstGeom prst="rect">
+            <a:avLst/>
+          </a:prstGeom>
+          <a:noFill/>
+          <a:ln/>
+        </p:spPr>
+        <p:txBody>
+          <a:bodyPr wrap="square" lIns="0" tIns="0" rIns="0" bIns="0" rtlCol="0" anchor="t"/>
+          <a:lstStyle/>
+          <a:p>
+            <a:pPr marL="0" indent="0">
+              <a:buNone/>
+            </a:pPr>
+            <a:r>
+              <a:rPr lang="en-US" sz="1500" b="1" dirty="0">
+                <a:solidFill>
+                  <a:srgbClr val="0F766E"/>
+                </a:solidFill>
+              </a:rPr>
+              <a:t>Kept long enough</a:t>
+            </a:r>
+            <a:endParaRPr lang="en-US" sz="1400" dirty="0"/>
+          </a:p>
+          <a:p>
+            <a:pPr marL="0" indent="0">
+              <a:buNone/>
+            </a:pPr>
+            <a:r>
+              <a:rPr lang="en-US" sz="1350" dirty="0">
+                <a:solidFill>
+                  <a:schemeClr val="tx2"/>
+                </a:solidFill>
+              </a:rPr>
+              <a:t>Entra keeps audit and provisioning logs 30 days with P1/P2 — export from the pilot onward</a:t>
+            </a:r>
+            <a:endParaRPr lang="en-US" sz="1400" dirty="0"/>
+          </a:p>
+        </p:txBody>
+      </p:sp>
+      <p:sp>
+        <p:nvSpPr>
+          <p:cNvPr id="22" name="Evidence">
+            <a:extLst>
+              <a:ext uri="{C183D7F6-B498-43B3-948B-1728B52AA6E4}">
+                <adec:decorative xmlns:adec="http://schemas.microsoft.com/office/drawing/2017/decorative" val="1"/>
+              </a:ext>
+            </a:extLst>
+          </p:cNvPr>
+          <p:cNvSpPr/>
+          <p:nvPr/>
+        </p:nvSpPr>
+        <p:spPr>
+          <a:xfrm>
+            <a:off x="548640" y="4846320"/>
+            <a:ext cx="11109960" cy="1097280"/>
+          </a:xfrm>
+          <a:prstGeom prst="roundRect">
+            <a:avLst>
+              <a:gd name="adj" fmla="val 6667"/>
+            </a:avLst>
+          </a:prstGeom>
+          <a:solidFill>
+            <a:srgbClr val="FFFFFF"/>
+          </a:solidFill>
+          <a:ln w="12700">
+            <a:solidFill>
+              <a:srgbClr val="B45309"/>
+            </a:solidFill>
+            <a:prstDash val="solid"/>
+          </a:ln>
+          <a:effectLst>
+            <a:outerShdw blurRad="76200" dist="25400" dir="5400000" algn="bl" rotWithShape="0">
+              <a:srgbClr val="64748B">
+                <a:alpha val="22000"/>
+              </a:srgbClr>
+            </a:outerShdw>
+          </a:effectLst>
+        </p:spPr>
+      </p:sp>
+      <p:sp>
+        <p:nvSpPr>
+          <p:cNvPr id="23" name="Icon FaFileShield">
+            <a:extLst>
+              <a:ext uri="{C183D7F6-B498-43B3-948B-1728B52AA6E4}">
+                <adec:decorative xmlns:adec="http://schemas.microsoft.com/office/drawing/2017/decorative" val="1"/>
+              </a:ext>
+            </a:extLst>
+          </p:cNvPr>
+          <p:cNvSpPr/>
+          <p:nvPr/>
+        </p:nvSpPr>
+        <p:spPr>
+          <a:xfrm>
+            <a:off x="777240" y="5029200"/>
+            <a:ext cx="731520" cy="731520"/>
+          </a:xfrm>
+          <a:prstGeom prst="ellipse">
+            <a:avLst/>
+          </a:prstGeom>
+          <a:solidFill>
+            <a:srgbClr val="B45309"/>
+          </a:solidFill>
+          <a:ln w="12700">
+            <a:solidFill>
+              <a:srgbClr val="B45309"/>
+            </a:solidFill>
+            <a:prstDash val="solid"/>
+          </a:ln>
+        </p:spPr>
+      </p:sp>
+      <p:pic>
+        <p:nvPicPr>
+          <p:cNvPr id="24" name="Image 0">
+            <a:extLst>
+              <a:ext uri="{C183D7F6-B498-43B3-948B-1728B52AA6E4}">
+                <adec:decorative xmlns:adec="http://schemas.microsoft.com/office/drawing/2017/decorative" val="1"/>
+              </a:ext>
+            </a:extLst>
+          </p:cNvPr>
+          <p:cNvPicPr>
+            <a:picLocks noChangeAspect="1"/>
+          </p:cNvPicPr>
+          <p:nvPr/>
+        </p:nvPicPr>
+        <p:blipFill>
+          <a:blip r:embed="rId5"/>
+          <a:stretch>
+            <a:fillRect/>
+          </a:stretch>
+        </p:blipFill>
+        <p:spPr>
+          <a:xfrm>
+            <a:off x="952805" y="5204765"/>
+            <a:ext cx="380390" cy="380390"/>
+          </a:xfrm>
+          <a:prstGeom prst="rect">
+            <a:avLst/>
+          </a:prstGeom>
+        </p:spPr>
+      </p:pic>
+      <p:sp>
+        <p:nvSpPr>
+          <p:cNvPr id="25" name="Evidence text"/>
+          <p:cNvSpPr txBox="1"/>
+          <p:nvPr/>
+        </p:nvSpPr>
+        <p:spPr>
+          <a:xfrm>
+            <a:off x="1737360" y="4892040"/>
+            <a:ext cx="9738360" cy="1005840"/>
+          </a:xfrm>
+          <a:prstGeom prst="rect">
+            <a:avLst/>
+          </a:prstGeom>
+          <a:noFill/>
+          <a:ln/>
+        </p:spPr>
+        <p:txBody>
+          <a:bodyPr wrap="square" lIns="0" tIns="0" rIns="0" bIns="0" rtlCol="0" anchor="ctr"/>
+          <a:lstStyle/>
+          <a:p>
+            <a:pPr marL="0" indent="0">
+              <a:buNone/>
+            </a:pPr>
+            <a:r>
+              <a:rPr lang="en-US" sz="1650" b="1" dirty="0">
+                <a:solidFill>
+                  <a:srgbClr val="B45309"/>
+                </a:solidFill>
+              </a:rPr>
+              <a:t>Evidence as a byproduct: </a:t>
+            </a:r>
+            <a:r>
+              <a:rPr lang="en-US" sz="1650" dirty="0">
+                <a:solidFill>
+                  <a:schemeClr val="tx2"/>
+                </a:solidFill>
+              </a:rPr>
+              <a:t>the same records that run the lifecycle answer the auditor's question — does every account belong to a current person with a current reason?</a:t>
+            </a:r>
+            <a:endParaRPr lang="en-US" sz="1650" dirty="0"/>
+          </a:p>
+        </p:txBody>
+      </p:sp>
+      <p:sp>
+        <p:nvSpPr>
+          <p:cNvPr id="26" name="Sources"/>
+          <p:cNvSpPr txBox="1"/>
+          <p:nvPr/>
+        </p:nvSpPr>
+        <p:spPr>
+          <a:xfrm>
+            <a:off x="548640" y="6053328"/>
+            <a:ext cx="10424160" cy="292608"/>
+          </a:xfrm>
+          <a:prstGeom prst="rect">
+            <a:avLst/>
+          </a:prstGeom>
+          <a:noFill/>
+          <a:ln/>
+        </p:spPr>
+        <p:txBody>
+          <a:bodyPr wrap="square" lIns="0" tIns="0" rIns="0" bIns="0" rtlCol="0" anchor="t"/>
+          <a:lstStyle/>
+          <a:p>
+            <a:pPr marL="0" indent="0">
+              <a:buNone/>
+            </a:pPr>
+            <a:r>
+              <a:rPr lang="en-US" sz="1000" i="1" dirty="0">
+                <a:solidFill>
+                  <a:srgbClr val="64748B"/>
+                </a:solidFill>
+              </a:rPr>
+              <a:t>Sources: Microsoft Learn — dynamic membership, entitlement management, log retention; NIST SP 800-53 AC-2, CA-7. Book 03, Chapters 10–11.</a:t>
+            </a:r>
+            <a:endParaRPr lang="en-US" sz="1000" dirty="0"/>
+          </a:p>
+        </p:txBody>
+      </p:sp>
+      <p:sp>
+        <p:nvSpPr>
+          <p:cNvPr id="27" name="Slide Number Placeholder 0"/>
+          <p:cNvSpPr>
+            <a:spLocks noGrp="1"/>
+          </p:cNvSpPr>
+          <p:nvPr>
+            <p:ph type="sldNum" sz="quarter" idx="4294967295"/>
+          </p:nvPr>
+        </p:nvSpPr>
+        <p:spPr>
+          <a:xfrm>
+            <a:off x="11155680" y="6400800"/>
+            <a:ext cx="457200" cy="274320"/>
+          </a:xfrm>
+          <a:prstGeom prst="rect">
+            <a:avLst/>
+          </a:prstGeom>
+          <a:extLst>
+            <a:ext uri="{C572A759-6A51-4108-AA02-DFA0A04FC94B}">
+              <ma14:wrappingTextBoxFlag xmlns:ma14="http://schemas.microsoft.com/office/mac/drawingml/2011/main" xmlns="" val="0"/>
+            </a:ext>
+          </a:extLst>
+        </p:spPr>
+        <p:txBody>
+          <a:bodyPr/>
+          <a:lstStyle>
+            <a:lvl1pPr>
+              <a:defRPr sz="1000">
+                <a:solidFill>
+                  <a:schemeClr val="accent5"/>
+                </a:solidFill>
+              </a:defRPr>
+            </a:lvl1pPr>
+          </a:lstStyle>
+          <a:p>
+            <a:pPr algn="r"/>
+            <a:fld id="{F7021451-1387-4CA6-816F-3879F97B5CBC}" type="slidenum">
+              <a:rPr lang="en-US" b="0"/>
+              <a:t>10</a:t>
+            </a:fld>
+            <a:endParaRPr lang="en-US"/>
+          </a:p>
+        </p:txBody>
+      </p:sp>
+      <p:pic>
+        <p:nvPicPr>
+          <p:cNvPr id="28" name="Narration" descr="Narration for this slide; captions available">
+            <a:hlinkClick r:id="" action="ppaction://media"/>
+            <a:extLst>
+              <a:ext uri="{FF2B5EF4-FFF2-40B4-BE49-F238E27FC236}">
+                <a16:creationId xmlns:a16="http://schemas.microsoft.com/office/drawing/2014/main" id="{A27B41F9-40CD-61E5-D70B-03C5809A4E19}"/>
+              </a:ext>
+            </a:extLst>
+          </p:cNvPr>
+          <p:cNvPicPr>
+            <a:picLocks noChangeAspect="1"/>
+          </p:cNvPicPr>
+          <p:nvPr>
+            <a:audioFile r:link="rId2"/>
+            <p:extLst>
+              <p:ext uri="{DAA4B4D4-6D71-4841-9C94-3DE7FCFB9230}">
+                <p14:media xmlns:p14="http://schemas.microsoft.com/office/powerpoint/2010/main" r:embed="rId1">
+                  <p14:extLst>
+                    <p:ext uri="{3AFAAA56-56D3-431D-BCD4-E75A35582382}">
+                      <p173:tracksInfo xmlns:p173="http://schemas.microsoft.com/office/powerpoint/2017/3/main" displayLoc="slide">
+                        <p173:trackLst>
+                          <p173:track id="{04F16061-B89F-4D6C-AB66-A10695C024DF}" label="English (captions)" lang="en-US" r:embed="rId7"/>
+                        </p173:trackLst>
+                      </p173:tracksInfo>
+                    </p:ext>
+                  </p14:extLst>
+                </p14:media>
+              </p:ext>
+            </p:extLst>
+          </p:nvPr>
+        </p:nvPicPr>
+        <p:blipFill>
+          <a:blip r:embed="rId6"/>
+          <a:stretch>
+            <a:fillRect/>
+          </a:stretch>
+        </p:blipFill>
+        <p:spPr>
+          <a:xfrm>
+            <a:off x="12446000" y="127000"/>
+            <a:ext cx="304800" cy="304800"/>
+          </a:xfrm>
+          <a:prstGeom prst="rect">
+            <a:avLst/>
+          </a:prstGeom>
+        </p:spPr>
+      </p:pic>
+    </p:spTree>
+  </p:cSld>
+  <p:clrMapOvr>
+    <a:masterClrMapping/>
+  </p:clrMapOvr>
+  <mc:AlternateContent xmlns:mc="http://schemas.openxmlformats.org/markup-compatibility/2006">
+    <mc:Choice xmlns:p14="http://schemas.microsoft.com/office/powerpoint/2010/main" Requires="p14">
+      <p:transition spd="slow" p14:dur="2000" advTm="59490"/>
+    </mc:Choice>
+    <mc:Fallback>
+      <p:transition spd="slow" advTm="59490"/>
+    </mc:Fallback>
+  </mc:AlternateContent>
+  <p:timing>
+    <p:tnLst>
+      <p:par>
+        <p:cTn id="1" dur="indefinite" restart="never" nodeType="tmRoot">
+          <p:childTnLst>
+            <p:seq concurrent="1" nextAc="seek">
+              <p:cTn id="2" dur="indefinite" nodeType="mainSeq">
+                <p:childTnLst>
+                  <p:par>
+                    <p:cTn id="3" fill="hold">
+                      <p:stCondLst>
+                        <p:cond delay="indefinite"/>
+                        <p:cond evt="onBegin" delay="0">
+                          <p:tn val="2"/>
+                        </p:cond>
+                      </p:stCondLst>
+                      <p:childTnLst>
+                        <p:par>
+                          <p:cTn id="4" fill="hold">
+                            <p:stCondLst>
+                              <p:cond delay="0"/>
+                            </p:stCondLst>
+                            <p:childTnLst>
+                              <p:par>
+                                <p:cTn id="5" presetID="1" presetClass="mediacall" presetSubtype="0" fill="hold" nodeType="withEffect">
+                                  <p:stCondLst>
+                                    <p:cond delay="0"/>
+                                  </p:stCondLst>
+                                  <p:childTnLst>
+                                    <p:cmd type="call" cmd="playFrom(0.0)">
+                                      <p:cBhvr>
+                                        <p:cTn id="6" dur="55488" fill="hold"/>
+                                        <p:tgtEl>
+                                          <p:spTgt spid="28"/>
+                                        </p:tgtEl>
+                                      </p:cBhvr>
+                                    </p:cmd>
+                                  </p:childTnLst>
+                                </p:cTn>
+                              </p:par>
+                            </p:childTnLst>
+                          </p:cTn>
+                        </p:par>
+                      </p:childTnLst>
+                    </p:cTn>
+                  </p:par>
+                </p:childTnLst>
+              </p:cTn>
+              <p:prevCondLst>
+                <p:cond evt="onPrev" delay="0">
+                  <p:tgtEl>
+                    <p:sldTgt/>
+                  </p:tgtEl>
+                </p:cond>
+              </p:prevCondLst>
+              <p:nextCondLst>
+                <p:cond evt="onNext" delay="0">
+                  <p:tgtEl>
+                    <p:sldTgt/>
+                  </p:tgtEl>
+                </p:cond>
+              </p:nextCondLst>
+            </p:seq>
+          </p:childTnLst>
+        </p:cTn>
+      </p:par>
+    </p:tnLst>
+  </p:timing>
+</p:sld>
+</file>
+
+<file path=ppt/slides/slide11.xml><?xml version="1.0" encoding="utf-8"?>
+<p:sld xmlns:a="http://schemas.openxmlformats.org/drawingml/2006/main" xmlns:r="http://schemas.openxmlformats.org/officeDocument/2006/relationships" xmlns:p="http://schemas.openxmlformats.org/presentationml/2006/main">
+  <p:cSld name="Slide 11">
+    <p:spTree>
+      <p:nvGrpSpPr>
+        <p:cNvPr id="1" name=""/>
+        <p:cNvGrpSpPr/>
+        <p:nvPr/>
+      </p:nvGrpSpPr>
+      <p:grpSpPr>
+        <a:xfrm>
+          <a:off x="0" y="0"/>
+          <a:ext cx="0" cy="0"/>
+          <a:chOff x="0" y="0"/>
+          <a:chExt cx="0" cy="0"/>
+        </a:xfrm>
+      </p:grpSpPr>
+      <p:sp>
+        <p:nvSpPr>
+          <p:cNvPr id="2" name="Text 0"/>
+          <p:cNvSpPr>
+            <a:spLocks noGrp="1"/>
+          </p:cNvSpPr>
+          <p:nvPr>
+            <p:ph type="title" idx="100" hasCustomPrompt="1"/>
+          </p:nvPr>
+        </p:nvSpPr>
+        <p:spPr>
+          <a:xfrm>
+            <a:off x="548640" y="457200"/>
+            <a:ext cx="11064240" cy="777240"/>
+          </a:xfrm>
+          <a:prstGeom prst="rect">
+            <a:avLst/>
+          </a:prstGeom>
+          <a:noFill/>
+          <a:ln/>
+        </p:spPr>
+        <p:txBody>
+          <a:bodyPr wrap="square" lIns="0" tIns="0" rIns="0" bIns="0" rtlCol="0" anchor="ctr"/>
+          <a:lstStyle/>
+          <a:p>
+            <a:pPr marL="0" indent="0" algn="ctr">
+              <a:buNone/>
+            </a:pPr>
+            <a:r>
+              <a:rPr lang="en-US" sz="3000" b="1" dirty="0">
+                <a:solidFill>
+                  <a:schemeClr val="tx1"/>
+                </a:solidFill>
+                <a:latin typeface="Cambria" pitchFamily="34" charset="0"/>
+                <a:ea typeface="Cambria" pitchFamily="34" charset="-122"/>
+                <a:cs typeface="Cambria" pitchFamily="34" charset="-120"/>
+              </a:rPr>
+              <a:t>Seven phases, each gate the next phase's precondition</a:t>
+            </a:r>
+            <a:endParaRPr lang="en-US" sz="3000" dirty="0"/>
+          </a:p>
+        </p:txBody>
+      </p:sp>
+      <p:sp>
+        <p:nvSpPr>
+          <p:cNvPr id="3" name="Tag How">
+            <a:extLst>
+              <a:ext uri="{C183D7F6-B498-43B3-948B-1728B52AA6E4}">
+                <adec:decorative xmlns:adec="http://schemas.microsoft.com/office/drawing/2017/decorative" val="1"/>
+              </a:ext>
+            </a:extLst>
+          </p:cNvPr>
+          <p:cNvSpPr/>
+          <p:nvPr/>
+        </p:nvSpPr>
+        <p:spPr>
+          <a:xfrm>
+            <a:off x="548640" y="109728"/>
+            <a:ext cx="868680" cy="292608"/>
+          </a:xfrm>
+          <a:prstGeom prst="roundRect">
+            <a:avLst>
+              <a:gd name="adj" fmla="val 18750"/>
+            </a:avLst>
+          </a:prstGeom>
+          <a:solidFill>
+            <a:srgbClr val="B45309"/>
+          </a:solidFill>
+          <a:ln w="12700">
+            <a:solidFill>
+              <a:srgbClr val="B45309"/>
+            </a:solidFill>
+            <a:prstDash val="solid"/>
+          </a:ln>
+        </p:spPr>
+      </p:sp>
+      <p:sp>
+        <p:nvSpPr>
+          <p:cNvPr id="4" name="Tag How text"/>
+          <p:cNvSpPr txBox="1"/>
+          <p:nvPr/>
+        </p:nvSpPr>
+        <p:spPr>
+          <a:xfrm>
+            <a:off x="548640" y="109728"/>
+            <a:ext cx="868680" cy="292608"/>
+          </a:xfrm>
+          <a:prstGeom prst="rect">
+            <a:avLst/>
+          </a:prstGeom>
+          <a:noFill/>
+          <a:ln/>
+        </p:spPr>
+        <p:txBody>
+          <a:bodyPr wrap="square" lIns="0" tIns="0" rIns="0" bIns="0" rtlCol="0" anchor="ctr"/>
+          <a:lstStyle/>
+          <a:p>
+            <a:pPr marL="0" indent="0" algn="ctr">
+              <a:buNone/>
+            </a:pPr>
+            <a:r>
+              <a:rPr lang="en-US" sz="1100" b="1" kern="0" spc="100" dirty="0">
+                <a:solidFill>
+                  <a:srgbClr val="FFFFFF"/>
+                </a:solidFill>
+              </a:rPr>
+              <a:t>HOW</a:t>
+            </a:r>
+            <a:endParaRPr lang="en-US" sz="1100" dirty="0"/>
+          </a:p>
+        </p:txBody>
+      </p:sp>
+      <p:sp>
+        <p:nvSpPr>
+          <p:cNvPr id="5" name="Phase 0">
+            <a:extLst>
+              <a:ext uri="{C183D7F6-B498-43B3-948B-1728B52AA6E4}">
+                <adec:decorative xmlns:adec="http://schemas.microsoft.com/office/drawing/2017/decorative" val="1"/>
+              </a:ext>
+            </a:extLst>
+          </p:cNvPr>
+          <p:cNvSpPr/>
+          <p:nvPr/>
+        </p:nvSpPr>
+        <p:spPr>
+          <a:xfrm>
+            <a:off x="548640" y="1508760"/>
             <a:ext cx="1463040" cy="1463040"/>
           </a:xfrm>
           <a:prstGeom prst="roundRect">
@@ -2920,13 +3814,13 @@
       </p:sp>
       <p:sp>
         <p:nvSpPr>
-          <p:cNvPr id="14" name="Phase 4 text"/>
+          <p:cNvPr id="6" name="Phase 0 text"/>
           <p:cNvSpPr txBox="1"/>
           <p:nvPr/>
         </p:nvSpPr>
         <p:spPr>
           <a:xfrm>
-            <a:off x="7059168" y="1572768"/>
+            <a:off x="658368" y="1572768"/>
             <a:ext cx="1280160" cy="1325880"/>
           </a:xfrm>
           <a:prstGeom prst="rect">
@@ -2951,7 +3845,7 @@
                 <a:ea typeface="Cambria" pitchFamily="34" charset="-122"/>
                 <a:cs typeface="Cambria" pitchFamily="34" charset="-120"/>
               </a:rPr>
-              <a:t>4</a:t>
+              <a:t>0</a:t>
             </a:r>
             <a:endParaRPr lang="en-US" sz="1400" dirty="0"/>
           </a:p>
@@ -2965,7 +3859,7 @@
                   <a:schemeClr val="tx2"/>
                 </a:solidFill>
               </a:rPr>
-              <a:t>Lifecycle and access</a:t>
+              <a:t>Align</a:t>
             </a:r>
             <a:endParaRPr lang="en-US" sz="1400" dirty="0"/>
           </a:p>
@@ -2973,7 +3867,7 @@
       </p:sp>
       <p:sp>
         <p:nvSpPr>
-          <p:cNvPr id="15" name="Phase 5">
+          <p:cNvPr id="7" name="Phase 1">
             <a:extLst>
               <a:ext uri="{C183D7F6-B498-43B3-948B-1728B52AA6E4}">
                 <adec:decorative xmlns:adec="http://schemas.microsoft.com/office/drawing/2017/decorative" val="1"/>
@@ -2985,7 +3879,7 @@
         </p:nvSpPr>
         <p:spPr>
           <a:xfrm>
-            <a:off x="8549640" y="1508760"/>
+            <a:off x="2148840" y="1508760"/>
             <a:ext cx="1463040" cy="1463040"/>
           </a:xfrm>
           <a:prstGeom prst="roundRect">
@@ -3013,13 +3907,13 @@
       </p:sp>
       <p:sp>
         <p:nvSpPr>
-          <p:cNvPr id="16" name="Phase 5 text"/>
+          <p:cNvPr id="8" name="Phase 1 text"/>
           <p:cNvSpPr txBox="1"/>
           <p:nvPr/>
         </p:nvSpPr>
         <p:spPr>
           <a:xfrm>
-            <a:off x="8659368" y="1572768"/>
+            <a:off x="2258568" y="1572768"/>
             <a:ext cx="1280160" cy="1325880"/>
           </a:xfrm>
           <a:prstGeom prst="rect">
@@ -3044,7 +3938,7 @@
                 <a:ea typeface="Cambria" pitchFamily="34" charset="-122"/>
                 <a:cs typeface="Cambria" pitchFamily="34" charset="-120"/>
               </a:rPr>
-              <a:t>5</a:t>
+              <a:t>1</a:t>
             </a:r>
             <a:endParaRPr lang="en-US" sz="1400" dirty="0"/>
           </a:p>
@@ -3058,7 +3952,7 @@
                   <a:schemeClr val="tx2"/>
                 </a:solidFill>
               </a:rPr>
-              <a:t>Cutover by population</a:t>
+              <a:t>Authority and schema</a:t>
             </a:r>
             <a:endParaRPr lang="en-US" sz="1400" dirty="0"/>
           </a:p>
@@ -3066,7 +3960,7 @@
       </p:sp>
       <p:sp>
         <p:nvSpPr>
-          <p:cNvPr id="17" name="Phase 6">
+          <p:cNvPr id="9" name="Phase 2">
             <a:extLst>
               <a:ext uri="{C183D7F6-B498-43B3-948B-1728B52AA6E4}">
                 <adec:decorative xmlns:adec="http://schemas.microsoft.com/office/drawing/2017/decorative" val="1"/>
@@ -3078,7 +3972,7 @@
         </p:nvSpPr>
         <p:spPr>
           <a:xfrm>
-            <a:off x="10149840" y="1508760"/>
+            <a:off x="3749040" y="1508760"/>
             <a:ext cx="1463040" cy="1463040"/>
           </a:xfrm>
           <a:prstGeom prst="roundRect">
@@ -3106,6 +4000,378 @@
       </p:sp>
       <p:sp>
         <p:nvSpPr>
+          <p:cNvPr id="10" name="Phase 2 text"/>
+          <p:cNvSpPr txBox="1"/>
+          <p:nvPr/>
+        </p:nvSpPr>
+        <p:spPr>
+          <a:xfrm>
+            <a:off x="3858768" y="1572768"/>
+            <a:ext cx="1280160" cy="1325880"/>
+          </a:xfrm>
+          <a:prstGeom prst="rect">
+            <a:avLst/>
+          </a:prstGeom>
+          <a:noFill/>
+          <a:ln/>
+        </p:spPr>
+        <p:txBody>
+          <a:bodyPr wrap="square" lIns="0" tIns="0" rIns="0" bIns="0" rtlCol="0" anchor="t"/>
+          <a:lstStyle/>
+          <a:p>
+            <a:pPr marL="0" indent="0" algn="ctr">
+              <a:buNone/>
+            </a:pPr>
+            <a:r>
+              <a:rPr lang="en-US" sz="2600" b="1" dirty="0">
+                <a:solidFill>
+                  <a:srgbClr val="1F2A44"/>
+                </a:solidFill>
+                <a:latin typeface="Cambria" pitchFamily="34" charset="0"/>
+                <a:ea typeface="Cambria" pitchFamily="34" charset="-122"/>
+                <a:cs typeface="Cambria" pitchFamily="34" charset="-120"/>
+              </a:rPr>
+              <a:t>2</a:t>
+            </a:r>
+            <a:endParaRPr lang="en-US" sz="1400" dirty="0"/>
+          </a:p>
+          <a:p>
+            <a:pPr marL="0" indent="0" algn="ctr">
+              <a:buNone/>
+            </a:pPr>
+            <a:r>
+              <a:rPr lang="en-US" sz="1350" b="1" dirty="0">
+                <a:solidFill>
+                  <a:schemeClr val="tx2"/>
+                </a:solidFill>
+              </a:rPr>
+              <a:t>Build and test</a:t>
+            </a:r>
+            <a:endParaRPr lang="en-US" sz="1400" dirty="0"/>
+          </a:p>
+        </p:txBody>
+      </p:sp>
+      <p:sp>
+        <p:nvSpPr>
+          <p:cNvPr id="11" name="Phase 3">
+            <a:extLst>
+              <a:ext uri="{C183D7F6-B498-43B3-948B-1728B52AA6E4}">
+                <adec:decorative xmlns:adec="http://schemas.microsoft.com/office/drawing/2017/decorative" val="1"/>
+              </a:ext>
+            </a:extLst>
+          </p:cNvPr>
+          <p:cNvSpPr/>
+          <p:nvPr/>
+        </p:nvSpPr>
+        <p:spPr>
+          <a:xfrm>
+            <a:off x="5349240" y="1508760"/>
+            <a:ext cx="1463040" cy="1463040"/>
+          </a:xfrm>
+          <a:prstGeom prst="roundRect">
+            <a:avLst>
+              <a:gd name="adj" fmla="val 5000"/>
+            </a:avLst>
+          </a:prstGeom>
+          <a:solidFill>
+            <a:srgbClr val="DCEFEC"/>
+          </a:solidFill>
+          <a:ln w="12700">
+            <a:solidFill>
+              <a:srgbClr val="DCEFEC"/>
+            </a:solidFill>
+            <a:prstDash val="solid"/>
+          </a:ln>
+          <a:effectLst>
+            <a:outerShdw blurRad="76200" dist="25400" dir="5400000" algn="bl" rotWithShape="0">
+              <a:srgbClr val="64748B">
+                <a:alpha val="22000"/>
+              </a:srgbClr>
+            </a:outerShdw>
+          </a:effectLst>
+        </p:spPr>
+      </p:sp>
+      <p:sp>
+        <p:nvSpPr>
+          <p:cNvPr id="12" name="Phase 3 text"/>
+          <p:cNvSpPr txBox="1"/>
+          <p:nvPr/>
+        </p:nvSpPr>
+        <p:spPr>
+          <a:xfrm>
+            <a:off x="5458968" y="1572768"/>
+            <a:ext cx="1280160" cy="1325880"/>
+          </a:xfrm>
+          <a:prstGeom prst="rect">
+            <a:avLst/>
+          </a:prstGeom>
+          <a:noFill/>
+          <a:ln/>
+        </p:spPr>
+        <p:txBody>
+          <a:bodyPr wrap="square" lIns="0" tIns="0" rIns="0" bIns="0" rtlCol="0" anchor="t"/>
+          <a:lstStyle/>
+          <a:p>
+            <a:pPr marL="0" indent="0" algn="ctr">
+              <a:buNone/>
+            </a:pPr>
+            <a:r>
+              <a:rPr lang="en-US" sz="2600" b="1" dirty="0">
+                <a:solidFill>
+                  <a:srgbClr val="0F766E"/>
+                </a:solidFill>
+                <a:latin typeface="Cambria" pitchFamily="34" charset="0"/>
+                <a:ea typeface="Cambria" pitchFamily="34" charset="-122"/>
+                <a:cs typeface="Cambria" pitchFamily="34" charset="-120"/>
+              </a:rPr>
+              <a:t>3</a:t>
+            </a:r>
+            <a:endParaRPr lang="en-US" sz="1400" dirty="0"/>
+          </a:p>
+          <a:p>
+            <a:pPr marL="0" indent="0" algn="ctr">
+              <a:buNone/>
+            </a:pPr>
+            <a:r>
+              <a:rPr lang="en-US" sz="1350" b="1" dirty="0">
+                <a:solidFill>
+                  <a:schemeClr val="tx2"/>
+                </a:solidFill>
+              </a:rPr>
+              <a:t>Pilot</a:t>
+            </a:r>
+            <a:endParaRPr lang="en-US" sz="1400" dirty="0"/>
+          </a:p>
+        </p:txBody>
+      </p:sp>
+      <p:sp>
+        <p:nvSpPr>
+          <p:cNvPr id="13" name="Phase 4">
+            <a:extLst>
+              <a:ext uri="{C183D7F6-B498-43B3-948B-1728B52AA6E4}">
+                <adec:decorative xmlns:adec="http://schemas.microsoft.com/office/drawing/2017/decorative" val="1"/>
+              </a:ext>
+            </a:extLst>
+          </p:cNvPr>
+          <p:cNvSpPr/>
+          <p:nvPr/>
+        </p:nvSpPr>
+        <p:spPr>
+          <a:xfrm>
+            <a:off x="6949440" y="1508760"/>
+            <a:ext cx="1463040" cy="1463040"/>
+          </a:xfrm>
+          <a:prstGeom prst="roundRect">
+            <a:avLst>
+              <a:gd name="adj" fmla="val 5000"/>
+            </a:avLst>
+          </a:prstGeom>
+          <a:solidFill>
+            <a:srgbClr val="E4EAF4"/>
+          </a:solidFill>
+          <a:ln w="12700">
+            <a:solidFill>
+              <a:srgbClr val="E4EAF4"/>
+            </a:solidFill>
+            <a:prstDash val="solid"/>
+          </a:ln>
+          <a:effectLst>
+            <a:outerShdw blurRad="76200" dist="25400" dir="5400000" algn="bl" rotWithShape="0">
+              <a:srgbClr val="64748B">
+                <a:alpha val="22000"/>
+              </a:srgbClr>
+            </a:outerShdw>
+          </a:effectLst>
+        </p:spPr>
+      </p:sp>
+      <p:sp>
+        <p:nvSpPr>
+          <p:cNvPr id="14" name="Phase 4 text"/>
+          <p:cNvSpPr txBox="1"/>
+          <p:nvPr/>
+        </p:nvSpPr>
+        <p:spPr>
+          <a:xfrm>
+            <a:off x="7059168" y="1572768"/>
+            <a:ext cx="1280160" cy="1325880"/>
+          </a:xfrm>
+          <a:prstGeom prst="rect">
+            <a:avLst/>
+          </a:prstGeom>
+          <a:noFill/>
+          <a:ln/>
+        </p:spPr>
+        <p:txBody>
+          <a:bodyPr wrap="square" lIns="0" tIns="0" rIns="0" bIns="0" rtlCol="0" anchor="t"/>
+          <a:lstStyle/>
+          <a:p>
+            <a:pPr marL="0" indent="0" algn="ctr">
+              <a:buNone/>
+            </a:pPr>
+            <a:r>
+              <a:rPr lang="en-US" sz="2600" b="1" dirty="0">
+                <a:solidFill>
+                  <a:srgbClr val="1F2A44"/>
+                </a:solidFill>
+                <a:latin typeface="Cambria" pitchFamily="34" charset="0"/>
+                <a:ea typeface="Cambria" pitchFamily="34" charset="-122"/>
+                <a:cs typeface="Cambria" pitchFamily="34" charset="-120"/>
+              </a:rPr>
+              <a:t>4</a:t>
+            </a:r>
+            <a:endParaRPr lang="en-US" sz="1400" dirty="0"/>
+          </a:p>
+          <a:p>
+            <a:pPr marL="0" indent="0" algn="ctr">
+              <a:buNone/>
+            </a:pPr>
+            <a:r>
+              <a:rPr lang="en-US" sz="1350" b="1" dirty="0">
+                <a:solidFill>
+                  <a:schemeClr val="tx2"/>
+                </a:solidFill>
+              </a:rPr>
+              <a:t>Lifecycle and access</a:t>
+            </a:r>
+            <a:endParaRPr lang="en-US" sz="1400" dirty="0"/>
+          </a:p>
+        </p:txBody>
+      </p:sp>
+      <p:sp>
+        <p:nvSpPr>
+          <p:cNvPr id="15" name="Phase 5">
+            <a:extLst>
+              <a:ext uri="{C183D7F6-B498-43B3-948B-1728B52AA6E4}">
+                <adec:decorative xmlns:adec="http://schemas.microsoft.com/office/drawing/2017/decorative" val="1"/>
+              </a:ext>
+            </a:extLst>
+          </p:cNvPr>
+          <p:cNvSpPr/>
+          <p:nvPr/>
+        </p:nvSpPr>
+        <p:spPr>
+          <a:xfrm>
+            <a:off x="8549640" y="1508760"/>
+            <a:ext cx="1463040" cy="1463040"/>
+          </a:xfrm>
+          <a:prstGeom prst="roundRect">
+            <a:avLst>
+              <a:gd name="adj" fmla="val 5000"/>
+            </a:avLst>
+          </a:prstGeom>
+          <a:solidFill>
+            <a:srgbClr val="DCEFEC"/>
+          </a:solidFill>
+          <a:ln w="12700">
+            <a:solidFill>
+              <a:srgbClr val="DCEFEC"/>
+            </a:solidFill>
+            <a:prstDash val="solid"/>
+          </a:ln>
+          <a:effectLst>
+            <a:outerShdw blurRad="76200" dist="25400" dir="5400000" algn="bl" rotWithShape="0">
+              <a:srgbClr val="64748B">
+                <a:alpha val="22000"/>
+              </a:srgbClr>
+            </a:outerShdw>
+          </a:effectLst>
+        </p:spPr>
+      </p:sp>
+      <p:sp>
+        <p:nvSpPr>
+          <p:cNvPr id="16" name="Phase 5 text"/>
+          <p:cNvSpPr txBox="1"/>
+          <p:nvPr/>
+        </p:nvSpPr>
+        <p:spPr>
+          <a:xfrm>
+            <a:off x="8659368" y="1572768"/>
+            <a:ext cx="1280160" cy="1325880"/>
+          </a:xfrm>
+          <a:prstGeom prst="rect">
+            <a:avLst/>
+          </a:prstGeom>
+          <a:noFill/>
+          <a:ln/>
+        </p:spPr>
+        <p:txBody>
+          <a:bodyPr wrap="square" lIns="0" tIns="0" rIns="0" bIns="0" rtlCol="0" anchor="t"/>
+          <a:lstStyle/>
+          <a:p>
+            <a:pPr marL="0" indent="0" algn="ctr">
+              <a:buNone/>
+            </a:pPr>
+            <a:r>
+              <a:rPr lang="en-US" sz="2600" b="1" dirty="0">
+                <a:solidFill>
+                  <a:srgbClr val="0F766E"/>
+                </a:solidFill>
+                <a:latin typeface="Cambria" pitchFamily="34" charset="0"/>
+                <a:ea typeface="Cambria" pitchFamily="34" charset="-122"/>
+                <a:cs typeface="Cambria" pitchFamily="34" charset="-120"/>
+              </a:rPr>
+              <a:t>5</a:t>
+            </a:r>
+            <a:endParaRPr lang="en-US" sz="1400" dirty="0"/>
+          </a:p>
+          <a:p>
+            <a:pPr marL="0" indent="0" algn="ctr">
+              <a:buNone/>
+            </a:pPr>
+            <a:r>
+              <a:rPr lang="en-US" sz="1350" b="1" dirty="0">
+                <a:solidFill>
+                  <a:schemeClr val="tx2"/>
+                </a:solidFill>
+              </a:rPr>
+              <a:t>Cutover by population</a:t>
+            </a:r>
+            <a:endParaRPr lang="en-US" sz="1400" dirty="0"/>
+          </a:p>
+        </p:txBody>
+      </p:sp>
+      <p:sp>
+        <p:nvSpPr>
+          <p:cNvPr id="17" name="Phase 6">
+            <a:extLst>
+              <a:ext uri="{C183D7F6-B498-43B3-948B-1728B52AA6E4}">
+                <adec:decorative xmlns:adec="http://schemas.microsoft.com/office/drawing/2017/decorative" val="1"/>
+              </a:ext>
+            </a:extLst>
+          </p:cNvPr>
+          <p:cNvSpPr/>
+          <p:nvPr/>
+        </p:nvSpPr>
+        <p:spPr>
+          <a:xfrm>
+            <a:off x="10149840" y="1508760"/>
+            <a:ext cx="1463040" cy="1463040"/>
+          </a:xfrm>
+          <a:prstGeom prst="roundRect">
+            <a:avLst>
+              <a:gd name="adj" fmla="val 5000"/>
+            </a:avLst>
+          </a:prstGeom>
+          <a:solidFill>
+            <a:srgbClr val="E4EAF4"/>
+          </a:solidFill>
+          <a:ln w="12700">
+            <a:solidFill>
+              <a:srgbClr val="E4EAF4"/>
+            </a:solidFill>
+            <a:prstDash val="solid"/>
+          </a:ln>
+          <a:effectLst>
+            <a:outerShdw blurRad="76200" dist="25400" dir="5400000" algn="bl" rotWithShape="0">
+              <a:srgbClr val="64748B">
+                <a:alpha val="22000"/>
+              </a:srgbClr>
+            </a:outerShdw>
+          </a:effectLst>
+        </p:spPr>
+      </p:sp>
+      <p:sp>
+        <p:nvSpPr>
           <p:cNvPr id="18" name="Phase 6 text"/>
           <p:cNvSpPr txBox="1"/>
           <p:nvPr/>
@@ -3471,7 +4737,7 @@
             <a:pPr algn="r"/>
             <a:fld id="{F7021451-1387-4CA6-816F-3879F97B5CBC}" type="slidenum">
               <a:rPr lang="en-US" b="0"/>
-              <a:t>10</a:t>
+              <a:t>11</a:t>
             </a:fld>
             <a:endParaRPr lang="en-US"/>
           </a:p>
@@ -3483,7 +4749,7 @@
             <a:hlinkClick r:id="" action="ppaction://media"/>
             <a:extLst>
               <a:ext uri="{FF2B5EF4-FFF2-40B4-BE49-F238E27FC236}">
-                <a16:creationId xmlns:a16="http://schemas.microsoft.com/office/drawing/2014/main" id="{E1AE9745-F1C7-9634-50DD-A020B9A860AB}"/>
+                <a16:creationId xmlns:a16="http://schemas.microsoft.com/office/drawing/2014/main" id="{4ADA9195-5E19-AEEB-8145-65D0FB347EFF}"/>
               </a:ext>
             </a:extLst>
           </p:cNvPr>
@@ -3499,7 +4765,7 @@
                     <p:ext uri="{3AFAAA56-56D3-431D-BCD4-E75A35582382}">
                       <p173:tracksInfo xmlns:p173="http://schemas.microsoft.com/office/powerpoint/2017/3/main" displayLoc="slide">
                         <p173:trackLst>
-                          <p173:track id="{DDE4FF36-96FB-4C6E-AEA7-75B639C956D3}" label="English (captions)" lang="en-US" r:embed="rId7"/>
+                          <p173:track id="{2BFA4845-ECBE-4E6B-8E87-79A5A2024EA6}" label="English (captions)" lang="en-US" r:embed="rId7"/>
                         </p173:trackLst>
                       </p173:tracksInfo>
                     </p:ext>
@@ -3609,9 +4875,9 @@
 </p:sld>
 </file>
 
-<file path=ppt/slides/slide11.xml><?xml version="1.0" encoding="utf-8"?>
+<file path=ppt/slides/slide12.xml><?xml version="1.0" encoding="utf-8"?>
 <p:sld xmlns:a="http://schemas.openxmlformats.org/drawingml/2006/main" xmlns:r="http://schemas.openxmlformats.org/officeDocument/2006/relationships" xmlns:p="http://schemas.openxmlformats.org/presentationml/2006/main">
-  <p:cSld name="Slide 11">
+  <p:cSld name="Slide 12">
     <p:spTree>
       <p:nvGrpSpPr>
         <p:cNvPr id="1" name=""/>
@@ -4321,7 +5587,7 @@
             <a:pPr algn="r"/>
             <a:fld id="{F7021451-1387-4CA6-816F-3879F97B5CBC}" type="slidenum">
               <a:rPr lang="en-US" b="0"/>
-              <a:t>11</a:t>
+              <a:t>12</a:t>
             </a:fld>
             <a:endParaRPr lang="en-US"/>
           </a:p>
@@ -4333,7 +5599,7 @@
             <a:hlinkClick r:id="" action="ppaction://media"/>
             <a:extLst>
               <a:ext uri="{FF2B5EF4-FFF2-40B4-BE49-F238E27FC236}">
-                <a16:creationId xmlns:a16="http://schemas.microsoft.com/office/drawing/2014/main" id="{57ADF4C7-3109-D1CC-6316-12A8389954CD}"/>
+                <a16:creationId xmlns:a16="http://schemas.microsoft.com/office/drawing/2014/main" id="{423EB30D-068F-DF32-2760-60415D6F997E}"/>
               </a:ext>
             </a:extLst>
           </p:cNvPr>
@@ -4349,7 +5615,7 @@
                     <p:ext uri="{3AFAAA56-56D3-431D-BCD4-E75A35582382}">
                       <p173:tracksInfo xmlns:p173="http://schemas.microsoft.com/office/powerpoint/2017/3/main" displayLoc="slide">
                         <p173:trackLst>
-                          <p173:track id="{1C0F2D3B-37C1-4343-B89F-8127C49E2193}" label="English (captions)" lang="en-US" r:embed="rId8"/>
+                          <p173:track id="{3D0ABEF0-CD98-46E8-BF5D-1A171146FEB8}" label="English (captions)" lang="en-US" r:embed="rId8"/>
                         </p173:trackLst>
                       </p173:tracksInfo>
                     </p:ext>
@@ -4513,7 +5779,7 @@
                 <a:ea typeface="Cambria" pitchFamily="34" charset="-122"/>
                 <a:cs typeface="Cambria" pitchFamily="34" charset="-120"/>
               </a:rPr>
-              <a:t>Identity is built by hand, and the mission is outgrowing it</a:t>
+              <a:t>Book 03 is the HR track: people, from their records</a:t>
             </a:r>
             <a:endParaRPr lang="en-US" sz="3000" dirty="0"/>
           </a:p>
@@ -4590,43 +5856,7 @@
       </p:sp>
       <p:sp>
         <p:nvSpPr>
-          <p:cNvPr id="5" name="Today head"/>
-          <p:cNvSpPr txBox="1"/>
-          <p:nvPr/>
-        </p:nvSpPr>
-        <p:spPr>
-          <a:xfrm>
-            <a:off x="548640" y="1417320"/>
-            <a:ext cx="5852160" cy="274320"/>
-          </a:xfrm>
-          <a:prstGeom prst="rect">
-            <a:avLst/>
-          </a:prstGeom>
-          <a:noFill/>
-          <a:ln/>
-        </p:spPr>
-        <p:txBody>
-          <a:bodyPr wrap="square" lIns="0" tIns="0" rIns="0" bIns="0" rtlCol="0" anchor="t"/>
-          <a:lstStyle/>
-          <a:p>
-            <a:pPr marL="0" indent="0">
-              <a:buNone/>
-            </a:pPr>
-            <a:r>
-              <a:rPr lang="en-US" sz="1200" b="1" dirty="0">
-                <a:solidFill>
-                  <a:srgbClr val="64748B"/>
-                </a:solidFill>
-              </a:rPr>
-              <a:t>TODAY: NOTHING CONNECTS HR TO IDENTITY</a:t>
-            </a:r>
-            <a:endParaRPr lang="en-US" sz="1200" dirty="0"/>
-          </a:p>
-        </p:txBody>
-      </p:sp>
-      <p:sp>
-        <p:nvSpPr>
-          <p:cNvPr id="6" name="Icon FaUserXmark">
+          <p:cNvPr id="5" name="Track col 1">
             <a:extLst>
               <a:ext uri="{C183D7F6-B498-43B3-948B-1728B52AA6E4}">
                 <adec:decorative xmlns:adec="http://schemas.microsoft.com/office/drawing/2017/decorative" val="1"/>
@@ -4638,345 +5868,12 @@
         </p:nvSpPr>
         <p:spPr>
           <a:xfrm>
-            <a:off x="548640" y="1828800"/>
-            <a:ext cx="566928" cy="566928"/>
-          </a:xfrm>
-          <a:prstGeom prst="ellipse">
-            <a:avLst/>
-          </a:prstGeom>
-          <a:solidFill>
-            <a:srgbClr val="B91C1C"/>
-          </a:solidFill>
-          <a:ln w="12700">
-            <a:solidFill>
-              <a:srgbClr val="B91C1C"/>
-            </a:solidFill>
-            <a:prstDash val="solid"/>
-          </a:ln>
-        </p:spPr>
-      </p:sp>
-      <p:pic>
-        <p:nvPicPr>
-          <p:cNvPr id="7" name="Image 0">
-            <a:extLst>
-              <a:ext uri="{C183D7F6-B498-43B3-948B-1728B52AA6E4}">
-                <adec:decorative xmlns:adec="http://schemas.microsoft.com/office/drawing/2017/decorative" val="1"/>
-              </a:ext>
-            </a:extLst>
-          </p:cNvPr>
-          <p:cNvPicPr>
-            <a:picLocks noChangeAspect="1"/>
-          </p:cNvPicPr>
-          <p:nvPr/>
-        </p:nvPicPr>
-        <p:blipFill>
-          <a:blip r:embed="rId5"/>
-          <a:stretch>
-            <a:fillRect/>
-          </a:stretch>
-        </p:blipFill>
-        <p:spPr>
-          <a:xfrm>
-            <a:off x="684703" y="1964863"/>
-            <a:ext cx="294803" cy="294803"/>
-          </a:xfrm>
-          <a:prstGeom prst="rect">
-            <a:avLst/>
-          </a:prstGeom>
-        </p:spPr>
-      </p:pic>
-      <p:sp>
-        <p:nvSpPr>
-          <p:cNvPr id="8" name="Today 1"/>
-          <p:cNvSpPr txBox="1"/>
-          <p:nvPr/>
-        </p:nvSpPr>
-        <p:spPr>
-          <a:xfrm>
-            <a:off x="1280160" y="1783080"/>
-            <a:ext cx="5120640" cy="932688"/>
-          </a:xfrm>
-          <a:prstGeom prst="rect">
-            <a:avLst/>
-          </a:prstGeom>
-          <a:noFill/>
-          <a:ln/>
-        </p:spPr>
-        <p:txBody>
-          <a:bodyPr wrap="square" lIns="0" tIns="0" rIns="0" bIns="0" rtlCol="0" anchor="t"/>
-          <a:lstStyle/>
-          <a:p>
-            <a:pPr marL="0" indent="0">
-              <a:buNone/>
-            </a:pPr>
-            <a:r>
-              <a:rPr lang="en-US" sz="1650" b="1" dirty="0">
-                <a:solidFill>
-                  <a:srgbClr val="B91C1C"/>
-                </a:solidFill>
-              </a:rPr>
-              <a:t>Access outlives the job</a:t>
-            </a:r>
-            <a:endParaRPr lang="en-US" sz="1400" dirty="0"/>
-          </a:p>
-          <a:p>
-            <a:pPr marL="0" indent="0">
-              <a:buNone/>
-            </a:pPr>
-            <a:r>
-              <a:rPr lang="en-US" sz="1400" dirty="0">
-                <a:solidFill>
-                  <a:schemeClr val="tx2"/>
-                </a:solidFill>
-              </a:rPr>
-              <a:t>Removal waits for a ticket — yet a PIV card that can't be collected must be terminated within 18 hours of notification.</a:t>
-            </a:r>
-            <a:endParaRPr lang="en-US" sz="1400" dirty="0"/>
-          </a:p>
-        </p:txBody>
-      </p:sp>
-      <p:sp>
-        <p:nvSpPr>
-          <p:cNvPr id="9" name="Icon FaAddressBook">
-            <a:extLst>
-              <a:ext uri="{C183D7F6-B498-43B3-948B-1728B52AA6E4}">
-                <adec:decorative xmlns:adec="http://schemas.microsoft.com/office/drawing/2017/decorative" val="1"/>
-              </a:ext>
-            </a:extLst>
-          </p:cNvPr>
-          <p:cNvSpPr/>
-          <p:nvPr/>
-        </p:nvSpPr>
-        <p:spPr>
-          <a:xfrm>
-            <a:off x="548640" y="2816352"/>
-            <a:ext cx="566928" cy="566928"/>
-          </a:xfrm>
-          <a:prstGeom prst="ellipse">
-            <a:avLst/>
-          </a:prstGeom>
-          <a:solidFill>
-            <a:srgbClr val="1F2A44"/>
-          </a:solidFill>
-          <a:ln w="12700">
-            <a:solidFill>
-              <a:srgbClr val="1F2A44"/>
-            </a:solidFill>
-            <a:prstDash val="solid"/>
-          </a:ln>
-        </p:spPr>
-      </p:sp>
-      <p:pic>
-        <p:nvPicPr>
-          <p:cNvPr id="10" name="Image 1">
-            <a:extLst>
-              <a:ext uri="{C183D7F6-B498-43B3-948B-1728B52AA6E4}">
-                <adec:decorative xmlns:adec="http://schemas.microsoft.com/office/drawing/2017/decorative" val="1"/>
-              </a:ext>
-            </a:extLst>
-          </p:cNvPr>
-          <p:cNvPicPr>
-            <a:picLocks noChangeAspect="1"/>
-          </p:cNvPicPr>
-          <p:nvPr/>
-        </p:nvPicPr>
-        <p:blipFill>
-          <a:blip r:embed="rId6"/>
-          <a:stretch>
-            <a:fillRect/>
-          </a:stretch>
-        </p:blipFill>
-        <p:spPr>
-          <a:xfrm>
-            <a:off x="684703" y="2952415"/>
-            <a:ext cx="294803" cy="294803"/>
-          </a:xfrm>
-          <a:prstGeom prst="rect">
-            <a:avLst/>
-          </a:prstGeom>
-        </p:spPr>
-      </p:pic>
-      <p:sp>
-        <p:nvSpPr>
-          <p:cNvPr id="11" name="Today 2"/>
-          <p:cNvSpPr txBox="1"/>
-          <p:nvPr/>
-        </p:nvSpPr>
-        <p:spPr>
-          <a:xfrm>
-            <a:off x="1280160" y="2770632"/>
-            <a:ext cx="5120640" cy="932688"/>
-          </a:xfrm>
-          <a:prstGeom prst="rect">
-            <a:avLst/>
-          </a:prstGeom>
-          <a:noFill/>
-          <a:ln/>
-        </p:spPr>
-        <p:txBody>
-          <a:bodyPr wrap="square" lIns="0" tIns="0" rIns="0" bIns="0" rtlCol="0" anchor="t"/>
-          <a:lstStyle/>
-          <a:p>
-            <a:pPr marL="0" indent="0">
-              <a:buNone/>
-            </a:pPr>
-            <a:r>
-              <a:rPr lang="en-US" sz="1650" b="1" dirty="0">
-                <a:solidFill>
-                  <a:srgbClr val="1F2A44"/>
-                </a:solidFill>
-              </a:rPr>
-              <a:t>Records we can't trust</a:t>
-            </a:r>
-            <a:endParaRPr lang="en-US" sz="1400" dirty="0"/>
-          </a:p>
-          <a:p>
-            <a:pPr marL="0" indent="0">
-              <a:buNone/>
-            </a:pPr>
-            <a:r>
-              <a:rPr lang="en-US" sz="1400" dirty="0">
-                <a:solidFill>
-                  <a:schemeClr val="tx2"/>
-                </a:solidFill>
-              </a:rPr>
-              <a:t>Phone book, managers and approval routing drift from HR.</a:t>
-            </a:r>
-            <a:endParaRPr lang="en-US" sz="1400" dirty="0"/>
-          </a:p>
-        </p:txBody>
-      </p:sp>
-      <p:sp>
-        <p:nvSpPr>
-          <p:cNvPr id="12" name="Icon FaUserClock">
-            <a:extLst>
-              <a:ext uri="{C183D7F6-B498-43B3-948B-1728B52AA6E4}">
-                <adec:decorative xmlns:adec="http://schemas.microsoft.com/office/drawing/2017/decorative" val="1"/>
-              </a:ext>
-            </a:extLst>
-          </p:cNvPr>
-          <p:cNvSpPr/>
-          <p:nvPr/>
-        </p:nvSpPr>
-        <p:spPr>
-          <a:xfrm>
-            <a:off x="548640" y="3803904"/>
-            <a:ext cx="566928" cy="566928"/>
-          </a:xfrm>
-          <a:prstGeom prst="ellipse">
-            <a:avLst/>
-          </a:prstGeom>
-          <a:solidFill>
-            <a:srgbClr val="0F766E"/>
-          </a:solidFill>
-          <a:ln w="12700">
-            <a:solidFill>
-              <a:srgbClr val="0F766E"/>
-            </a:solidFill>
-            <a:prstDash val="solid"/>
-          </a:ln>
-        </p:spPr>
-      </p:sp>
-      <p:pic>
-        <p:nvPicPr>
-          <p:cNvPr id="13" name="Image 2">
-            <a:extLst>
-              <a:ext uri="{C183D7F6-B498-43B3-948B-1728B52AA6E4}">
-                <adec:decorative xmlns:adec="http://schemas.microsoft.com/office/drawing/2017/decorative" val="1"/>
-              </a:ext>
-            </a:extLst>
-          </p:cNvPr>
-          <p:cNvPicPr>
-            <a:picLocks noChangeAspect="1"/>
-          </p:cNvPicPr>
-          <p:nvPr/>
-        </p:nvPicPr>
-        <p:blipFill>
-          <a:blip r:embed="rId7"/>
-          <a:stretch>
-            <a:fillRect/>
-          </a:stretch>
-        </p:blipFill>
-        <p:spPr>
-          <a:xfrm>
-            <a:off x="684703" y="3939967"/>
-            <a:ext cx="294803" cy="294803"/>
-          </a:xfrm>
-          <a:prstGeom prst="rect">
-            <a:avLst/>
-          </a:prstGeom>
-        </p:spPr>
-      </p:pic>
-      <p:sp>
-        <p:nvSpPr>
-          <p:cNvPr id="14" name="Today 3"/>
-          <p:cNvSpPr txBox="1"/>
-          <p:nvPr/>
-        </p:nvSpPr>
-        <p:spPr>
-          <a:xfrm>
-            <a:off x="1280160" y="3758184"/>
-            <a:ext cx="5120640" cy="932688"/>
-          </a:xfrm>
-          <a:prstGeom prst="rect">
-            <a:avLst/>
-          </a:prstGeom>
-          <a:noFill/>
-          <a:ln/>
-        </p:spPr>
-        <p:txBody>
-          <a:bodyPr wrap="square" lIns="0" tIns="0" rIns="0" bIns="0" rtlCol="0" anchor="t"/>
-          <a:lstStyle/>
-          <a:p>
-            <a:pPr marL="0" indent="0">
-              <a:buNone/>
-            </a:pPr>
-            <a:r>
-              <a:rPr lang="en-US" sz="1650" b="1" dirty="0">
-                <a:solidFill>
-                  <a:srgbClr val="0F766E"/>
-                </a:solidFill>
-              </a:rPr>
-              <a:t>Cost and delay</a:t>
-            </a:r>
-            <a:endParaRPr lang="en-US" sz="1400" dirty="0"/>
-          </a:p>
-          <a:p>
-            <a:pPr marL="0" indent="0">
-              <a:buNone/>
-            </a:pPr>
-            <a:r>
-              <a:rPr lang="en-US" sz="1400" dirty="0">
-                <a:solidFill>
-                  <a:schemeClr val="tx2"/>
-                </a:solidFill>
-              </a:rPr>
-              <a:t>Every joiner, mover and leaver is help-desk work.</a:t>
-            </a:r>
-            <a:endParaRPr lang="en-US" sz="1400" dirty="0"/>
-          </a:p>
-        </p:txBody>
-      </p:sp>
-      <p:sp>
-        <p:nvSpPr>
-          <p:cNvPr id="15" name="Token box">
-            <a:extLst>
-              <a:ext uri="{C183D7F6-B498-43B3-948B-1728B52AA6E4}">
-                <adec:decorative xmlns:adec="http://schemas.microsoft.com/office/drawing/2017/decorative" val="1"/>
-              </a:ext>
-            </a:extLst>
-          </p:cNvPr>
-          <p:cNvSpPr/>
-          <p:nvPr/>
-        </p:nvSpPr>
-        <p:spPr>
-          <a:xfrm>
-            <a:off x="6629400" y="1417320"/>
-            <a:ext cx="5029200" cy="3337560"/>
+            <a:off x="548640" y="1371600"/>
+            <a:ext cx="3611880" cy="3200400"/>
           </a:xfrm>
           <a:prstGeom prst="roundRect">
             <a:avLst>
-              <a:gd name="adj" fmla="val 2192"/>
+              <a:gd name="adj" fmla="val 2286"/>
             </a:avLst>
           </a:prstGeom>
           <a:solidFill>
@@ -4999,6 +5896,1572 @@
       </p:sp>
       <p:sp>
         <p:nvSpPr>
+          <p:cNvPr id="6" name="Icon FaUserCheck">
+            <a:extLst>
+              <a:ext uri="{C183D7F6-B498-43B3-948B-1728B52AA6E4}">
+                <adec:decorative xmlns:adec="http://schemas.microsoft.com/office/drawing/2017/decorative" val="1"/>
+              </a:ext>
+            </a:extLst>
+          </p:cNvPr>
+          <p:cNvSpPr/>
+          <p:nvPr/>
+        </p:nvSpPr>
+        <p:spPr>
+          <a:xfrm>
+            <a:off x="749808" y="1499616"/>
+            <a:ext cx="548640" cy="548640"/>
+          </a:xfrm>
+          <a:prstGeom prst="ellipse">
+            <a:avLst/>
+          </a:prstGeom>
+          <a:solidFill>
+            <a:srgbClr val="0F766E"/>
+          </a:solidFill>
+          <a:ln w="12700">
+            <a:solidFill>
+              <a:srgbClr val="0F766E"/>
+            </a:solidFill>
+            <a:prstDash val="solid"/>
+          </a:ln>
+        </p:spPr>
+      </p:sp>
+      <p:pic>
+        <p:nvPicPr>
+          <p:cNvPr id="7" name="Image 0">
+            <a:extLst>
+              <a:ext uri="{C183D7F6-B498-43B3-948B-1728B52AA6E4}">
+                <adec:decorative xmlns:adec="http://schemas.microsoft.com/office/drawing/2017/decorative" val="1"/>
+              </a:ext>
+            </a:extLst>
+          </p:cNvPr>
+          <p:cNvPicPr>
+            <a:picLocks noChangeAspect="1"/>
+          </p:cNvPicPr>
+          <p:nvPr/>
+        </p:nvPicPr>
+        <p:blipFill>
+          <a:blip r:embed="rId5"/>
+          <a:stretch>
+            <a:fillRect/>
+          </a:stretch>
+        </p:blipFill>
+        <p:spPr>
+          <a:xfrm>
+            <a:off x="881482" y="1631290"/>
+            <a:ext cx="285293" cy="285293"/>
+          </a:xfrm>
+          <a:prstGeom prst="rect">
+            <a:avLst/>
+          </a:prstGeom>
+        </p:spPr>
+      </p:pic>
+      <p:sp>
+        <p:nvSpPr>
+          <p:cNvPr id="8" name="Track head 1"/>
+          <p:cNvSpPr txBox="1"/>
+          <p:nvPr/>
+        </p:nvSpPr>
+        <p:spPr>
+          <a:xfrm>
+            <a:off x="1444752" y="1499616"/>
+            <a:ext cx="2606040" cy="548640"/>
+          </a:xfrm>
+          <a:prstGeom prst="rect">
+            <a:avLst/>
+          </a:prstGeom>
+          <a:noFill/>
+          <a:ln/>
+        </p:spPr>
+        <p:txBody>
+          <a:bodyPr wrap="square" lIns="0" tIns="0" rIns="0" bIns="0" rtlCol="0" anchor="ctr"/>
+          <a:lstStyle/>
+          <a:p>
+            <a:pPr marL="0" indent="0">
+              <a:buNone/>
+            </a:pPr>
+            <a:r>
+              <a:rPr lang="en-US" sz="1700" b="1" dirty="0">
+                <a:solidFill>
+                  <a:srgbClr val="0F766E"/>
+                </a:solidFill>
+                <a:latin typeface="Cambria" pitchFamily="34" charset="0"/>
+                <a:ea typeface="Cambria" pitchFamily="34" charset="-122"/>
+                <a:cs typeface="Cambria" pitchFamily="34" charset="-120"/>
+              </a:rPr>
+              <a:t>What it accomplishes</a:t>
+            </a:r>
+            <a:endParaRPr lang="en-US" sz="1700" dirty="0"/>
+          </a:p>
+        </p:txBody>
+      </p:sp>
+      <p:sp>
+        <p:nvSpPr>
+          <p:cNvPr id="9" name="Track text 1"/>
+          <p:cNvSpPr txBox="1"/>
+          <p:nvPr/>
+        </p:nvSpPr>
+        <p:spPr>
+          <a:xfrm>
+            <a:off x="777240" y="2176272"/>
+            <a:ext cx="3246120" cy="2331720"/>
+          </a:xfrm>
+          <a:prstGeom prst="rect">
+            <a:avLst/>
+          </a:prstGeom>
+          <a:noFill/>
+          <a:ln/>
+        </p:spPr>
+        <p:txBody>
+          <a:bodyPr wrap="square" lIns="0" tIns="0" rIns="0" bIns="0" rtlCol="0" anchor="t"/>
+          <a:lstStyle/>
+          <a:p>
+            <a:pPr marL="342900" indent="-342900">
+              <a:spcAft>
+                <a:spcPts val="600"/>
+              </a:spcAft>
+              <a:buSzPct val="100000"/>
+              <a:buChar char="•"/>
+            </a:pPr>
+            <a:r>
+              <a:rPr lang="en-US" sz="1350" dirty="0">
+                <a:solidFill>
+                  <a:schemeClr val="tx2"/>
+                </a:solidFill>
+              </a:rPr>
+              <a:t>Employees from HR; contractors from their own source of authority</a:t>
+            </a:r>
+            <a:endParaRPr lang="en-US" sz="1400" dirty="0"/>
+          </a:p>
+          <a:p>
+            <a:pPr marL="342900" indent="-342900">
+              <a:spcAft>
+                <a:spcPts val="600"/>
+              </a:spcAft>
+              <a:buSzPct val="100000"/>
+              <a:buChar char="•"/>
+            </a:pPr>
+            <a:r>
+              <a:rPr lang="en-US" sz="1350" dirty="0">
+                <a:solidFill>
+                  <a:schemeClr val="tx2"/>
+                </a:solidFill>
+              </a:rPr>
+              <a:t>Joiner, mover and leaver change access by rule, with no ticket</a:t>
+            </a:r>
+            <a:endParaRPr lang="en-US" sz="1400" dirty="0"/>
+          </a:p>
+          <a:p>
+            <a:pPr marL="342900" indent="-342900">
+              <a:spcAft>
+                <a:spcPts val="600"/>
+              </a:spcAft>
+              <a:buSzPct val="100000"/>
+              <a:buChar char="•"/>
+            </a:pPr>
+            <a:r>
+              <a:rPr lang="en-US" sz="1350" dirty="0">
+                <a:solidFill>
+                  <a:schemeClr val="tx2"/>
+                </a:solidFill>
+              </a:rPr>
+              <a:t>Attributes feed groups, admin units, Conditional Access and Lifecycle Workflows</a:t>
+            </a:r>
+            <a:endParaRPr lang="en-US" sz="1400" dirty="0"/>
+          </a:p>
+        </p:txBody>
+      </p:sp>
+      <p:sp>
+        <p:nvSpPr>
+          <p:cNvPr id="10" name="Track col 2">
+            <a:extLst>
+              <a:ext uri="{C183D7F6-B498-43B3-948B-1728B52AA6E4}">
+                <adec:decorative xmlns:adec="http://schemas.microsoft.com/office/drawing/2017/decorative" val="1"/>
+              </a:ext>
+            </a:extLst>
+          </p:cNvPr>
+          <p:cNvSpPr/>
+          <p:nvPr/>
+        </p:nvSpPr>
+        <p:spPr>
+          <a:xfrm>
+            <a:off x="4297680" y="1371600"/>
+            <a:ext cx="3611880" cy="3200400"/>
+          </a:xfrm>
+          <a:prstGeom prst="roundRect">
+            <a:avLst>
+              <a:gd name="adj" fmla="val 2286"/>
+            </a:avLst>
+          </a:prstGeom>
+          <a:solidFill>
+            <a:srgbClr val="E4EAF4"/>
+          </a:solidFill>
+          <a:ln w="12700">
+            <a:solidFill>
+              <a:srgbClr val="E4EAF4"/>
+            </a:solidFill>
+            <a:prstDash val="solid"/>
+          </a:ln>
+          <a:effectLst>
+            <a:outerShdw blurRad="76200" dist="25400" dir="5400000" algn="bl" rotWithShape="0">
+              <a:srgbClr val="64748B">
+                <a:alpha val="22000"/>
+              </a:srgbClr>
+            </a:outerShdw>
+          </a:effectLst>
+        </p:spPr>
+      </p:sp>
+      <p:sp>
+        <p:nvSpPr>
+          <p:cNvPr id="11" name="Icon FaClipboardCheck">
+            <a:extLst>
+              <a:ext uri="{C183D7F6-B498-43B3-948B-1728B52AA6E4}">
+                <adec:decorative xmlns:adec="http://schemas.microsoft.com/office/drawing/2017/decorative" val="1"/>
+              </a:ext>
+            </a:extLst>
+          </p:cNvPr>
+          <p:cNvSpPr/>
+          <p:nvPr/>
+        </p:nvSpPr>
+        <p:spPr>
+          <a:xfrm>
+            <a:off x="4498848" y="1499616"/>
+            <a:ext cx="548640" cy="548640"/>
+          </a:xfrm>
+          <a:prstGeom prst="ellipse">
+            <a:avLst/>
+          </a:prstGeom>
+          <a:solidFill>
+            <a:srgbClr val="1F2A44"/>
+          </a:solidFill>
+          <a:ln w="12700">
+            <a:solidFill>
+              <a:srgbClr val="1F2A44"/>
+            </a:solidFill>
+            <a:prstDash val="solid"/>
+          </a:ln>
+        </p:spPr>
+      </p:sp>
+      <p:pic>
+        <p:nvPicPr>
+          <p:cNvPr id="12" name="Image 1">
+            <a:extLst>
+              <a:ext uri="{C183D7F6-B498-43B3-948B-1728B52AA6E4}">
+                <adec:decorative xmlns:adec="http://schemas.microsoft.com/office/drawing/2017/decorative" val="1"/>
+              </a:ext>
+            </a:extLst>
+          </p:cNvPr>
+          <p:cNvPicPr>
+            <a:picLocks noChangeAspect="1"/>
+          </p:cNvPicPr>
+          <p:nvPr/>
+        </p:nvPicPr>
+        <p:blipFill>
+          <a:blip r:embed="rId6"/>
+          <a:stretch>
+            <a:fillRect/>
+          </a:stretch>
+        </p:blipFill>
+        <p:spPr>
+          <a:xfrm>
+            <a:off x="4630522" y="1631290"/>
+            <a:ext cx="285293" cy="285293"/>
+          </a:xfrm>
+          <a:prstGeom prst="rect">
+            <a:avLst/>
+          </a:prstGeom>
+        </p:spPr>
+      </p:pic>
+      <p:sp>
+        <p:nvSpPr>
+          <p:cNvPr id="13" name="Track head 2"/>
+          <p:cNvSpPr txBox="1"/>
+          <p:nvPr/>
+        </p:nvSpPr>
+        <p:spPr>
+          <a:xfrm>
+            <a:off x="5193792" y="1499616"/>
+            <a:ext cx="2606040" cy="548640"/>
+          </a:xfrm>
+          <a:prstGeom prst="rect">
+            <a:avLst/>
+          </a:prstGeom>
+          <a:noFill/>
+          <a:ln/>
+        </p:spPr>
+        <p:txBody>
+          <a:bodyPr wrap="square" lIns="0" tIns="0" rIns="0" bIns="0" rtlCol="0" anchor="ctr"/>
+          <a:lstStyle/>
+          <a:p>
+            <a:pPr marL="0" indent="0">
+              <a:buNone/>
+            </a:pPr>
+            <a:r>
+              <a:rPr lang="en-US" sz="1700" b="1" dirty="0">
+                <a:solidFill>
+                  <a:srgbClr val="1F2A44"/>
+                </a:solidFill>
+                <a:latin typeface="Cambria" pitchFamily="34" charset="0"/>
+                <a:ea typeface="Cambria" pitchFamily="34" charset="-122"/>
+                <a:cs typeface="Cambria" pitchFamily="34" charset="-120"/>
+              </a:rPr>
+              <a:t>How you know</a:t>
+            </a:r>
+            <a:endParaRPr lang="en-US" sz="1700" dirty="0"/>
+          </a:p>
+        </p:txBody>
+      </p:sp>
+      <p:sp>
+        <p:nvSpPr>
+          <p:cNvPr id="14" name="Track text 2"/>
+          <p:cNvSpPr txBox="1"/>
+          <p:nvPr/>
+        </p:nvSpPr>
+        <p:spPr>
+          <a:xfrm>
+            <a:off x="4526280" y="2176272"/>
+            <a:ext cx="3246120" cy="2331720"/>
+          </a:xfrm>
+          <a:prstGeom prst="rect">
+            <a:avLst/>
+          </a:prstGeom>
+          <a:noFill/>
+          <a:ln/>
+        </p:spPr>
+        <p:txBody>
+          <a:bodyPr wrap="square" lIns="0" tIns="0" rIns="0" bIns="0" rtlCol="0" anchor="t"/>
+          <a:lstStyle/>
+          <a:p>
+            <a:pPr marL="342900" indent="-342900">
+              <a:spcAft>
+                <a:spcPts val="600"/>
+              </a:spcAft>
+              <a:buSzPct val="100000"/>
+              <a:buChar char="•"/>
+            </a:pPr>
+            <a:r>
+              <a:rPr lang="en-US" sz="1350" dirty="0">
+                <a:solidFill>
+                  <a:schemeClr val="tx2"/>
+                </a:solidFill>
+              </a:rPr>
+              <a:t>Every enabled account matches an HR or contractor record, or an owned exception</a:t>
+            </a:r>
+            <a:endParaRPr lang="en-US" sz="1400" dirty="0"/>
+          </a:p>
+          <a:p>
+            <a:pPr marL="342900" indent="-342900">
+              <a:spcAft>
+                <a:spcPts val="600"/>
+              </a:spcAft>
+              <a:buSzPct val="100000"/>
+              <a:buChar char="•"/>
+            </a:pPr>
+            <a:r>
+              <a:rPr lang="en-US" sz="1350" dirty="0">
+                <a:solidFill>
+                  <a:schemeClr val="tx2"/>
+                </a:solidFill>
+              </a:rPr>
+              <a:t>Every OU-derived group is a validated rule; no hand-kept membership</a:t>
+            </a:r>
+            <a:endParaRPr lang="en-US" sz="1400" dirty="0"/>
+          </a:p>
+          <a:p>
+            <a:pPr marL="342900" indent="-342900">
+              <a:spcAft>
+                <a:spcPts val="600"/>
+              </a:spcAft>
+              <a:buSzPct val="100000"/>
+              <a:buChar char="•"/>
+            </a:pPr>
+            <a:r>
+              <a:rPr lang="en-US" sz="1350" dirty="0">
+                <a:solidFill>
+                  <a:schemeClr val="tx2"/>
+                </a:solidFill>
+              </a:rPr>
+              <a:t>Drift checks run clean; fixes go to the source (design guidance)</a:t>
+            </a:r>
+            <a:endParaRPr lang="en-US" sz="1400" dirty="0"/>
+          </a:p>
+        </p:txBody>
+      </p:sp>
+      <p:sp>
+        <p:nvSpPr>
+          <p:cNvPr id="15" name="Track col 3">
+            <a:extLst>
+              <a:ext uri="{C183D7F6-B498-43B3-948B-1728B52AA6E4}">
+                <adec:decorative xmlns:adec="http://schemas.microsoft.com/office/drawing/2017/decorative" val="1"/>
+              </a:ext>
+            </a:extLst>
+          </p:cNvPr>
+          <p:cNvSpPr/>
+          <p:nvPr/>
+        </p:nvSpPr>
+        <p:spPr>
+          <a:xfrm>
+            <a:off x="8046720" y="1371600"/>
+            <a:ext cx="3611880" cy="3200400"/>
+          </a:xfrm>
+          <a:prstGeom prst="roundRect">
+            <a:avLst>
+              <a:gd name="adj" fmla="val 2286"/>
+            </a:avLst>
+          </a:prstGeom>
+          <a:solidFill>
+            <a:srgbClr val="FBEEDC"/>
+          </a:solidFill>
+          <a:ln w="12700">
+            <a:solidFill>
+              <a:srgbClr val="FBEEDC"/>
+            </a:solidFill>
+            <a:prstDash val="solid"/>
+          </a:ln>
+          <a:effectLst>
+            <a:outerShdw blurRad="76200" dist="25400" dir="5400000" algn="bl" rotWithShape="0">
+              <a:srgbClr val="64748B">
+                <a:alpha val="22000"/>
+              </a:srgbClr>
+            </a:outerShdw>
+          </a:effectLst>
+        </p:spPr>
+      </p:sp>
+      <p:sp>
+        <p:nvSpPr>
+          <p:cNvPr id="16" name="Icon FaRoute">
+            <a:extLst>
+              <a:ext uri="{C183D7F6-B498-43B3-948B-1728B52AA6E4}">
+                <adec:decorative xmlns:adec="http://schemas.microsoft.com/office/drawing/2017/decorative" val="1"/>
+              </a:ext>
+            </a:extLst>
+          </p:cNvPr>
+          <p:cNvSpPr/>
+          <p:nvPr/>
+        </p:nvSpPr>
+        <p:spPr>
+          <a:xfrm>
+            <a:off x="8247888" y="1499616"/>
+            <a:ext cx="548640" cy="548640"/>
+          </a:xfrm>
+          <a:prstGeom prst="ellipse">
+            <a:avLst/>
+          </a:prstGeom>
+          <a:solidFill>
+            <a:srgbClr val="B45309"/>
+          </a:solidFill>
+          <a:ln w="12700">
+            <a:solidFill>
+              <a:srgbClr val="B45309"/>
+            </a:solidFill>
+            <a:prstDash val="solid"/>
+          </a:ln>
+        </p:spPr>
+      </p:sp>
+      <p:pic>
+        <p:nvPicPr>
+          <p:cNvPr id="17" name="Image 2">
+            <a:extLst>
+              <a:ext uri="{C183D7F6-B498-43B3-948B-1728B52AA6E4}">
+                <adec:decorative xmlns:adec="http://schemas.microsoft.com/office/drawing/2017/decorative" val="1"/>
+              </a:ext>
+            </a:extLst>
+          </p:cNvPr>
+          <p:cNvPicPr>
+            <a:picLocks noChangeAspect="1"/>
+          </p:cNvPicPr>
+          <p:nvPr/>
+        </p:nvPicPr>
+        <p:blipFill>
+          <a:blip r:embed="rId7"/>
+          <a:stretch>
+            <a:fillRect/>
+          </a:stretch>
+        </p:blipFill>
+        <p:spPr>
+          <a:xfrm>
+            <a:off x="8379562" y="1631290"/>
+            <a:ext cx="285293" cy="285293"/>
+          </a:xfrm>
+          <a:prstGeom prst="rect">
+            <a:avLst/>
+          </a:prstGeom>
+        </p:spPr>
+      </p:pic>
+      <p:sp>
+        <p:nvSpPr>
+          <p:cNvPr id="18" name="Track head 3"/>
+          <p:cNvSpPr txBox="1"/>
+          <p:nvPr/>
+        </p:nvSpPr>
+        <p:spPr>
+          <a:xfrm>
+            <a:off x="8942832" y="1499616"/>
+            <a:ext cx="2606040" cy="548640"/>
+          </a:xfrm>
+          <a:prstGeom prst="rect">
+            <a:avLst/>
+          </a:prstGeom>
+          <a:noFill/>
+          <a:ln/>
+        </p:spPr>
+        <p:txBody>
+          <a:bodyPr wrap="square" lIns="0" tIns="0" rIns="0" bIns="0" rtlCol="0" anchor="ctr"/>
+          <a:lstStyle/>
+          <a:p>
+            <a:pPr marL="0" indent="0">
+              <a:buNone/>
+            </a:pPr>
+            <a:r>
+              <a:rPr lang="en-US" sz="1700" b="1" dirty="0">
+                <a:solidFill>
+                  <a:srgbClr val="B45309"/>
+                </a:solidFill>
+                <a:latin typeface="Cambria" pitchFamily="34" charset="0"/>
+                <a:ea typeface="Cambria" pitchFamily="34" charset="-122"/>
+                <a:cs typeface="Cambria" pitchFamily="34" charset="-120"/>
+              </a:rPr>
+              <a:t>Not in this book</a:t>
+            </a:r>
+            <a:endParaRPr lang="en-US" sz="1700" dirty="0"/>
+          </a:p>
+        </p:txBody>
+      </p:sp>
+      <p:sp>
+        <p:nvSpPr>
+          <p:cNvPr id="19" name="Track text 3"/>
+          <p:cNvSpPr txBox="1"/>
+          <p:nvPr/>
+        </p:nvSpPr>
+        <p:spPr>
+          <a:xfrm>
+            <a:off x="8275320" y="2176272"/>
+            <a:ext cx="3246120" cy="2331720"/>
+          </a:xfrm>
+          <a:prstGeom prst="rect">
+            <a:avLst/>
+          </a:prstGeom>
+          <a:noFill/>
+          <a:ln/>
+        </p:spPr>
+        <p:txBody>
+          <a:bodyPr wrap="square" lIns="0" tIns="0" rIns="0" bIns="0" rtlCol="0" anchor="t"/>
+          <a:lstStyle/>
+          <a:p>
+            <a:pPr marL="342900" indent="-342900">
+              <a:spcAft>
+                <a:spcPts val="600"/>
+              </a:spcAft>
+              <a:buSzPct val="100000"/>
+              <a:buChar char="•"/>
+            </a:pPr>
+            <a:r>
+              <a:rPr lang="en-US" sz="1350" dirty="0">
+                <a:solidFill>
+                  <a:schemeClr val="tx2"/>
+                </a:solidFill>
+              </a:rPr>
+              <a:t>Devices, the Intune track: Book 05</a:t>
+            </a:r>
+            <a:endParaRPr lang="en-US" sz="1400" dirty="0"/>
+          </a:p>
+          <a:p>
+            <a:pPr marL="342900" indent="-342900">
+              <a:spcAft>
+                <a:spcPts val="600"/>
+              </a:spcAft>
+              <a:buSzPct val="100000"/>
+              <a:buChar char="•"/>
+            </a:pPr>
+            <a:r>
+              <a:rPr lang="en-US" sz="1350" dirty="0">
+                <a:solidFill>
+                  <a:schemeClr val="tx2"/>
+                </a:solidFill>
+              </a:rPr>
+              <a:t>Servers, the Arc track: Book 05, Ch 09</a:t>
+            </a:r>
+            <a:endParaRPr lang="en-US" sz="1400" dirty="0"/>
+          </a:p>
+          <a:p>
+            <a:pPr marL="342900" indent="-342900">
+              <a:spcAft>
+                <a:spcPts val="600"/>
+              </a:spcAft>
+              <a:buSzPct val="100000"/>
+              <a:buChar char="•"/>
+            </a:pPr>
+            <a:r>
+              <a:rPr lang="en-US" sz="1350" dirty="0">
+                <a:solidFill>
+                  <a:schemeClr val="tx2"/>
+                </a:solidFill>
+              </a:rPr>
+              <a:t>Service accounts: Book 02, Ch 09</a:t>
+            </a:r>
+            <a:endParaRPr lang="en-US" sz="1400" dirty="0"/>
+          </a:p>
+          <a:p>
+            <a:pPr marL="342900" indent="-342900">
+              <a:spcAft>
+                <a:spcPts val="600"/>
+              </a:spcAft>
+              <a:buSzPct val="100000"/>
+              <a:buChar char="•"/>
+            </a:pPr>
+            <a:r>
+              <a:rPr lang="en-US" sz="1350" dirty="0">
+                <a:solidFill>
+                  <a:schemeClr val="tx2"/>
+                </a:solidFill>
+              </a:rPr>
+              <a:t>SQL and app principals: Book 06; AI agents: Book 17</a:t>
+            </a:r>
+            <a:endParaRPr lang="en-US" sz="1400" dirty="0"/>
+          </a:p>
+        </p:txBody>
+      </p:sp>
+      <p:sp>
+        <p:nvSpPr>
+          <p:cNvPr id="20" name="Reach">
+            <a:extLst>
+              <a:ext uri="{C183D7F6-B498-43B3-948B-1728B52AA6E4}">
+                <adec:decorative xmlns:adec="http://schemas.microsoft.com/office/drawing/2017/decorative" val="1"/>
+              </a:ext>
+            </a:extLst>
+          </p:cNvPr>
+          <p:cNvSpPr/>
+          <p:nvPr/>
+        </p:nvSpPr>
+        <p:spPr>
+          <a:xfrm>
+            <a:off x="548640" y="4709160"/>
+            <a:ext cx="11109960" cy="868680"/>
+          </a:xfrm>
+          <a:prstGeom prst="roundRect">
+            <a:avLst>
+              <a:gd name="adj" fmla="val 8421"/>
+            </a:avLst>
+          </a:prstGeom>
+          <a:solidFill>
+            <a:srgbClr val="FFFFFF"/>
+          </a:solidFill>
+          <a:ln w="12700">
+            <a:solidFill>
+              <a:srgbClr val="B91C1C"/>
+            </a:solidFill>
+            <a:prstDash val="solid"/>
+          </a:ln>
+          <a:effectLst>
+            <a:outerShdw blurRad="76200" dist="25400" dir="5400000" algn="bl" rotWithShape="0">
+              <a:srgbClr val="64748B">
+                <a:alpha val="22000"/>
+              </a:srgbClr>
+            </a:outerShdw>
+          </a:effectLst>
+        </p:spPr>
+      </p:sp>
+      <p:sp>
+        <p:nvSpPr>
+          <p:cNvPr id="21" name="Icon FaTriangleExclamation">
+            <a:extLst>
+              <a:ext uri="{C183D7F6-B498-43B3-948B-1728B52AA6E4}">
+                <adec:decorative xmlns:adec="http://schemas.microsoft.com/office/drawing/2017/decorative" val="1"/>
+              </a:ext>
+            </a:extLst>
+          </p:cNvPr>
+          <p:cNvSpPr/>
+          <p:nvPr/>
+        </p:nvSpPr>
+        <p:spPr>
+          <a:xfrm>
+            <a:off x="777240" y="4777740"/>
+            <a:ext cx="731520" cy="731520"/>
+          </a:xfrm>
+          <a:prstGeom prst="ellipse">
+            <a:avLst/>
+          </a:prstGeom>
+          <a:solidFill>
+            <a:srgbClr val="B91C1C"/>
+          </a:solidFill>
+          <a:ln w="12700">
+            <a:solidFill>
+              <a:srgbClr val="B91C1C"/>
+            </a:solidFill>
+            <a:prstDash val="solid"/>
+          </a:ln>
+        </p:spPr>
+      </p:sp>
+      <p:pic>
+        <p:nvPicPr>
+          <p:cNvPr id="22" name="Image 3">
+            <a:extLst>
+              <a:ext uri="{C183D7F6-B498-43B3-948B-1728B52AA6E4}">
+                <adec:decorative xmlns:adec="http://schemas.microsoft.com/office/drawing/2017/decorative" val="1"/>
+              </a:ext>
+            </a:extLst>
+          </p:cNvPr>
+          <p:cNvPicPr>
+            <a:picLocks noChangeAspect="1"/>
+          </p:cNvPicPr>
+          <p:nvPr/>
+        </p:nvPicPr>
+        <p:blipFill>
+          <a:blip r:embed="rId8"/>
+          <a:stretch>
+            <a:fillRect/>
+          </a:stretch>
+        </p:blipFill>
+        <p:spPr>
+          <a:xfrm>
+            <a:off x="952805" y="4953305"/>
+            <a:ext cx="380390" cy="380390"/>
+          </a:xfrm>
+          <a:prstGeom prst="rect">
+            <a:avLst/>
+          </a:prstGeom>
+        </p:spPr>
+      </p:pic>
+      <p:sp>
+        <p:nvSpPr>
+          <p:cNvPr id="23" name="Reach text"/>
+          <p:cNvSpPr txBox="1"/>
+          <p:nvPr/>
+        </p:nvSpPr>
+        <p:spPr>
+          <a:xfrm>
+            <a:off x="1737360" y="4754880"/>
+            <a:ext cx="9738360" cy="777240"/>
+          </a:xfrm>
+          <a:prstGeom prst="rect">
+            <a:avLst/>
+          </a:prstGeom>
+          <a:noFill/>
+          <a:ln/>
+        </p:spPr>
+        <p:txBody>
+          <a:bodyPr wrap="square" lIns="0" tIns="0" rIns="0" bIns="0" rtlCol="0" anchor="ctr"/>
+          <a:lstStyle/>
+          <a:p>
+            <a:pPr marL="0" indent="0">
+              <a:buNone/>
+            </a:pPr>
+            <a:r>
+              <a:rPr lang="en-US" sz="1650" b="1" dirty="0">
+                <a:solidFill>
+                  <a:srgbClr val="B91C1C"/>
+                </a:solidFill>
+              </a:rPr>
+              <a:t>HR never describes a device, a server or a service: </a:t>
+            </a:r>
+            <a:r>
+              <a:rPr lang="en-US" sz="1650" dirty="0">
+                <a:solidFill>
+                  <a:schemeClr val="tx2"/>
+                </a:solidFill>
+              </a:rPr>
+              <a:t>a device rule can't read its owner, and a service account answers to its owner and sponsor, not to a hire date.</a:t>
+            </a:r>
+            <a:endParaRPr lang="en-US" sz="1650" dirty="0"/>
+          </a:p>
+        </p:txBody>
+      </p:sp>
+      <p:sp>
+        <p:nvSpPr>
+          <p:cNvPr id="24" name="Requirements"/>
+          <p:cNvSpPr txBox="1"/>
+          <p:nvPr/>
+        </p:nvSpPr>
+        <p:spPr>
+          <a:xfrm>
+            <a:off x="548640" y="5669280"/>
+            <a:ext cx="11109960" cy="310896"/>
+          </a:xfrm>
+          <a:prstGeom prst="rect">
+            <a:avLst/>
+          </a:prstGeom>
+          <a:noFill/>
+          <a:ln/>
+        </p:spPr>
+        <p:txBody>
+          <a:bodyPr wrap="square" lIns="0" tIns="0" rIns="0" bIns="0" rtlCol="0" anchor="ctr"/>
+          <a:lstStyle/>
+          <a:p>
+            <a:pPr marL="0" indent="0">
+              <a:buNone/>
+            </a:pPr>
+            <a:r>
+              <a:rPr lang="en-US" sz="1150" b="1" dirty="0">
+                <a:solidFill>
+                  <a:srgbClr val="1F2A44"/>
+                </a:solidFill>
+              </a:rPr>
+              <a:t>Federal requirements:  </a:t>
+            </a:r>
+            <a:r>
+              <a:rPr lang="en-US" sz="1150" dirty="0">
+                <a:solidFill>
+                  <a:schemeClr val="tx2"/>
+                </a:solidFill>
+              </a:rPr>
+              <a:t>NIST SP 800-53 AC-2, AC-2(1), PS-4, PS-5, IA-4(4); OMB M-19-17; OMB M-22-09 §III.A (Book 03, Chapter 11: control support, not control closure)</a:t>
+            </a:r>
+            <a:endParaRPr lang="en-US" sz="1150" dirty="0"/>
+          </a:p>
+        </p:txBody>
+      </p:sp>
+      <p:sp>
+        <p:nvSpPr>
+          <p:cNvPr id="25" name="Sources"/>
+          <p:cNvSpPr txBox="1"/>
+          <p:nvPr/>
+        </p:nvSpPr>
+        <p:spPr>
+          <a:xfrm>
+            <a:off x="548640" y="6053328"/>
+            <a:ext cx="10424160" cy="292608"/>
+          </a:xfrm>
+          <a:prstGeom prst="rect">
+            <a:avLst/>
+          </a:prstGeom>
+          <a:noFill/>
+          <a:ln/>
+        </p:spPr>
+        <p:txBody>
+          <a:bodyPr wrap="square" lIns="0" tIns="0" rIns="0" bIns="0" rtlCol="0" anchor="t"/>
+          <a:lstStyle/>
+          <a:p>
+            <a:pPr marL="0" indent="0">
+              <a:buNone/>
+            </a:pPr>
+            <a:r>
+              <a:rPr lang="en-US" sz="1000" i="1" dirty="0">
+                <a:solidFill>
+                  <a:srgbClr val="64748B"/>
+                </a:solidFill>
+              </a:rPr>
+              <a:t>Sources: Book 03, Chapters 01, 02, 06, 08, 10 and 11; Book 05, Chapter 03; companion guide, attribute-driven migration. Full citations in the backup.</a:t>
+            </a:r>
+            <a:endParaRPr lang="en-US" sz="1000" dirty="0"/>
+          </a:p>
+        </p:txBody>
+      </p:sp>
+      <p:sp>
+        <p:nvSpPr>
+          <p:cNvPr id="26" name="Slide Number Placeholder 0"/>
+          <p:cNvSpPr>
+            <a:spLocks noGrp="1"/>
+          </p:cNvSpPr>
+          <p:nvPr>
+            <p:ph type="sldNum" sz="quarter" idx="4294967295"/>
+          </p:nvPr>
+        </p:nvSpPr>
+        <p:spPr>
+          <a:xfrm>
+            <a:off x="11155680" y="6400800"/>
+            <a:ext cx="457200" cy="274320"/>
+          </a:xfrm>
+          <a:prstGeom prst="rect">
+            <a:avLst/>
+          </a:prstGeom>
+          <a:extLst>
+            <a:ext uri="{C572A759-6A51-4108-AA02-DFA0A04FC94B}">
+              <ma14:wrappingTextBoxFlag xmlns:ma14="http://schemas.microsoft.com/office/mac/drawingml/2011/main" xmlns="" val="0"/>
+            </a:ext>
+          </a:extLst>
+        </p:spPr>
+        <p:txBody>
+          <a:bodyPr/>
+          <a:lstStyle>
+            <a:lvl1pPr>
+              <a:defRPr sz="1000">
+                <a:solidFill>
+                  <a:schemeClr val="accent5"/>
+                </a:solidFill>
+              </a:defRPr>
+            </a:lvl1pPr>
+          </a:lstStyle>
+          <a:p>
+            <a:pPr algn="r"/>
+            <a:fld id="{F7021451-1387-4CA6-816F-3879F97B5CBC}" type="slidenum">
+              <a:rPr lang="en-US" b="0"/>
+              <a:t>2</a:t>
+            </a:fld>
+            <a:endParaRPr lang="en-US"/>
+          </a:p>
+        </p:txBody>
+      </p:sp>
+      <p:pic>
+        <p:nvPicPr>
+          <p:cNvPr id="27" name="Narration" descr="Narration for this slide; captions available">
+            <a:hlinkClick r:id="" action="ppaction://media"/>
+            <a:extLst>
+              <a:ext uri="{FF2B5EF4-FFF2-40B4-BE49-F238E27FC236}">
+                <a16:creationId xmlns:a16="http://schemas.microsoft.com/office/drawing/2014/main" id="{C75BB802-6B66-1573-CAFF-96521C9DF2D5}"/>
+              </a:ext>
+            </a:extLst>
+          </p:cNvPr>
+          <p:cNvPicPr>
+            <a:picLocks noChangeAspect="1"/>
+          </p:cNvPicPr>
+          <p:nvPr>
+            <a:audioFile r:link="rId2"/>
+            <p:extLst>
+              <p:ext uri="{DAA4B4D4-6D71-4841-9C94-3DE7FCFB9230}">
+                <p14:media xmlns:p14="http://schemas.microsoft.com/office/powerpoint/2010/main" r:embed="rId1">
+                  <p14:extLst>
+                    <p:ext uri="{3AFAAA56-56D3-431D-BCD4-E75A35582382}">
+                      <p173:tracksInfo xmlns:p173="http://schemas.microsoft.com/office/powerpoint/2017/3/main" displayLoc="slide">
+                        <p173:trackLst>
+                          <p173:track id="{D78BC603-00FE-4954-9A93-E0012B3FDEF7}" label="English (captions)" lang="en-US" r:embed="rId10"/>
+                        </p173:trackLst>
+                      </p173:tracksInfo>
+                    </p:ext>
+                  </p14:extLst>
+                </p14:media>
+              </p:ext>
+            </p:extLst>
+          </p:nvPr>
+        </p:nvPicPr>
+        <p:blipFill>
+          <a:blip r:embed="rId9"/>
+          <a:stretch>
+            <a:fillRect/>
+          </a:stretch>
+        </p:blipFill>
+        <p:spPr>
+          <a:xfrm>
+            <a:off x="12446000" y="127000"/>
+            <a:ext cx="304800" cy="304800"/>
+          </a:xfrm>
+          <a:prstGeom prst="rect">
+            <a:avLst/>
+          </a:prstGeom>
+        </p:spPr>
+      </p:pic>
+    </p:spTree>
+  </p:cSld>
+  <p:clrMapOvr>
+    <a:masterClrMapping/>
+  </p:clrMapOvr>
+  <mc:AlternateContent xmlns:mc="http://schemas.openxmlformats.org/markup-compatibility/2006">
+    <mc:Choice xmlns:p14="http://schemas.microsoft.com/office/powerpoint/2010/main" Requires="p14">
+      <p:transition spd="slow" p14:dur="2000" advTm="51570"/>
+    </mc:Choice>
+    <mc:Fallback>
+      <p:transition spd="slow" advTm="51570"/>
+    </mc:Fallback>
+  </mc:AlternateContent>
+  <p:timing>
+    <p:tnLst>
+      <p:par>
+        <p:cTn id="1" dur="indefinite" restart="never" nodeType="tmRoot">
+          <p:childTnLst>
+            <p:seq concurrent="1" nextAc="seek">
+              <p:cTn id="2" dur="indefinite" nodeType="mainSeq">
+                <p:childTnLst>
+                  <p:par>
+                    <p:cTn id="3" fill="hold">
+                      <p:stCondLst>
+                        <p:cond delay="indefinite"/>
+                        <p:cond evt="onBegin" delay="0">
+                          <p:tn val="2"/>
+                        </p:cond>
+                      </p:stCondLst>
+                      <p:childTnLst>
+                        <p:par>
+                          <p:cTn id="4" fill="hold">
+                            <p:stCondLst>
+                              <p:cond delay="0"/>
+                            </p:stCondLst>
+                            <p:childTnLst>
+                              <p:par>
+                                <p:cTn id="5" presetID="1" presetClass="mediacall" presetSubtype="0" fill="hold" nodeType="withEffect">
+                                  <p:stCondLst>
+                                    <p:cond delay="0"/>
+                                  </p:stCondLst>
+                                  <p:childTnLst>
+                                    <p:cmd type="call" cmd="playFrom(0.0)">
+                                      <p:cBhvr>
+                                        <p:cTn id="6" dur="47568" fill="hold"/>
+                                        <p:tgtEl>
+                                          <p:spTgt spid="27"/>
+                                        </p:tgtEl>
+                                      </p:cBhvr>
+                                    </p:cmd>
+                                  </p:childTnLst>
+                                </p:cTn>
+                              </p:par>
+                            </p:childTnLst>
+                          </p:cTn>
+                        </p:par>
+                      </p:childTnLst>
+                    </p:cTn>
+                  </p:par>
+                </p:childTnLst>
+              </p:cTn>
+              <p:prevCondLst>
+                <p:cond evt="onPrev" delay="0">
+                  <p:tgtEl>
+                    <p:sldTgt/>
+                  </p:tgtEl>
+                </p:cond>
+              </p:prevCondLst>
+              <p:nextCondLst>
+                <p:cond evt="onNext" delay="0">
+                  <p:tgtEl>
+                    <p:sldTgt/>
+                  </p:tgtEl>
+                </p:cond>
+              </p:nextCondLst>
+            </p:seq>
+          </p:childTnLst>
+        </p:cTn>
+      </p:par>
+    </p:tnLst>
+  </p:timing>
+</p:sld>
+</file>
+
+<file path=ppt/slides/slide3.xml><?xml version="1.0" encoding="utf-8"?>
+<p:sld xmlns:a="http://schemas.openxmlformats.org/drawingml/2006/main" xmlns:r="http://schemas.openxmlformats.org/officeDocument/2006/relationships" xmlns:p="http://schemas.openxmlformats.org/presentationml/2006/main">
+  <p:cSld name="Slide 3">
+    <p:spTree>
+      <p:nvGrpSpPr>
+        <p:cNvPr id="1" name=""/>
+        <p:cNvGrpSpPr/>
+        <p:nvPr/>
+      </p:nvGrpSpPr>
+      <p:grpSpPr>
+        <a:xfrm>
+          <a:off x="0" y="0"/>
+          <a:ext cx="0" cy="0"/>
+          <a:chOff x="0" y="0"/>
+          <a:chExt cx="0" cy="0"/>
+        </a:xfrm>
+      </p:grpSpPr>
+      <p:sp>
+        <p:nvSpPr>
+          <p:cNvPr id="2" name="Text 0"/>
+          <p:cNvSpPr>
+            <a:spLocks noGrp="1"/>
+          </p:cNvSpPr>
+          <p:nvPr>
+            <p:ph type="title" idx="100" hasCustomPrompt="1"/>
+          </p:nvPr>
+        </p:nvSpPr>
+        <p:spPr>
+          <a:xfrm>
+            <a:off x="548640" y="457200"/>
+            <a:ext cx="11064240" cy="777240"/>
+          </a:xfrm>
+          <a:prstGeom prst="rect">
+            <a:avLst/>
+          </a:prstGeom>
+          <a:noFill/>
+          <a:ln/>
+        </p:spPr>
+        <p:txBody>
+          <a:bodyPr wrap="square" lIns="0" tIns="0" rIns="0" bIns="0" rtlCol="0" anchor="ctr"/>
+          <a:lstStyle/>
+          <a:p>
+            <a:pPr marL="0" indent="0" algn="ctr">
+              <a:buNone/>
+            </a:pPr>
+            <a:r>
+              <a:rPr lang="en-US" sz="3000" b="1" dirty="0">
+                <a:solidFill>
+                  <a:schemeClr val="tx1"/>
+                </a:solidFill>
+                <a:latin typeface="Cambria" pitchFamily="34" charset="0"/>
+                <a:ea typeface="Cambria" pitchFamily="34" charset="-122"/>
+                <a:cs typeface="Cambria" pitchFamily="34" charset="-120"/>
+              </a:rPr>
+              <a:t>Identity is built by hand, and the mission is outgrowing it</a:t>
+            </a:r>
+            <a:endParaRPr lang="en-US" sz="3000" dirty="0"/>
+          </a:p>
+        </p:txBody>
+      </p:sp>
+      <p:sp>
+        <p:nvSpPr>
+          <p:cNvPr id="3" name="Tag Why">
+            <a:extLst>
+              <a:ext uri="{C183D7F6-B498-43B3-948B-1728B52AA6E4}">
+                <adec:decorative xmlns:adec="http://schemas.microsoft.com/office/drawing/2017/decorative" val="1"/>
+              </a:ext>
+            </a:extLst>
+          </p:cNvPr>
+          <p:cNvSpPr/>
+          <p:nvPr/>
+        </p:nvSpPr>
+        <p:spPr>
+          <a:xfrm>
+            <a:off x="548640" y="109728"/>
+            <a:ext cx="868680" cy="292608"/>
+          </a:xfrm>
+          <a:prstGeom prst="roundRect">
+            <a:avLst>
+              <a:gd name="adj" fmla="val 18750"/>
+            </a:avLst>
+          </a:prstGeom>
+          <a:solidFill>
+            <a:srgbClr val="B91C1C"/>
+          </a:solidFill>
+          <a:ln w="12700">
+            <a:solidFill>
+              <a:srgbClr val="B91C1C"/>
+            </a:solidFill>
+            <a:prstDash val="solid"/>
+          </a:ln>
+        </p:spPr>
+      </p:sp>
+      <p:sp>
+        <p:nvSpPr>
+          <p:cNvPr id="4" name="Tag Why text"/>
+          <p:cNvSpPr txBox="1"/>
+          <p:nvPr/>
+        </p:nvSpPr>
+        <p:spPr>
+          <a:xfrm>
+            <a:off x="548640" y="109728"/>
+            <a:ext cx="868680" cy="292608"/>
+          </a:xfrm>
+          <a:prstGeom prst="rect">
+            <a:avLst/>
+          </a:prstGeom>
+          <a:noFill/>
+          <a:ln/>
+        </p:spPr>
+        <p:txBody>
+          <a:bodyPr wrap="square" lIns="0" tIns="0" rIns="0" bIns="0" rtlCol="0" anchor="ctr"/>
+          <a:lstStyle/>
+          <a:p>
+            <a:pPr marL="0" indent="0" algn="ctr">
+              <a:buNone/>
+            </a:pPr>
+            <a:r>
+              <a:rPr lang="en-US" sz="1100" b="1" kern="0" spc="100" dirty="0">
+                <a:solidFill>
+                  <a:srgbClr val="FFFFFF"/>
+                </a:solidFill>
+              </a:rPr>
+              <a:t>WHY</a:t>
+            </a:r>
+            <a:endParaRPr lang="en-US" sz="1100" dirty="0"/>
+          </a:p>
+        </p:txBody>
+      </p:sp>
+      <p:sp>
+        <p:nvSpPr>
+          <p:cNvPr id="5" name="Today head"/>
+          <p:cNvSpPr txBox="1"/>
+          <p:nvPr/>
+        </p:nvSpPr>
+        <p:spPr>
+          <a:xfrm>
+            <a:off x="548640" y="1417320"/>
+            <a:ext cx="5852160" cy="274320"/>
+          </a:xfrm>
+          <a:prstGeom prst="rect">
+            <a:avLst/>
+          </a:prstGeom>
+          <a:noFill/>
+          <a:ln/>
+        </p:spPr>
+        <p:txBody>
+          <a:bodyPr wrap="square" lIns="0" tIns="0" rIns="0" bIns="0" rtlCol="0" anchor="t"/>
+          <a:lstStyle/>
+          <a:p>
+            <a:pPr marL="0" indent="0">
+              <a:buNone/>
+            </a:pPr>
+            <a:r>
+              <a:rPr lang="en-US" sz="1200" b="1" dirty="0">
+                <a:solidFill>
+                  <a:srgbClr val="64748B"/>
+                </a:solidFill>
+              </a:rPr>
+              <a:t>TODAY: NOTHING CONNECTS HR TO IDENTITY</a:t>
+            </a:r>
+            <a:endParaRPr lang="en-US" sz="1200" dirty="0"/>
+          </a:p>
+        </p:txBody>
+      </p:sp>
+      <p:sp>
+        <p:nvSpPr>
+          <p:cNvPr id="6" name="Icon FaUserXmark">
+            <a:extLst>
+              <a:ext uri="{C183D7F6-B498-43B3-948B-1728B52AA6E4}">
+                <adec:decorative xmlns:adec="http://schemas.microsoft.com/office/drawing/2017/decorative" val="1"/>
+              </a:ext>
+            </a:extLst>
+          </p:cNvPr>
+          <p:cNvSpPr/>
+          <p:nvPr/>
+        </p:nvSpPr>
+        <p:spPr>
+          <a:xfrm>
+            <a:off x="548640" y="1828800"/>
+            <a:ext cx="566928" cy="566928"/>
+          </a:xfrm>
+          <a:prstGeom prst="ellipse">
+            <a:avLst/>
+          </a:prstGeom>
+          <a:solidFill>
+            <a:srgbClr val="B91C1C"/>
+          </a:solidFill>
+          <a:ln w="12700">
+            <a:solidFill>
+              <a:srgbClr val="B91C1C"/>
+            </a:solidFill>
+            <a:prstDash val="solid"/>
+          </a:ln>
+        </p:spPr>
+      </p:sp>
+      <p:pic>
+        <p:nvPicPr>
+          <p:cNvPr id="7" name="Image 0">
+            <a:extLst>
+              <a:ext uri="{C183D7F6-B498-43B3-948B-1728B52AA6E4}">
+                <adec:decorative xmlns:adec="http://schemas.microsoft.com/office/drawing/2017/decorative" val="1"/>
+              </a:ext>
+            </a:extLst>
+          </p:cNvPr>
+          <p:cNvPicPr>
+            <a:picLocks noChangeAspect="1"/>
+          </p:cNvPicPr>
+          <p:nvPr/>
+        </p:nvPicPr>
+        <p:blipFill>
+          <a:blip r:embed="rId5"/>
+          <a:stretch>
+            <a:fillRect/>
+          </a:stretch>
+        </p:blipFill>
+        <p:spPr>
+          <a:xfrm>
+            <a:off x="684703" y="1964863"/>
+            <a:ext cx="294803" cy="294803"/>
+          </a:xfrm>
+          <a:prstGeom prst="rect">
+            <a:avLst/>
+          </a:prstGeom>
+        </p:spPr>
+      </p:pic>
+      <p:sp>
+        <p:nvSpPr>
+          <p:cNvPr id="8" name="Today 1"/>
+          <p:cNvSpPr txBox="1"/>
+          <p:nvPr/>
+        </p:nvSpPr>
+        <p:spPr>
+          <a:xfrm>
+            <a:off x="1280160" y="1783080"/>
+            <a:ext cx="5120640" cy="932688"/>
+          </a:xfrm>
+          <a:prstGeom prst="rect">
+            <a:avLst/>
+          </a:prstGeom>
+          <a:noFill/>
+          <a:ln/>
+        </p:spPr>
+        <p:txBody>
+          <a:bodyPr wrap="square" lIns="0" tIns="0" rIns="0" bIns="0" rtlCol="0" anchor="t"/>
+          <a:lstStyle/>
+          <a:p>
+            <a:pPr marL="0" indent="0">
+              <a:buNone/>
+            </a:pPr>
+            <a:r>
+              <a:rPr lang="en-US" sz="1650" b="1" dirty="0">
+                <a:solidFill>
+                  <a:srgbClr val="B91C1C"/>
+                </a:solidFill>
+              </a:rPr>
+              <a:t>Access outlives the job</a:t>
+            </a:r>
+            <a:endParaRPr lang="en-US" sz="1400" dirty="0"/>
+          </a:p>
+          <a:p>
+            <a:pPr marL="0" indent="0">
+              <a:buNone/>
+            </a:pPr>
+            <a:r>
+              <a:rPr lang="en-US" sz="1400" dirty="0">
+                <a:solidFill>
+                  <a:schemeClr val="tx2"/>
+                </a:solidFill>
+              </a:rPr>
+              <a:t>Removal waits for a ticket — yet a PIV card that can't be collected must be terminated within 18 hours of notification.</a:t>
+            </a:r>
+            <a:endParaRPr lang="en-US" sz="1400" dirty="0"/>
+          </a:p>
+        </p:txBody>
+      </p:sp>
+      <p:sp>
+        <p:nvSpPr>
+          <p:cNvPr id="9" name="Icon FaAddressBook">
+            <a:extLst>
+              <a:ext uri="{C183D7F6-B498-43B3-948B-1728B52AA6E4}">
+                <adec:decorative xmlns:adec="http://schemas.microsoft.com/office/drawing/2017/decorative" val="1"/>
+              </a:ext>
+            </a:extLst>
+          </p:cNvPr>
+          <p:cNvSpPr/>
+          <p:nvPr/>
+        </p:nvSpPr>
+        <p:spPr>
+          <a:xfrm>
+            <a:off x="548640" y="2816352"/>
+            <a:ext cx="566928" cy="566928"/>
+          </a:xfrm>
+          <a:prstGeom prst="ellipse">
+            <a:avLst/>
+          </a:prstGeom>
+          <a:solidFill>
+            <a:srgbClr val="1F2A44"/>
+          </a:solidFill>
+          <a:ln w="12700">
+            <a:solidFill>
+              <a:srgbClr val="1F2A44"/>
+            </a:solidFill>
+            <a:prstDash val="solid"/>
+          </a:ln>
+        </p:spPr>
+      </p:sp>
+      <p:pic>
+        <p:nvPicPr>
+          <p:cNvPr id="10" name="Image 1">
+            <a:extLst>
+              <a:ext uri="{C183D7F6-B498-43B3-948B-1728B52AA6E4}">
+                <adec:decorative xmlns:adec="http://schemas.microsoft.com/office/drawing/2017/decorative" val="1"/>
+              </a:ext>
+            </a:extLst>
+          </p:cNvPr>
+          <p:cNvPicPr>
+            <a:picLocks noChangeAspect="1"/>
+          </p:cNvPicPr>
+          <p:nvPr/>
+        </p:nvPicPr>
+        <p:blipFill>
+          <a:blip r:embed="rId6"/>
+          <a:stretch>
+            <a:fillRect/>
+          </a:stretch>
+        </p:blipFill>
+        <p:spPr>
+          <a:xfrm>
+            <a:off x="684703" y="2952415"/>
+            <a:ext cx="294803" cy="294803"/>
+          </a:xfrm>
+          <a:prstGeom prst="rect">
+            <a:avLst/>
+          </a:prstGeom>
+        </p:spPr>
+      </p:pic>
+      <p:sp>
+        <p:nvSpPr>
+          <p:cNvPr id="11" name="Today 2"/>
+          <p:cNvSpPr txBox="1"/>
+          <p:nvPr/>
+        </p:nvSpPr>
+        <p:spPr>
+          <a:xfrm>
+            <a:off x="1280160" y="2770632"/>
+            <a:ext cx="5120640" cy="932688"/>
+          </a:xfrm>
+          <a:prstGeom prst="rect">
+            <a:avLst/>
+          </a:prstGeom>
+          <a:noFill/>
+          <a:ln/>
+        </p:spPr>
+        <p:txBody>
+          <a:bodyPr wrap="square" lIns="0" tIns="0" rIns="0" bIns="0" rtlCol="0" anchor="t"/>
+          <a:lstStyle/>
+          <a:p>
+            <a:pPr marL="0" indent="0">
+              <a:buNone/>
+            </a:pPr>
+            <a:r>
+              <a:rPr lang="en-US" sz="1650" b="1" dirty="0">
+                <a:solidFill>
+                  <a:srgbClr val="1F2A44"/>
+                </a:solidFill>
+              </a:rPr>
+              <a:t>Records we can't trust</a:t>
+            </a:r>
+            <a:endParaRPr lang="en-US" sz="1400" dirty="0"/>
+          </a:p>
+          <a:p>
+            <a:pPr marL="0" indent="0">
+              <a:buNone/>
+            </a:pPr>
+            <a:r>
+              <a:rPr lang="en-US" sz="1400" dirty="0">
+                <a:solidFill>
+                  <a:schemeClr val="tx2"/>
+                </a:solidFill>
+              </a:rPr>
+              <a:t>Phone book, managers and approval routing drift from HR.</a:t>
+            </a:r>
+            <a:endParaRPr lang="en-US" sz="1400" dirty="0"/>
+          </a:p>
+        </p:txBody>
+      </p:sp>
+      <p:sp>
+        <p:nvSpPr>
+          <p:cNvPr id="12" name="Icon FaUserClock">
+            <a:extLst>
+              <a:ext uri="{C183D7F6-B498-43B3-948B-1728B52AA6E4}">
+                <adec:decorative xmlns:adec="http://schemas.microsoft.com/office/drawing/2017/decorative" val="1"/>
+              </a:ext>
+            </a:extLst>
+          </p:cNvPr>
+          <p:cNvSpPr/>
+          <p:nvPr/>
+        </p:nvSpPr>
+        <p:spPr>
+          <a:xfrm>
+            <a:off x="548640" y="3803904"/>
+            <a:ext cx="566928" cy="566928"/>
+          </a:xfrm>
+          <a:prstGeom prst="ellipse">
+            <a:avLst/>
+          </a:prstGeom>
+          <a:solidFill>
+            <a:srgbClr val="0F766E"/>
+          </a:solidFill>
+          <a:ln w="12700">
+            <a:solidFill>
+              <a:srgbClr val="0F766E"/>
+            </a:solidFill>
+            <a:prstDash val="solid"/>
+          </a:ln>
+        </p:spPr>
+      </p:sp>
+      <p:pic>
+        <p:nvPicPr>
+          <p:cNvPr id="13" name="Image 2">
+            <a:extLst>
+              <a:ext uri="{C183D7F6-B498-43B3-948B-1728B52AA6E4}">
+                <adec:decorative xmlns:adec="http://schemas.microsoft.com/office/drawing/2017/decorative" val="1"/>
+              </a:ext>
+            </a:extLst>
+          </p:cNvPr>
+          <p:cNvPicPr>
+            <a:picLocks noChangeAspect="1"/>
+          </p:cNvPicPr>
+          <p:nvPr/>
+        </p:nvPicPr>
+        <p:blipFill>
+          <a:blip r:embed="rId7"/>
+          <a:stretch>
+            <a:fillRect/>
+          </a:stretch>
+        </p:blipFill>
+        <p:spPr>
+          <a:xfrm>
+            <a:off x="684703" y="3939967"/>
+            <a:ext cx="294803" cy="294803"/>
+          </a:xfrm>
+          <a:prstGeom prst="rect">
+            <a:avLst/>
+          </a:prstGeom>
+        </p:spPr>
+      </p:pic>
+      <p:sp>
+        <p:nvSpPr>
+          <p:cNvPr id="14" name="Today 3"/>
+          <p:cNvSpPr txBox="1"/>
+          <p:nvPr/>
+        </p:nvSpPr>
+        <p:spPr>
+          <a:xfrm>
+            <a:off x="1280160" y="3758184"/>
+            <a:ext cx="5120640" cy="932688"/>
+          </a:xfrm>
+          <a:prstGeom prst="rect">
+            <a:avLst/>
+          </a:prstGeom>
+          <a:noFill/>
+          <a:ln/>
+        </p:spPr>
+        <p:txBody>
+          <a:bodyPr wrap="square" lIns="0" tIns="0" rIns="0" bIns="0" rtlCol="0" anchor="t"/>
+          <a:lstStyle/>
+          <a:p>
+            <a:pPr marL="0" indent="0">
+              <a:buNone/>
+            </a:pPr>
+            <a:r>
+              <a:rPr lang="en-US" sz="1650" b="1" dirty="0">
+                <a:solidFill>
+                  <a:srgbClr val="0F766E"/>
+                </a:solidFill>
+              </a:rPr>
+              <a:t>Cost and delay</a:t>
+            </a:r>
+            <a:endParaRPr lang="en-US" sz="1400" dirty="0"/>
+          </a:p>
+          <a:p>
+            <a:pPr marL="0" indent="0">
+              <a:buNone/>
+            </a:pPr>
+            <a:r>
+              <a:rPr lang="en-US" sz="1400" dirty="0">
+                <a:solidFill>
+                  <a:schemeClr val="tx2"/>
+                </a:solidFill>
+              </a:rPr>
+              <a:t>Every joiner, mover and leaver is help-desk work.</a:t>
+            </a:r>
+            <a:endParaRPr lang="en-US" sz="1400" dirty="0"/>
+          </a:p>
+        </p:txBody>
+      </p:sp>
+      <p:sp>
+        <p:nvSpPr>
+          <p:cNvPr id="15" name="Token box">
+            <a:extLst>
+              <a:ext uri="{C183D7F6-B498-43B3-948B-1728B52AA6E4}">
+                <adec:decorative xmlns:adec="http://schemas.microsoft.com/office/drawing/2017/decorative" val="1"/>
+              </a:ext>
+            </a:extLst>
+          </p:cNvPr>
+          <p:cNvSpPr/>
+          <p:nvPr/>
+        </p:nvSpPr>
+        <p:spPr>
+          <a:xfrm>
+            <a:off x="6629400" y="1417320"/>
+            <a:ext cx="5029200" cy="3337560"/>
+          </a:xfrm>
+          <a:prstGeom prst="roundRect">
+            <a:avLst>
+              <a:gd name="adj" fmla="val 2192"/>
+            </a:avLst>
+          </a:prstGeom>
+          <a:solidFill>
+            <a:srgbClr val="DCEFEC"/>
+          </a:solidFill>
+          <a:ln w="12700">
+            <a:solidFill>
+              <a:srgbClr val="DCEFEC"/>
+            </a:solidFill>
+            <a:prstDash val="solid"/>
+          </a:ln>
+          <a:effectLst>
+            <a:outerShdw blurRad="76200" dist="25400" dir="5400000" algn="bl" rotWithShape="0">
+              <a:srgbClr val="64748B">
+                <a:alpha val="22000"/>
+              </a:srgbClr>
+            </a:outerShdw>
+          </a:effectLst>
+        </p:spPr>
+      </p:sp>
+      <p:sp>
+        <p:nvSpPr>
           <p:cNvPr id="16" name="Icon FaIdCard">
             <a:extLst>
               <a:ext uri="{C183D7F6-B498-43B3-948B-1728B52AA6E4}">
@@ -5443,7 +7906,7 @@
             <a:pPr algn="r"/>
             <a:fld id="{F7021451-1387-4CA6-816F-3879F97B5CBC}" type="slidenum">
               <a:rPr lang="en-US" b="0"/>
-              <a:t>2</a:t>
+              <a:t>3</a:t>
             </a:fld>
             <a:endParaRPr lang="en-US"/>
           </a:p>
@@ -5455,7 +7918,7 @@
             <a:hlinkClick r:id="" action="ppaction://media"/>
             <a:extLst>
               <a:ext uri="{FF2B5EF4-FFF2-40B4-BE49-F238E27FC236}">
-                <a16:creationId xmlns:a16="http://schemas.microsoft.com/office/drawing/2014/main" id="{8E1448A6-DF62-1E72-A66B-EAC8E81BB302}"/>
+                <a16:creationId xmlns:a16="http://schemas.microsoft.com/office/drawing/2014/main" id="{EC956DF9-1296-38B8-7C0D-A046245233AF}"/>
               </a:ext>
             </a:extLst>
           </p:cNvPr>
@@ -5471,7 +7934,7 @@
                     <p:ext uri="{3AFAAA56-56D3-431D-BCD4-E75A35582382}">
                       <p173:tracksInfo xmlns:p173="http://schemas.microsoft.com/office/powerpoint/2017/3/main" displayLoc="slide">
                         <p173:trackLst>
-                          <p173:track id="{063FDE7D-7F9D-4996-AD5D-D757525050FD}" label="English (captions)" lang="en-US" r:embed="rId11"/>
+                          <p173:track id="{CA7BF653-1F8D-4076-88C9-3F7D25EF4BDC}" label="English (captions)" lang="en-US" r:embed="rId11"/>
                         </p173:trackLst>
                       </p173:tracksInfo>
                     </p:ext>
@@ -5581,9 +8044,9 @@
 </p:sld>
 </file>
 
-<file path=ppt/slides/slide3.xml><?xml version="1.0" encoding="utf-8"?>
+<file path=ppt/slides/slide4.xml><?xml version="1.0" encoding="utf-8"?>
 <p:sld xmlns:a="http://schemas.openxmlformats.org/drawingml/2006/main" xmlns:r="http://schemas.openxmlformats.org/officeDocument/2006/relationships" xmlns:p="http://schemas.openxmlformats.org/presentationml/2006/main">
-  <p:cSld name="Slide 3">
+  <p:cSld name="Slide 4">
     <p:spTree>
       <p:nvGrpSpPr>
         <p:cNvPr id="1" name=""/>
@@ -6538,7 +9001,7 @@
             <a:pPr algn="r"/>
             <a:fld id="{F7021451-1387-4CA6-816F-3879F97B5CBC}" type="slidenum">
               <a:rPr lang="en-US" b="0"/>
-              <a:t>3</a:t>
+              <a:t>4</a:t>
             </a:fld>
             <a:endParaRPr lang="en-US"/>
           </a:p>
@@ -6550,7 +9013,7 @@
             <a:hlinkClick r:id="" action="ppaction://media"/>
             <a:extLst>
               <a:ext uri="{FF2B5EF4-FFF2-40B4-BE49-F238E27FC236}">
-                <a16:creationId xmlns:a16="http://schemas.microsoft.com/office/drawing/2014/main" id="{837DEF36-1816-10CE-8B19-1D54DFCD0CD1}"/>
+                <a16:creationId xmlns:a16="http://schemas.microsoft.com/office/drawing/2014/main" id="{16C91821-F709-ABCC-B48A-8A8871EAC4E9}"/>
               </a:ext>
             </a:extLst>
           </p:cNvPr>
@@ -6566,7 +9029,7 @@
                     <p:ext uri="{3AFAAA56-56D3-431D-BCD4-E75A35582382}">
                       <p173:tracksInfo xmlns:p173="http://schemas.microsoft.com/office/powerpoint/2017/3/main" displayLoc="slide">
                         <p173:trackLst>
-                          <p173:track id="{0CB414E8-ABFA-4B5F-88E6-A2769B5A8B3D}" label="English (captions)" lang="en-US" r:embed="rId10"/>
+                          <p173:track id="{E2CBD6E4-CC36-435F-9560-933FF25F9CA1}" label="English (captions)" lang="en-US" r:embed="rId10"/>
                         </p173:trackLst>
                       </p173:tracksInfo>
                     </p:ext>
@@ -6676,9 +9139,9 @@
 </p:sld>
 </file>
 
-<file path=ppt/slides/slide4.xml><?xml version="1.0" encoding="utf-8"?>
+<file path=ppt/slides/slide5.xml><?xml version="1.0" encoding="utf-8"?>
 <p:sld xmlns:a="http://schemas.openxmlformats.org/drawingml/2006/main" xmlns:r="http://schemas.openxmlformats.org/officeDocument/2006/relationships" xmlns:p="http://schemas.openxmlformats.org/presentationml/2006/main">
-  <p:cSld name="Slide 4">
+  <p:cSld name="Slide 5">
     <p:spTree>
       <p:nvGrpSpPr>
         <p:cNvPr id="1" name=""/>
@@ -6807,7 +9270,7 @@
       </p:sp>
       <p:graphicFrame>
         <p:nvGraphicFramePr>
-          <p:cNvPr id="5" name="Table 0"/>
+          <p:cNvPr id="6" name="Table 0"/>
           <p:cNvGraphicFramePr>
             <a:graphicFrameLocks noGrp="1"/>
           </p:cNvGraphicFramePr>
@@ -9036,7 +11499,7 @@
       </p:graphicFrame>
       <p:sp>
         <p:nvSpPr>
-          <p:cNvPr id="6" name="Judgment">
+          <p:cNvPr id="5" name="Judgment">
             <a:extLst>
               <a:ext uri="{C183D7F6-B498-43B3-948B-1728B52AA6E4}">
                 <adec:decorative xmlns:adec="http://schemas.microsoft.com/office/drawing/2017/decorative" val="1"/>
@@ -9254,7 +11717,7 @@
             <a:pPr algn="r"/>
             <a:fld id="{F7021451-1387-4CA6-816F-3879F97B5CBC}" type="slidenum">
               <a:rPr lang="en-US" b="0"/>
-              <a:t>4</a:t>
+              <a:t>5</a:t>
             </a:fld>
             <a:endParaRPr lang="en-US"/>
           </a:p>
@@ -9266,7 +11729,7 @@
             <a:hlinkClick r:id="" action="ppaction://media"/>
             <a:extLst>
               <a:ext uri="{FF2B5EF4-FFF2-40B4-BE49-F238E27FC236}">
-                <a16:creationId xmlns:a16="http://schemas.microsoft.com/office/drawing/2014/main" id="{028416FA-3E2F-4FFA-EFE8-C81033D8CA39}"/>
+                <a16:creationId xmlns:a16="http://schemas.microsoft.com/office/drawing/2014/main" id="{209BFA21-665D-83C3-15B6-E84B9F0F48D7}"/>
               </a:ext>
             </a:extLst>
           </p:cNvPr>
@@ -9282,7 +11745,7 @@
                     <p:ext uri="{3AFAAA56-56D3-431D-BCD4-E75A35582382}">
                       <p173:tracksInfo xmlns:p173="http://schemas.microsoft.com/office/powerpoint/2017/3/main" displayLoc="slide">
                         <p173:trackLst>
-                          <p173:track id="{F2E03C80-929B-4E0E-9C7E-10F43AD316D4}" label="English (captions)" lang="en-US" r:embed="rId7"/>
+                          <p173:track id="{3DF9D6E0-0BE3-4218-8AC2-7D0A67EB2082}" label="English (captions)" lang="en-US" r:embed="rId7"/>
                         </p173:trackLst>
                       </p173:tracksInfo>
                     </p:ext>
@@ -9392,9 +11855,9 @@
 </p:sld>
 </file>
 
-<file path=ppt/slides/slide5.xml><?xml version="1.0" encoding="utf-8"?>
+<file path=ppt/slides/slide6.xml><?xml version="1.0" encoding="utf-8"?>
 <p:sld xmlns:a="http://schemas.openxmlformats.org/drawingml/2006/main" xmlns:r="http://schemas.openxmlformats.org/officeDocument/2006/relationships" xmlns:p="http://schemas.openxmlformats.org/presentationml/2006/main">
-  <p:cSld name="Slide 5">
+  <p:cSld name="Slide 6">
     <p:spTree>
       <p:nvGrpSpPr>
         <p:cNvPr id="1" name=""/>
@@ -9523,7 +11986,7 @@
       </p:sp>
       <p:graphicFrame>
         <p:nvGraphicFramePr>
-          <p:cNvPr id="6" name="Table 0"/>
+          <p:cNvPr id="7" name="Table 0"/>
           <p:cNvGraphicFramePr>
             <a:graphicFrameLocks noGrp="1"/>
           </p:cNvGraphicFramePr>
@@ -10137,7 +12600,7 @@
       </p:graphicFrame>
       <p:sp>
         <p:nvSpPr>
-          <p:cNvPr id="5" name="Model box">
+          <p:cNvPr id="6" name="Model box">
             <a:extLst>
               <a:ext uri="{C183D7F6-B498-43B3-948B-1728B52AA6E4}">
                 <adec:decorative xmlns:adec="http://schemas.microsoft.com/office/drawing/2017/decorative" val="1"/>
@@ -10177,7 +12640,7 @@
       </p:sp>
       <p:sp>
         <p:nvSpPr>
-          <p:cNvPr id="7" name="Icon FaSitemap">
+          <p:cNvPr id="5" name="Icon FaSitemap">
             <a:extLst>
               <a:ext uri="{C183D7F6-B498-43B3-948B-1728B52AA6E4}">
                 <adec:decorative xmlns:adec="http://schemas.microsoft.com/office/drawing/2017/decorative" val="1"/>
@@ -10571,7 +13034,7 @@
             <a:pPr algn="r"/>
             <a:fld id="{F7021451-1387-4CA6-816F-3879F97B5CBC}" type="slidenum">
               <a:rPr lang="en-US" b="0"/>
-              <a:t>5</a:t>
+              <a:t>6</a:t>
             </a:fld>
             <a:endParaRPr lang="en-US"/>
           </a:p>
@@ -10583,7 +13046,7 @@
             <a:hlinkClick r:id="" action="ppaction://media"/>
             <a:extLst>
               <a:ext uri="{FF2B5EF4-FFF2-40B4-BE49-F238E27FC236}">
-                <a16:creationId xmlns:a16="http://schemas.microsoft.com/office/drawing/2014/main" id="{CF17662D-7B5E-A1A4-1167-8B3374384EE0}"/>
+                <a16:creationId xmlns:a16="http://schemas.microsoft.com/office/drawing/2014/main" id="{0675DF93-66AB-788D-1CDD-E06BB94F5082}"/>
               </a:ext>
             </a:extLst>
           </p:cNvPr>
@@ -10599,7 +13062,7 @@
                     <p:ext uri="{3AFAAA56-56D3-431D-BCD4-E75A35582382}">
                       <p173:tracksInfo xmlns:p173="http://schemas.microsoft.com/office/powerpoint/2017/3/main" displayLoc="slide">
                         <p173:trackLst>
-                          <p173:track id="{6C0C5B4C-AA8A-44C6-ACAD-E4D50DC10F0B}" label="English (captions)" lang="en-US" r:embed="rId8"/>
+                          <p173:track id="{20F0CE43-C1A4-4FA5-87B6-2A72F704C88C}" label="English (captions)" lang="en-US" r:embed="rId8"/>
                         </p173:trackLst>
                       </p173:tracksInfo>
                     </p:ext>
@@ -10709,9 +13172,9 @@
 </p:sld>
 </file>
 
-<file path=ppt/slides/slide6.xml><?xml version="1.0" encoding="utf-8"?>
+<file path=ppt/slides/slide7.xml><?xml version="1.0" encoding="utf-8"?>
 <p:sld xmlns:a="http://schemas.openxmlformats.org/drawingml/2006/main" xmlns:r="http://schemas.openxmlformats.org/officeDocument/2006/relationships" xmlns:p="http://schemas.openxmlformats.org/presentationml/2006/main">
-  <p:cSld name="Slide 6">
+  <p:cSld name="Slide 7">
     <p:spTree>
       <p:nvGrpSpPr>
         <p:cNvPr id="1" name=""/>
@@ -11498,7 +13961,7 @@
             <a:pPr algn="r"/>
             <a:fld id="{F7021451-1387-4CA6-816F-3879F97B5CBC}" type="slidenum">
               <a:rPr lang="en-US" b="0"/>
-              <a:t>6</a:t>
+              <a:t>7</a:t>
             </a:fld>
             <a:endParaRPr lang="en-US"/>
           </a:p>
@@ -11510,7 +13973,7 @@
             <a:hlinkClick r:id="" action="ppaction://media"/>
             <a:extLst>
               <a:ext uri="{FF2B5EF4-FFF2-40B4-BE49-F238E27FC236}">
-                <a16:creationId xmlns:a16="http://schemas.microsoft.com/office/drawing/2014/main" id="{3C7EFB51-7A9C-A4B9-E9FE-7CFA65985BFE}"/>
+                <a16:creationId xmlns:a16="http://schemas.microsoft.com/office/drawing/2014/main" id="{C5B8FE5E-ACF9-75DD-2A6D-2E9304A4140C}"/>
               </a:ext>
             </a:extLst>
           </p:cNvPr>
@@ -11526,7 +13989,7 @@
                     <p:ext uri="{3AFAAA56-56D3-431D-BCD4-E75A35582382}">
                       <p173:tracksInfo xmlns:p173="http://schemas.microsoft.com/office/powerpoint/2017/3/main" displayLoc="slide">
                         <p173:trackLst>
-                          <p173:track id="{C832C5C1-FE4F-48F1-896F-4EB06C1E4746}" label="English (captions)" lang="en-US" r:embed="rId7"/>
+                          <p173:track id="{4BBD0076-12A8-40B3-8388-BE7DEAD1BAB8}" label="English (captions)" lang="en-US" r:embed="rId7"/>
                         </p173:trackLst>
                       </p173:tracksInfo>
                     </p:ext>
@@ -11636,9 +14099,9 @@
 </p:sld>
 </file>
 
-<file path=ppt/slides/slide7.xml><?xml version="1.0" encoding="utf-8"?>
+<file path=ppt/slides/slide8.xml><?xml version="1.0" encoding="utf-8"?>
 <p:sld xmlns:a="http://schemas.openxmlformats.org/drawingml/2006/main" xmlns:r="http://schemas.openxmlformats.org/officeDocument/2006/relationships" xmlns:p="http://schemas.openxmlformats.org/presentationml/2006/main">
-  <p:cSld name="Slide 7">
+  <p:cSld name="Slide 8">
     <p:spTree>
       <p:nvGrpSpPr>
         <p:cNvPr id="1" name=""/>
@@ -12777,7 +15240,7 @@
             <a:pPr algn="r"/>
             <a:fld id="{F7021451-1387-4CA6-816F-3879F97B5CBC}" type="slidenum">
               <a:rPr lang="en-US" b="0"/>
-              <a:t>7</a:t>
+              <a:t>8</a:t>
             </a:fld>
             <a:endParaRPr lang="en-US"/>
           </a:p>
@@ -12789,7 +15252,7 @@
             <a:hlinkClick r:id="" action="ppaction://media"/>
             <a:extLst>
               <a:ext uri="{FF2B5EF4-FFF2-40B4-BE49-F238E27FC236}">
-                <a16:creationId xmlns:a16="http://schemas.microsoft.com/office/drawing/2014/main" id="{9929AF0E-0D66-8331-DFC7-B2BA6AC41C6D}"/>
+                <a16:creationId xmlns:a16="http://schemas.microsoft.com/office/drawing/2014/main" id="{24B6946F-732D-72F0-C85D-C68D552F426C}"/>
               </a:ext>
             </a:extLst>
           </p:cNvPr>
@@ -12805,7 +15268,7 @@
                     <p:ext uri="{3AFAAA56-56D3-431D-BCD4-E75A35582382}">
                       <p173:tracksInfo xmlns:p173="http://schemas.microsoft.com/office/powerpoint/2017/3/main" displayLoc="slide">
                         <p173:trackLst>
-                          <p173:track id="{F633FFC6-3C59-4207-A5A3-A4661F350321}" label="English (captions)" lang="en-US" r:embed="rId10"/>
+                          <p173:track id="{12B240CC-90D9-4596-A12B-EC81E051AF3B}" label="English (captions)" lang="en-US" r:embed="rId10"/>
                         </p173:trackLst>
                       </p173:tracksInfo>
                     </p:ext>
@@ -12915,9 +15378,9 @@
 </p:sld>
 </file>
 
-<file path=ppt/slides/slide8.xml><?xml version="1.0" encoding="utf-8"?>
+<file path=ppt/slides/slide9.xml><?xml version="1.0" encoding="utf-8"?>
 <p:sld xmlns:a="http://schemas.openxmlformats.org/drawingml/2006/main" xmlns:r="http://schemas.openxmlformats.org/officeDocument/2006/relationships" xmlns:p="http://schemas.openxmlformats.org/presentationml/2006/main">
-  <p:cSld name="Slide 8">
+  <p:cSld name="Slide 9">
     <p:spTree>
       <p:nvGrpSpPr>
         <p:cNvPr id="1" name=""/>
@@ -13704,7 +16167,7 @@
             <a:pPr algn="r"/>
             <a:fld id="{F7021451-1387-4CA6-816F-3879F97B5CBC}" type="slidenum">
               <a:rPr lang="en-US" b="0"/>
-              <a:t>8</a:t>
+              <a:t>9</a:t>
             </a:fld>
             <a:endParaRPr lang="en-US"/>
           </a:p>
@@ -13716,7 +16179,7 @@
             <a:hlinkClick r:id="" action="ppaction://media"/>
             <a:extLst>
               <a:ext uri="{FF2B5EF4-FFF2-40B4-BE49-F238E27FC236}">
-                <a16:creationId xmlns:a16="http://schemas.microsoft.com/office/drawing/2014/main" id="{911EE902-383B-7490-6D96-45324E733EED}"/>
+                <a16:creationId xmlns:a16="http://schemas.microsoft.com/office/drawing/2014/main" id="{9AFE4D80-8BF7-CC6C-B36B-D2D5563E4829}"/>
               </a:ext>
             </a:extLst>
           </p:cNvPr>
@@ -13732,7 +16195,7 @@
                     <p:ext uri="{3AFAAA56-56D3-431D-BCD4-E75A35582382}">
                       <p173:tracksInfo xmlns:p173="http://schemas.microsoft.com/office/powerpoint/2017/3/main" displayLoc="slide">
                         <p173:trackLst>
-                          <p173:track id="{346EFACC-32A4-44A7-9D5B-81E6AD3984AD}" label="English (captions)" lang="en-US" r:embed="rId7"/>
+                          <p173:track id="{88824050-5E87-4D83-9EB6-EC2F23F926B6}" label="English (captions)" lang="en-US" r:embed="rId7"/>
                         </p173:trackLst>
                       </p173:tracksInfo>
                     </p:ext>
@@ -13805,1179 +16268,6 @@
                                         <p:cTn id="6" dur="53688" fill="hold"/>
                                         <p:tgtEl>
                                           <p:spTgt spid="19"/>
-                                        </p:tgtEl>
-                                      </p:cBhvr>
-                                    </p:cmd>
-                                  </p:childTnLst>
-                                </p:cTn>
-                              </p:par>
-                            </p:childTnLst>
-                          </p:cTn>
-                        </p:par>
-                      </p:childTnLst>
-                    </p:cTn>
-                  </p:par>
-                </p:childTnLst>
-              </p:cTn>
-              <p:prevCondLst>
-                <p:cond evt="onPrev" delay="0">
-                  <p:tgtEl>
-                    <p:sldTgt/>
-                  </p:tgtEl>
-                </p:cond>
-              </p:prevCondLst>
-              <p:nextCondLst>
-                <p:cond evt="onNext" delay="0">
-                  <p:tgtEl>
-                    <p:sldTgt/>
-                  </p:tgtEl>
-                </p:cond>
-              </p:nextCondLst>
-            </p:seq>
-          </p:childTnLst>
-        </p:cTn>
-      </p:par>
-    </p:tnLst>
-  </p:timing>
-</p:sld>
-</file>
-
-<file path=ppt/slides/slide9.xml><?xml version="1.0" encoding="utf-8"?>
-<p:sld xmlns:a="http://schemas.openxmlformats.org/drawingml/2006/main" xmlns:r="http://schemas.openxmlformats.org/officeDocument/2006/relationships" xmlns:p="http://schemas.openxmlformats.org/presentationml/2006/main">
-  <p:cSld name="Slide 9">
-    <p:spTree>
-      <p:nvGrpSpPr>
-        <p:cNvPr id="1" name=""/>
-        <p:cNvGrpSpPr/>
-        <p:nvPr/>
-      </p:nvGrpSpPr>
-      <p:grpSpPr>
-        <a:xfrm>
-          <a:off x="0" y="0"/>
-          <a:ext cx="0" cy="0"/>
-          <a:chOff x="0" y="0"/>
-          <a:chExt cx="0" cy="0"/>
-        </a:xfrm>
-      </p:grpSpPr>
-      <p:sp>
-        <p:nvSpPr>
-          <p:cNvPr id="2" name="Text 0"/>
-          <p:cNvSpPr>
-            <a:spLocks noGrp="1"/>
-          </p:cNvSpPr>
-          <p:nvPr>
-            <p:ph type="title" idx="100" hasCustomPrompt="1"/>
-          </p:nvPr>
-        </p:nvSpPr>
-        <p:spPr>
-          <a:xfrm>
-            <a:off x="548640" y="457200"/>
-            <a:ext cx="11064240" cy="777240"/>
-          </a:xfrm>
-          <a:prstGeom prst="rect">
-            <a:avLst/>
-          </a:prstGeom>
-          <a:noFill/>
-          <a:ln/>
-        </p:spPr>
-        <p:txBody>
-          <a:bodyPr wrap="square" lIns="0" tIns="0" rIns="0" bIns="0" rtlCol="0" anchor="ctr"/>
-          <a:lstStyle/>
-          <a:p>
-            <a:pPr marL="0" indent="0" algn="ctr">
-              <a:buNone/>
-            </a:pPr>
-            <a:r>
-              <a:rPr lang="en-US" sz="3000" b="1" dirty="0">
-                <a:solidFill>
-                  <a:schemeClr val="tx1"/>
-                </a:solidFill>
-                <a:latin typeface="Cambria" pitchFamily="34" charset="0"/>
-                <a:ea typeface="Cambria" pitchFamily="34" charset="-122"/>
-                <a:cs typeface="Cambria" pitchFamily="34" charset="-120"/>
-              </a:rPr>
-              <a:t>From attributes to access, with evidence built in</a:t>
-            </a:r>
-            <a:endParaRPr lang="en-US" sz="3000" dirty="0"/>
-          </a:p>
-        </p:txBody>
-      </p:sp>
-      <p:sp>
-        <p:nvSpPr>
-          <p:cNvPr id="3" name="Tag How">
-            <a:extLst>
-              <a:ext uri="{C183D7F6-B498-43B3-948B-1728B52AA6E4}">
-                <adec:decorative xmlns:adec="http://schemas.microsoft.com/office/drawing/2017/decorative" val="1"/>
-              </a:ext>
-            </a:extLst>
-          </p:cNvPr>
-          <p:cNvSpPr/>
-          <p:nvPr/>
-        </p:nvSpPr>
-        <p:spPr>
-          <a:xfrm>
-            <a:off x="548640" y="109728"/>
-            <a:ext cx="868680" cy="292608"/>
-          </a:xfrm>
-          <a:prstGeom prst="roundRect">
-            <a:avLst>
-              <a:gd name="adj" fmla="val 18750"/>
-            </a:avLst>
-          </a:prstGeom>
-          <a:solidFill>
-            <a:srgbClr val="B45309"/>
-          </a:solidFill>
-          <a:ln w="12700">
-            <a:solidFill>
-              <a:srgbClr val="B45309"/>
-            </a:solidFill>
-            <a:prstDash val="solid"/>
-          </a:ln>
-        </p:spPr>
-      </p:sp>
-      <p:sp>
-        <p:nvSpPr>
-          <p:cNvPr id="4" name="Tag How text"/>
-          <p:cNvSpPr txBox="1"/>
-          <p:nvPr/>
-        </p:nvSpPr>
-        <p:spPr>
-          <a:xfrm>
-            <a:off x="548640" y="109728"/>
-            <a:ext cx="868680" cy="292608"/>
-          </a:xfrm>
-          <a:prstGeom prst="rect">
-            <a:avLst/>
-          </a:prstGeom>
-          <a:noFill/>
-          <a:ln/>
-        </p:spPr>
-        <p:txBody>
-          <a:bodyPr wrap="square" lIns="0" tIns="0" rIns="0" bIns="0" rtlCol="0" anchor="ctr"/>
-          <a:lstStyle/>
-          <a:p>
-            <a:pPr marL="0" indent="0" algn="ctr">
-              <a:buNone/>
-            </a:pPr>
-            <a:r>
-              <a:rPr lang="en-US" sz="1100" b="1" kern="0" spc="100" dirty="0">
-                <a:solidFill>
-                  <a:srgbClr val="FFFFFF"/>
-                </a:solidFill>
-              </a:rPr>
-              <a:t>HOW</a:t>
-            </a:r>
-            <a:endParaRPr lang="en-US" sz="1100" dirty="0"/>
-          </a:p>
-        </p:txBody>
-      </p:sp>
-      <p:sp>
-        <p:nvSpPr>
-          <p:cNvPr id="5" name="Chain 0">
-            <a:extLst>
-              <a:ext uri="{C183D7F6-B498-43B3-948B-1728B52AA6E4}">
-                <adec:decorative xmlns:adec="http://schemas.microsoft.com/office/drawing/2017/decorative" val="1"/>
-              </a:ext>
-            </a:extLst>
-          </p:cNvPr>
-          <p:cNvSpPr/>
-          <p:nvPr/>
-        </p:nvSpPr>
-        <p:spPr>
-          <a:xfrm>
-            <a:off x="548640" y="1554480"/>
-            <a:ext cx="2057400" cy="914400"/>
-          </a:xfrm>
-          <a:prstGeom prst="roundRect">
-            <a:avLst>
-              <a:gd name="adj" fmla="val 8000"/>
-            </a:avLst>
-          </a:prstGeom>
-          <a:solidFill>
-            <a:srgbClr val="E4EAF4"/>
-          </a:solidFill>
-          <a:ln w="12700">
-            <a:solidFill>
-              <a:srgbClr val="E4EAF4"/>
-            </a:solidFill>
-            <a:prstDash val="solid"/>
-          </a:ln>
-          <a:effectLst>
-            <a:outerShdw blurRad="76200" dist="25400" dir="5400000" algn="bl" rotWithShape="0">
-              <a:srgbClr val="64748B">
-                <a:alpha val="22000"/>
-              </a:srgbClr>
-            </a:outerShdw>
-          </a:effectLst>
-        </p:spPr>
-      </p:sp>
-      <p:sp>
-        <p:nvSpPr>
-          <p:cNvPr id="6" name="Chain 0 text"/>
-          <p:cNvSpPr txBox="1"/>
-          <p:nvPr/>
-        </p:nvSpPr>
-        <p:spPr>
-          <a:xfrm>
-            <a:off x="640080" y="1554480"/>
-            <a:ext cx="1874520" cy="914400"/>
-          </a:xfrm>
-          <a:prstGeom prst="rect">
-            <a:avLst/>
-          </a:prstGeom>
-          <a:noFill/>
-          <a:ln/>
-        </p:spPr>
-        <p:txBody>
-          <a:bodyPr wrap="square" lIns="0" tIns="0" rIns="0" bIns="0" rtlCol="0" anchor="ctr"/>
-          <a:lstStyle/>
-          <a:p>
-            <a:pPr marL="0" indent="0" algn="ctr">
-              <a:buNone/>
-            </a:pPr>
-            <a:r>
-              <a:rPr lang="en-US" sz="1500" b="1" dirty="0">
-                <a:solidFill>
-                  <a:srgbClr val="1F2A44"/>
-                </a:solidFill>
-              </a:rPr>
-              <a:t>Personnel record</a:t>
-            </a:r>
-            <a:endParaRPr lang="en-US" sz="1500" dirty="0"/>
-          </a:p>
-        </p:txBody>
-      </p:sp>
-      <p:sp>
-        <p:nvSpPr>
-          <p:cNvPr id="7" name="Chain 1">
-            <a:extLst>
-              <a:ext uri="{C183D7F6-B498-43B3-948B-1728B52AA6E4}">
-                <adec:decorative xmlns:adec="http://schemas.microsoft.com/office/drawing/2017/decorative" val="1"/>
-              </a:ext>
-            </a:extLst>
-          </p:cNvPr>
-          <p:cNvSpPr/>
-          <p:nvPr/>
-        </p:nvSpPr>
-        <p:spPr>
-          <a:xfrm>
-            <a:off x="2798064" y="1554480"/>
-            <a:ext cx="2057400" cy="914400"/>
-          </a:xfrm>
-          <a:prstGeom prst="roundRect">
-            <a:avLst>
-              <a:gd name="adj" fmla="val 8000"/>
-            </a:avLst>
-          </a:prstGeom>
-          <a:solidFill>
-            <a:srgbClr val="DCEFEC"/>
-          </a:solidFill>
-          <a:ln w="12700">
-            <a:solidFill>
-              <a:srgbClr val="DCEFEC"/>
-            </a:solidFill>
-            <a:prstDash val="solid"/>
-          </a:ln>
-          <a:effectLst>
-            <a:outerShdw blurRad="76200" dist="25400" dir="5400000" algn="bl" rotWithShape="0">
-              <a:srgbClr val="64748B">
-                <a:alpha val="22000"/>
-              </a:srgbClr>
-            </a:outerShdw>
-          </a:effectLst>
-        </p:spPr>
-      </p:sp>
-      <p:sp>
-        <p:nvSpPr>
-          <p:cNvPr id="8" name="Chain 1 text"/>
-          <p:cNvSpPr txBox="1"/>
-          <p:nvPr/>
-        </p:nvSpPr>
-        <p:spPr>
-          <a:xfrm>
-            <a:off x="2889504" y="1554480"/>
-            <a:ext cx="1874520" cy="914400"/>
-          </a:xfrm>
-          <a:prstGeom prst="rect">
-            <a:avLst/>
-          </a:prstGeom>
-          <a:noFill/>
-          <a:ln/>
-        </p:spPr>
-        <p:txBody>
-          <a:bodyPr wrap="square" lIns="0" tIns="0" rIns="0" bIns="0" rtlCol="0" anchor="ctr"/>
-          <a:lstStyle/>
-          <a:p>
-            <a:pPr marL="0" indent="0" algn="ctr">
-              <a:buNone/>
-            </a:pPr>
-            <a:r>
-              <a:rPr lang="en-US" sz="1500" b="1" dirty="0">
-                <a:solidFill>
-                  <a:srgbClr val="1F2A44"/>
-                </a:solidFill>
-              </a:rPr>
-              <a:t>Canonical attribute</a:t>
-            </a:r>
-            <a:endParaRPr lang="en-US" sz="1500" dirty="0"/>
-          </a:p>
-        </p:txBody>
-      </p:sp>
-      <p:sp>
-        <p:nvSpPr>
-          <p:cNvPr id="9" name="Chain 2">
-            <a:extLst>
-              <a:ext uri="{C183D7F6-B498-43B3-948B-1728B52AA6E4}">
-                <adec:decorative xmlns:adec="http://schemas.microsoft.com/office/drawing/2017/decorative" val="1"/>
-              </a:ext>
-            </a:extLst>
-          </p:cNvPr>
-          <p:cNvSpPr/>
-          <p:nvPr/>
-        </p:nvSpPr>
-        <p:spPr>
-          <a:xfrm>
-            <a:off x="5047488" y="1554480"/>
-            <a:ext cx="2057400" cy="914400"/>
-          </a:xfrm>
-          <a:prstGeom prst="roundRect">
-            <a:avLst>
-              <a:gd name="adj" fmla="val 8000"/>
-            </a:avLst>
-          </a:prstGeom>
-          <a:solidFill>
-            <a:srgbClr val="E4EAF4"/>
-          </a:solidFill>
-          <a:ln w="12700">
-            <a:solidFill>
-              <a:srgbClr val="E4EAF4"/>
-            </a:solidFill>
-            <a:prstDash val="solid"/>
-          </a:ln>
-          <a:effectLst>
-            <a:outerShdw blurRad="76200" dist="25400" dir="5400000" algn="bl" rotWithShape="0">
-              <a:srgbClr val="64748B">
-                <a:alpha val="22000"/>
-              </a:srgbClr>
-            </a:outerShdw>
-          </a:effectLst>
-        </p:spPr>
-      </p:sp>
-      <p:sp>
-        <p:nvSpPr>
-          <p:cNvPr id="10" name="Chain 2 text"/>
-          <p:cNvSpPr txBox="1"/>
-          <p:nvPr/>
-        </p:nvSpPr>
-        <p:spPr>
-          <a:xfrm>
-            <a:off x="5138928" y="1554480"/>
-            <a:ext cx="1874520" cy="914400"/>
-          </a:xfrm>
-          <a:prstGeom prst="rect">
-            <a:avLst/>
-          </a:prstGeom>
-          <a:noFill/>
-          <a:ln/>
-        </p:spPr>
-        <p:txBody>
-          <a:bodyPr wrap="square" lIns="0" tIns="0" rIns="0" bIns="0" rtlCol="0" anchor="ctr"/>
-          <a:lstStyle/>
-          <a:p>
-            <a:pPr marL="0" indent="0" algn="ctr">
-              <a:buNone/>
-            </a:pPr>
-            <a:r>
-              <a:rPr lang="en-US" sz="1500" b="1" dirty="0">
-                <a:solidFill>
-                  <a:srgbClr val="1F2A44"/>
-                </a:solidFill>
-              </a:rPr>
-              <a:t>Rule or access package</a:t>
-            </a:r>
-            <a:endParaRPr lang="en-US" sz="1500" dirty="0"/>
-          </a:p>
-        </p:txBody>
-      </p:sp>
-      <p:sp>
-        <p:nvSpPr>
-          <p:cNvPr id="11" name="Chain 3">
-            <a:extLst>
-              <a:ext uri="{C183D7F6-B498-43B3-948B-1728B52AA6E4}">
-                <adec:decorative xmlns:adec="http://schemas.microsoft.com/office/drawing/2017/decorative" val="1"/>
-              </a:ext>
-            </a:extLst>
-          </p:cNvPr>
-          <p:cNvSpPr/>
-          <p:nvPr/>
-        </p:nvSpPr>
-        <p:spPr>
-          <a:xfrm>
-            <a:off x="7296912" y="1554480"/>
-            <a:ext cx="2057400" cy="914400"/>
-          </a:xfrm>
-          <a:prstGeom prst="roundRect">
-            <a:avLst>
-              <a:gd name="adj" fmla="val 8000"/>
-            </a:avLst>
-          </a:prstGeom>
-          <a:solidFill>
-            <a:srgbClr val="DCEFEC"/>
-          </a:solidFill>
-          <a:ln w="12700">
-            <a:solidFill>
-              <a:srgbClr val="DCEFEC"/>
-            </a:solidFill>
-            <a:prstDash val="solid"/>
-          </a:ln>
-          <a:effectLst>
-            <a:outerShdw blurRad="76200" dist="25400" dir="5400000" algn="bl" rotWithShape="0">
-              <a:srgbClr val="64748B">
-                <a:alpha val="22000"/>
-              </a:srgbClr>
-            </a:outerShdw>
-          </a:effectLst>
-        </p:spPr>
-      </p:sp>
-      <p:sp>
-        <p:nvSpPr>
-          <p:cNvPr id="12" name="Chain 3 text"/>
-          <p:cNvSpPr txBox="1"/>
-          <p:nvPr/>
-        </p:nvSpPr>
-        <p:spPr>
-          <a:xfrm>
-            <a:off x="7388352" y="1554480"/>
-            <a:ext cx="1874520" cy="914400"/>
-          </a:xfrm>
-          <a:prstGeom prst="rect">
-            <a:avLst/>
-          </a:prstGeom>
-          <a:noFill/>
-          <a:ln/>
-        </p:spPr>
-        <p:txBody>
-          <a:bodyPr wrap="square" lIns="0" tIns="0" rIns="0" bIns="0" rtlCol="0" anchor="ctr"/>
-          <a:lstStyle/>
-          <a:p>
-            <a:pPr marL="0" indent="0" algn="ctr">
-              <a:buNone/>
-            </a:pPr>
-            <a:r>
-              <a:rPr lang="en-US" sz="1500" b="1" dirty="0">
-                <a:solidFill>
-                  <a:srgbClr val="1F2A44"/>
-                </a:solidFill>
-              </a:rPr>
-              <a:t>Entitlement</a:t>
-            </a:r>
-            <a:endParaRPr lang="en-US" sz="1500" dirty="0"/>
-          </a:p>
-        </p:txBody>
-      </p:sp>
-      <p:sp>
-        <p:nvSpPr>
-          <p:cNvPr id="13" name="Chain 4">
-            <a:extLst>
-              <a:ext uri="{C183D7F6-B498-43B3-948B-1728B52AA6E4}">
-                <adec:decorative xmlns:adec="http://schemas.microsoft.com/office/drawing/2017/decorative" val="1"/>
-              </a:ext>
-            </a:extLst>
-          </p:cNvPr>
-          <p:cNvSpPr/>
-          <p:nvPr/>
-        </p:nvSpPr>
-        <p:spPr>
-          <a:xfrm>
-            <a:off x="9546336" y="1554480"/>
-            <a:ext cx="2057400" cy="914400"/>
-          </a:xfrm>
-          <a:prstGeom prst="roundRect">
-            <a:avLst>
-              <a:gd name="adj" fmla="val 8000"/>
-            </a:avLst>
-          </a:prstGeom>
-          <a:solidFill>
-            <a:srgbClr val="FBEEDC"/>
-          </a:solidFill>
-          <a:ln w="12700">
-            <a:solidFill>
-              <a:srgbClr val="FBEEDC"/>
-            </a:solidFill>
-            <a:prstDash val="solid"/>
-          </a:ln>
-          <a:effectLst>
-            <a:outerShdw blurRad="76200" dist="25400" dir="5400000" algn="bl" rotWithShape="0">
-              <a:srgbClr val="64748B">
-                <a:alpha val="22000"/>
-              </a:srgbClr>
-            </a:outerShdw>
-          </a:effectLst>
-        </p:spPr>
-      </p:sp>
-      <p:sp>
-        <p:nvSpPr>
-          <p:cNvPr id="14" name="Chain 4 text"/>
-          <p:cNvSpPr txBox="1"/>
-          <p:nvPr/>
-        </p:nvSpPr>
-        <p:spPr>
-          <a:xfrm>
-            <a:off x="9637776" y="1554480"/>
-            <a:ext cx="1874520" cy="914400"/>
-          </a:xfrm>
-          <a:prstGeom prst="rect">
-            <a:avLst/>
-          </a:prstGeom>
-          <a:noFill/>
-          <a:ln/>
-        </p:spPr>
-        <p:txBody>
-          <a:bodyPr wrap="square" lIns="0" tIns="0" rIns="0" bIns="0" rtlCol="0" anchor="ctr"/>
-          <a:lstStyle/>
-          <a:p>
-            <a:pPr marL="0" indent="0" algn="ctr">
-              <a:buNone/>
-            </a:pPr>
-            <a:r>
-              <a:rPr lang="en-US" sz="1500" b="1" dirty="0">
-                <a:solidFill>
-                  <a:srgbClr val="B45309"/>
-                </a:solidFill>
-              </a:rPr>
-              <a:t>Evidence record</a:t>
-            </a:r>
-            <a:endParaRPr lang="en-US" sz="1500" dirty="0"/>
-          </a:p>
-        </p:txBody>
-      </p:sp>
-      <p:sp>
-        <p:nvSpPr>
-          <p:cNvPr id="15" name="Chain note"/>
-          <p:cNvSpPr txBox="1"/>
-          <p:nvPr/>
-        </p:nvSpPr>
-        <p:spPr>
-          <a:xfrm>
-            <a:off x="548640" y="2697480"/>
-            <a:ext cx="11109960" cy="457200"/>
-          </a:xfrm>
-          <a:prstGeom prst="rect">
-            <a:avLst/>
-          </a:prstGeom>
-          <a:noFill/>
-          <a:ln/>
-        </p:spPr>
-        <p:txBody>
-          <a:bodyPr wrap="square" lIns="0" tIns="0" rIns="0" bIns="0" rtlCol="0" anchor="t"/>
-          <a:lstStyle/>
-          <a:p>
-            <a:pPr marL="0" indent="0">
-              <a:buNone/>
-            </a:pPr>
-            <a:r>
-              <a:rPr lang="en-US" sz="1550" i="1" dirty="0">
-                <a:solidFill>
-                  <a:srgbClr val="334155"/>
-                </a:solidFill>
-              </a:rPr>
-              <a:t>Every entitlement traces back to a rule, an approved exception, an authoritative attribute, or a privileged-access decision.</a:t>
-            </a:r>
-            <a:endParaRPr lang="en-US" sz="1550" dirty="0"/>
-          </a:p>
-        </p:txBody>
-      </p:sp>
-      <p:sp>
-        <p:nvSpPr>
-          <p:cNvPr id="16" name="Drift 0">
-            <a:extLst>
-              <a:ext uri="{C183D7F6-B498-43B3-948B-1728B52AA6E4}">
-                <adec:decorative xmlns:adec="http://schemas.microsoft.com/office/drawing/2017/decorative" val="1"/>
-              </a:ext>
-            </a:extLst>
-          </p:cNvPr>
-          <p:cNvSpPr/>
-          <p:nvPr/>
-        </p:nvSpPr>
-        <p:spPr>
-          <a:xfrm>
-            <a:off x="548640" y="3291840"/>
-            <a:ext cx="3611880" cy="1325880"/>
-          </a:xfrm>
-          <a:prstGeom prst="roundRect">
-            <a:avLst>
-              <a:gd name="adj" fmla="val 5517"/>
-            </a:avLst>
-          </a:prstGeom>
-          <a:solidFill>
-            <a:srgbClr val="FFFFFF"/>
-          </a:solidFill>
-          <a:ln w="12700">
-            <a:solidFill>
-              <a:srgbClr val="CBD5E1"/>
-            </a:solidFill>
-            <a:prstDash val="solid"/>
-          </a:ln>
-          <a:effectLst>
-            <a:outerShdw blurRad="76200" dist="25400" dir="5400000" algn="bl" rotWithShape="0">
-              <a:srgbClr val="64748B">
-                <a:alpha val="22000"/>
-              </a:srgbClr>
-            </a:outerShdw>
-          </a:effectLst>
-        </p:spPr>
-      </p:sp>
-      <p:sp>
-        <p:nvSpPr>
-          <p:cNvPr id="17" name="Drift 0 text"/>
-          <p:cNvSpPr txBox="1"/>
-          <p:nvPr/>
-        </p:nvSpPr>
-        <p:spPr>
-          <a:xfrm>
-            <a:off x="731520" y="3383280"/>
-            <a:ext cx="3246120" cy="1188720"/>
-          </a:xfrm>
-          <a:prstGeom prst="rect">
-            <a:avLst/>
-          </a:prstGeom>
-          <a:noFill/>
-          <a:ln/>
-        </p:spPr>
-        <p:txBody>
-          <a:bodyPr wrap="square" lIns="0" tIns="0" rIns="0" bIns="0" rtlCol="0" anchor="t"/>
-          <a:lstStyle/>
-          <a:p>
-            <a:pPr marL="0" indent="0">
-              <a:buNone/>
-            </a:pPr>
-            <a:r>
-              <a:rPr lang="en-US" sz="1500" b="1" dirty="0">
-                <a:solidFill>
-                  <a:srgbClr val="0F766E"/>
-                </a:solidFill>
-              </a:rPr>
-              <a:t>Drift found by comparison</a:t>
-            </a:r>
-            <a:endParaRPr lang="en-US" sz="1400" dirty="0"/>
-          </a:p>
-          <a:p>
-            <a:pPr marL="0" indent="0">
-              <a:buNone/>
-            </a:pPr>
-            <a:r>
-              <a:rPr lang="en-US" sz="1350" dirty="0">
-                <a:solidFill>
-                  <a:schemeClr val="tx2"/>
-                </a:solidFill>
-              </a:rPr>
-              <a:t>Scheduled checks compare HR, the model and the directories</a:t>
-            </a:r>
-            <a:endParaRPr lang="en-US" sz="1400" dirty="0"/>
-          </a:p>
-        </p:txBody>
-      </p:sp>
-      <p:sp>
-        <p:nvSpPr>
-          <p:cNvPr id="18" name="Drift 1">
-            <a:extLst>
-              <a:ext uri="{C183D7F6-B498-43B3-948B-1728B52AA6E4}">
-                <adec:decorative xmlns:adec="http://schemas.microsoft.com/office/drawing/2017/decorative" val="1"/>
-              </a:ext>
-            </a:extLst>
-          </p:cNvPr>
-          <p:cNvSpPr/>
-          <p:nvPr/>
-        </p:nvSpPr>
-        <p:spPr>
-          <a:xfrm>
-            <a:off x="4297680" y="3291840"/>
-            <a:ext cx="3611880" cy="1325880"/>
-          </a:xfrm>
-          <a:prstGeom prst="roundRect">
-            <a:avLst>
-              <a:gd name="adj" fmla="val 5517"/>
-            </a:avLst>
-          </a:prstGeom>
-          <a:solidFill>
-            <a:srgbClr val="FFFFFF"/>
-          </a:solidFill>
-          <a:ln w="12700">
-            <a:solidFill>
-              <a:srgbClr val="CBD5E1"/>
-            </a:solidFill>
-            <a:prstDash val="solid"/>
-          </a:ln>
-          <a:effectLst>
-            <a:outerShdw blurRad="76200" dist="25400" dir="5400000" algn="bl" rotWithShape="0">
-              <a:srgbClr val="64748B">
-                <a:alpha val="22000"/>
-              </a:srgbClr>
-            </a:outerShdw>
-          </a:effectLst>
-        </p:spPr>
-      </p:sp>
-      <p:sp>
-        <p:nvSpPr>
-          <p:cNvPr id="19" name="Drift 1 text"/>
-          <p:cNvSpPr txBox="1"/>
-          <p:nvPr/>
-        </p:nvSpPr>
-        <p:spPr>
-          <a:xfrm>
-            <a:off x="4480560" y="3383280"/>
-            <a:ext cx="3246120" cy="1188720"/>
-          </a:xfrm>
-          <a:prstGeom prst="rect">
-            <a:avLst/>
-          </a:prstGeom>
-          <a:noFill/>
-          <a:ln/>
-        </p:spPr>
-        <p:txBody>
-          <a:bodyPr wrap="square" lIns="0" tIns="0" rIns="0" bIns="0" rtlCol="0" anchor="t"/>
-          <a:lstStyle/>
-          <a:p>
-            <a:pPr marL="0" indent="0">
-              <a:buNone/>
-            </a:pPr>
-            <a:r>
-              <a:rPr lang="en-US" sz="1500" b="1" dirty="0">
-                <a:solidFill>
-                  <a:srgbClr val="0F766E"/>
-                </a:solidFill>
-              </a:rPr>
-              <a:t>Measured in business terms</a:t>
-            </a:r>
-            <a:endParaRPr lang="en-US" sz="1400" dirty="0"/>
-          </a:p>
-          <a:p>
-            <a:pPr marL="0" indent="0">
-              <a:buNone/>
-            </a:pPr>
-            <a:r>
-              <a:rPr lang="en-US" sz="1350" dirty="0">
-                <a:solidFill>
-                  <a:schemeClr val="tx2"/>
-                </a:solidFill>
-              </a:rPr>
-              <a:t>Separation-to-block time, orphan accounts, day-one readiness</a:t>
-            </a:r>
-            <a:endParaRPr lang="en-US" sz="1400" dirty="0"/>
-          </a:p>
-        </p:txBody>
-      </p:sp>
-      <p:sp>
-        <p:nvSpPr>
-          <p:cNvPr id="20" name="Drift 2">
-            <a:extLst>
-              <a:ext uri="{C183D7F6-B498-43B3-948B-1728B52AA6E4}">
-                <adec:decorative xmlns:adec="http://schemas.microsoft.com/office/drawing/2017/decorative" val="1"/>
-              </a:ext>
-            </a:extLst>
-          </p:cNvPr>
-          <p:cNvSpPr/>
-          <p:nvPr/>
-        </p:nvSpPr>
-        <p:spPr>
-          <a:xfrm>
-            <a:off x="8046720" y="3291840"/>
-            <a:ext cx="3611880" cy="1325880"/>
-          </a:xfrm>
-          <a:prstGeom prst="roundRect">
-            <a:avLst>
-              <a:gd name="adj" fmla="val 5517"/>
-            </a:avLst>
-          </a:prstGeom>
-          <a:solidFill>
-            <a:srgbClr val="FFFFFF"/>
-          </a:solidFill>
-          <a:ln w="12700">
-            <a:solidFill>
-              <a:srgbClr val="CBD5E1"/>
-            </a:solidFill>
-            <a:prstDash val="solid"/>
-          </a:ln>
-          <a:effectLst>
-            <a:outerShdw blurRad="76200" dist="25400" dir="5400000" algn="bl" rotWithShape="0">
-              <a:srgbClr val="64748B">
-                <a:alpha val="22000"/>
-              </a:srgbClr>
-            </a:outerShdw>
-          </a:effectLst>
-        </p:spPr>
-      </p:sp>
-      <p:sp>
-        <p:nvSpPr>
-          <p:cNvPr id="21" name="Drift 2 text"/>
-          <p:cNvSpPr txBox="1"/>
-          <p:nvPr/>
-        </p:nvSpPr>
-        <p:spPr>
-          <a:xfrm>
-            <a:off x="8229600" y="3383280"/>
-            <a:ext cx="3246120" cy="1188720"/>
-          </a:xfrm>
-          <a:prstGeom prst="rect">
-            <a:avLst/>
-          </a:prstGeom>
-          <a:noFill/>
-          <a:ln/>
-        </p:spPr>
-        <p:txBody>
-          <a:bodyPr wrap="square" lIns="0" tIns="0" rIns="0" bIns="0" rtlCol="0" anchor="t"/>
-          <a:lstStyle/>
-          <a:p>
-            <a:pPr marL="0" indent="0">
-              <a:buNone/>
-            </a:pPr>
-            <a:r>
-              <a:rPr lang="en-US" sz="1500" b="1" dirty="0">
-                <a:solidFill>
-                  <a:srgbClr val="0F766E"/>
-                </a:solidFill>
-              </a:rPr>
-              <a:t>Kept long enough</a:t>
-            </a:r>
-            <a:endParaRPr lang="en-US" sz="1400" dirty="0"/>
-          </a:p>
-          <a:p>
-            <a:pPr marL="0" indent="0">
-              <a:buNone/>
-            </a:pPr>
-            <a:r>
-              <a:rPr lang="en-US" sz="1350" dirty="0">
-                <a:solidFill>
-                  <a:schemeClr val="tx2"/>
-                </a:solidFill>
-              </a:rPr>
-              <a:t>Entra keeps audit and provisioning logs 30 days with P1/P2 — export from the pilot onward</a:t>
-            </a:r>
-            <a:endParaRPr lang="en-US" sz="1400" dirty="0"/>
-          </a:p>
-        </p:txBody>
-      </p:sp>
-      <p:sp>
-        <p:nvSpPr>
-          <p:cNvPr id="22" name="Evidence">
-            <a:extLst>
-              <a:ext uri="{C183D7F6-B498-43B3-948B-1728B52AA6E4}">
-                <adec:decorative xmlns:adec="http://schemas.microsoft.com/office/drawing/2017/decorative" val="1"/>
-              </a:ext>
-            </a:extLst>
-          </p:cNvPr>
-          <p:cNvSpPr/>
-          <p:nvPr/>
-        </p:nvSpPr>
-        <p:spPr>
-          <a:xfrm>
-            <a:off x="548640" y="4846320"/>
-            <a:ext cx="11109960" cy="1097280"/>
-          </a:xfrm>
-          <a:prstGeom prst="roundRect">
-            <a:avLst>
-              <a:gd name="adj" fmla="val 6667"/>
-            </a:avLst>
-          </a:prstGeom>
-          <a:solidFill>
-            <a:srgbClr val="FFFFFF"/>
-          </a:solidFill>
-          <a:ln w="12700">
-            <a:solidFill>
-              <a:srgbClr val="B45309"/>
-            </a:solidFill>
-            <a:prstDash val="solid"/>
-          </a:ln>
-          <a:effectLst>
-            <a:outerShdw blurRad="76200" dist="25400" dir="5400000" algn="bl" rotWithShape="0">
-              <a:srgbClr val="64748B">
-                <a:alpha val="22000"/>
-              </a:srgbClr>
-            </a:outerShdw>
-          </a:effectLst>
-        </p:spPr>
-      </p:sp>
-      <p:sp>
-        <p:nvSpPr>
-          <p:cNvPr id="23" name="Icon FaFileShield">
-            <a:extLst>
-              <a:ext uri="{C183D7F6-B498-43B3-948B-1728B52AA6E4}">
-                <adec:decorative xmlns:adec="http://schemas.microsoft.com/office/drawing/2017/decorative" val="1"/>
-              </a:ext>
-            </a:extLst>
-          </p:cNvPr>
-          <p:cNvSpPr/>
-          <p:nvPr/>
-        </p:nvSpPr>
-        <p:spPr>
-          <a:xfrm>
-            <a:off x="777240" y="5029200"/>
-            <a:ext cx="731520" cy="731520"/>
-          </a:xfrm>
-          <a:prstGeom prst="ellipse">
-            <a:avLst/>
-          </a:prstGeom>
-          <a:solidFill>
-            <a:srgbClr val="B45309"/>
-          </a:solidFill>
-          <a:ln w="12700">
-            <a:solidFill>
-              <a:srgbClr val="B45309"/>
-            </a:solidFill>
-            <a:prstDash val="solid"/>
-          </a:ln>
-        </p:spPr>
-      </p:sp>
-      <p:pic>
-        <p:nvPicPr>
-          <p:cNvPr id="24" name="Image 0">
-            <a:extLst>
-              <a:ext uri="{C183D7F6-B498-43B3-948B-1728B52AA6E4}">
-                <adec:decorative xmlns:adec="http://schemas.microsoft.com/office/drawing/2017/decorative" val="1"/>
-              </a:ext>
-            </a:extLst>
-          </p:cNvPr>
-          <p:cNvPicPr>
-            <a:picLocks noChangeAspect="1"/>
-          </p:cNvPicPr>
-          <p:nvPr/>
-        </p:nvPicPr>
-        <p:blipFill>
-          <a:blip r:embed="rId5"/>
-          <a:stretch>
-            <a:fillRect/>
-          </a:stretch>
-        </p:blipFill>
-        <p:spPr>
-          <a:xfrm>
-            <a:off x="952805" y="5204765"/>
-            <a:ext cx="380390" cy="380390"/>
-          </a:xfrm>
-          <a:prstGeom prst="rect">
-            <a:avLst/>
-          </a:prstGeom>
-        </p:spPr>
-      </p:pic>
-      <p:sp>
-        <p:nvSpPr>
-          <p:cNvPr id="25" name="Evidence text"/>
-          <p:cNvSpPr txBox="1"/>
-          <p:nvPr/>
-        </p:nvSpPr>
-        <p:spPr>
-          <a:xfrm>
-            <a:off x="1737360" y="4892040"/>
-            <a:ext cx="9738360" cy="1005840"/>
-          </a:xfrm>
-          <a:prstGeom prst="rect">
-            <a:avLst/>
-          </a:prstGeom>
-          <a:noFill/>
-          <a:ln/>
-        </p:spPr>
-        <p:txBody>
-          <a:bodyPr wrap="square" lIns="0" tIns="0" rIns="0" bIns="0" rtlCol="0" anchor="ctr"/>
-          <a:lstStyle/>
-          <a:p>
-            <a:pPr marL="0" indent="0">
-              <a:buNone/>
-            </a:pPr>
-            <a:r>
-              <a:rPr lang="en-US" sz="1650" b="1" dirty="0">
-                <a:solidFill>
-                  <a:srgbClr val="B45309"/>
-                </a:solidFill>
-              </a:rPr>
-              <a:t>Evidence as a byproduct: </a:t>
-            </a:r>
-            <a:r>
-              <a:rPr lang="en-US" sz="1650" dirty="0">
-                <a:solidFill>
-                  <a:schemeClr val="tx2"/>
-                </a:solidFill>
-              </a:rPr>
-              <a:t>the same records that run the lifecycle answer the auditor's question — does every account belong to a current person with a current reason?</a:t>
-            </a:r>
-            <a:endParaRPr lang="en-US" sz="1650" dirty="0"/>
-          </a:p>
-        </p:txBody>
-      </p:sp>
-      <p:sp>
-        <p:nvSpPr>
-          <p:cNvPr id="26" name="Sources"/>
-          <p:cNvSpPr txBox="1"/>
-          <p:nvPr/>
-        </p:nvSpPr>
-        <p:spPr>
-          <a:xfrm>
-            <a:off x="548640" y="6053328"/>
-            <a:ext cx="10424160" cy="292608"/>
-          </a:xfrm>
-          <a:prstGeom prst="rect">
-            <a:avLst/>
-          </a:prstGeom>
-          <a:noFill/>
-          <a:ln/>
-        </p:spPr>
-        <p:txBody>
-          <a:bodyPr wrap="square" lIns="0" tIns="0" rIns="0" bIns="0" rtlCol="0" anchor="t"/>
-          <a:lstStyle/>
-          <a:p>
-            <a:pPr marL="0" indent="0">
-              <a:buNone/>
-            </a:pPr>
-            <a:r>
-              <a:rPr lang="en-US" sz="1000" i="1" dirty="0">
-                <a:solidFill>
-                  <a:srgbClr val="64748B"/>
-                </a:solidFill>
-              </a:rPr>
-              <a:t>Sources: Microsoft Learn — dynamic membership, entitlement management, log retention; NIST SP 800-53 AC-2, CA-7. Book 03, Chapters 10–11.</a:t>
-            </a:r>
-            <a:endParaRPr lang="en-US" sz="1000" dirty="0"/>
-          </a:p>
-        </p:txBody>
-      </p:sp>
-      <p:sp>
-        <p:nvSpPr>
-          <p:cNvPr id="27" name="Slide Number Placeholder 0"/>
-          <p:cNvSpPr>
-            <a:spLocks noGrp="1"/>
-          </p:cNvSpPr>
-          <p:nvPr>
-            <p:ph type="sldNum" sz="quarter" idx="4294967295"/>
-          </p:nvPr>
-        </p:nvSpPr>
-        <p:spPr>
-          <a:xfrm>
-            <a:off x="11155680" y="6400800"/>
-            <a:ext cx="457200" cy="274320"/>
-          </a:xfrm>
-          <a:prstGeom prst="rect">
-            <a:avLst/>
-          </a:prstGeom>
-          <a:extLst>
-            <a:ext uri="{C572A759-6A51-4108-AA02-DFA0A04FC94B}">
-              <ma14:wrappingTextBoxFlag xmlns:ma14="http://schemas.microsoft.com/office/mac/drawingml/2011/main" xmlns="" val="0"/>
-            </a:ext>
-          </a:extLst>
-        </p:spPr>
-        <p:txBody>
-          <a:bodyPr/>
-          <a:lstStyle>
-            <a:lvl1pPr>
-              <a:defRPr sz="1000">
-                <a:solidFill>
-                  <a:schemeClr val="accent5"/>
-                </a:solidFill>
-              </a:defRPr>
-            </a:lvl1pPr>
-          </a:lstStyle>
-          <a:p>
-            <a:pPr algn="r"/>
-            <a:fld id="{F7021451-1387-4CA6-816F-3879F97B5CBC}" type="slidenum">
-              <a:rPr lang="en-US" b="0"/>
-              <a:t>9</a:t>
-            </a:fld>
-            <a:endParaRPr lang="en-US"/>
-          </a:p>
-        </p:txBody>
-      </p:sp>
-      <p:pic>
-        <p:nvPicPr>
-          <p:cNvPr id="28" name="Narration" descr="Narration for this slide; captions available">
-            <a:hlinkClick r:id="" action="ppaction://media"/>
-            <a:extLst>
-              <a:ext uri="{FF2B5EF4-FFF2-40B4-BE49-F238E27FC236}">
-                <a16:creationId xmlns:a16="http://schemas.microsoft.com/office/drawing/2014/main" id="{ED7154DD-5183-D450-67D1-362B2E710EB3}"/>
-              </a:ext>
-            </a:extLst>
-          </p:cNvPr>
-          <p:cNvPicPr>
-            <a:picLocks noChangeAspect="1"/>
-          </p:cNvPicPr>
-          <p:nvPr>
-            <a:audioFile r:link="rId2"/>
-            <p:extLst>
-              <p:ext uri="{DAA4B4D4-6D71-4841-9C94-3DE7FCFB9230}">
-                <p14:media xmlns:p14="http://schemas.microsoft.com/office/powerpoint/2010/main" r:embed="rId1">
-                  <p14:extLst>
-                    <p:ext uri="{3AFAAA56-56D3-431D-BCD4-E75A35582382}">
-                      <p173:tracksInfo xmlns:p173="http://schemas.microsoft.com/office/powerpoint/2017/3/main" displayLoc="slide">
-                        <p173:trackLst>
-                          <p173:track id="{1DFAB087-D4B4-4D6A-B054-5BB2AE777063}" label="English (captions)" lang="en-US" r:embed="rId7"/>
-                        </p173:trackLst>
-                      </p173:tracksInfo>
-                    </p:ext>
-                  </p14:extLst>
-                </p14:media>
-              </p:ext>
-            </p:extLst>
-          </p:nvPr>
-        </p:nvPicPr>
-        <p:blipFill>
-          <a:blip r:embed="rId6"/>
-          <a:stretch>
-            <a:fillRect/>
-          </a:stretch>
-        </p:blipFill>
-        <p:spPr>
-          <a:xfrm>
-            <a:off x="12446000" y="127000"/>
-            <a:ext cx="304800" cy="304800"/>
-          </a:xfrm>
-          <a:prstGeom prst="rect">
-            <a:avLst/>
-          </a:prstGeom>
-        </p:spPr>
-      </p:pic>
-    </p:spTree>
-  </p:cSld>
-  <p:clrMapOvr>
-    <a:masterClrMapping/>
-  </p:clrMapOvr>
-  <mc:AlternateContent xmlns:mc="http://schemas.openxmlformats.org/markup-compatibility/2006">
-    <mc:Choice xmlns:p14="http://schemas.microsoft.com/office/powerpoint/2010/main" Requires="p14">
-      <p:transition spd="slow" p14:dur="2000" advTm="59490"/>
-    </mc:Choice>
-    <mc:Fallback>
-      <p:transition spd="slow" advTm="59490"/>
-    </mc:Fallback>
-  </mc:AlternateContent>
-  <p:timing>
-    <p:tnLst>
-      <p:par>
-        <p:cTn id="1" dur="indefinite" restart="never" nodeType="tmRoot">
-          <p:childTnLst>
-            <p:seq concurrent="1" nextAc="seek">
-              <p:cTn id="2" dur="indefinite" nodeType="mainSeq">
-                <p:childTnLst>
-                  <p:par>
-                    <p:cTn id="3" fill="hold">
-                      <p:stCondLst>
-                        <p:cond delay="indefinite"/>
-                        <p:cond evt="onBegin" delay="0">
-                          <p:tn val="2"/>
-                        </p:cond>
-                      </p:stCondLst>
-                      <p:childTnLst>
-                        <p:par>
-                          <p:cTn id="4" fill="hold">
-                            <p:stCondLst>
-                              <p:cond delay="0"/>
-                            </p:stCondLst>
-                            <p:childTnLst>
-                              <p:par>
-                                <p:cTn id="5" presetID="1" presetClass="mediacall" presetSubtype="0" fill="hold" nodeType="withEffect">
-                                  <p:stCondLst>
-                                    <p:cond delay="0"/>
-                                  </p:stCondLst>
-                                  <p:childTnLst>
-                                    <p:cmd type="call" cmd="playFrom(0.0)">
-                                      <p:cBhvr>
-                                        <p:cTn id="6" dur="55488" fill="hold"/>
-                                        <p:tgtEl>
-                                          <p:spTgt spid="28"/>
                                         </p:tgtEl>
                                       </p:cBhvr>
                                     </p:cmd>
